--- a/PC_Inspector_presentacion.pptx
+++ b/PC_Inspector_presentacion.pptx
@@ -9724,7 +9724,7 @@
                 </a:solidFill>
                 <a:latin typeface="Segoe UI"/>
               </a:rPr>
-              <a:t>— teach-in, unas 30 muestras — y queda como referencia. No se etiqueta ni un solo defecto.</a:t>
+              <a:t>— teach-in, unas 30 muestras — y queda como referencia. No se etiqueta ni un defecto.</a:t>
             </a:r>
           </a:p>
         </p:txBody>
@@ -9780,6 +9780,99 @@
         <p:spPr>
           <a:xfrm>
             <a:off x="1088136" y="2734817"/>
+            <a:ext cx="4581144" cy="494284"/>
+          </a:xfrm>
+          <a:prstGeom prst="rect">
+            <a:avLst/>
+          </a:prstGeom>
+          <a:noFill/>
+        </p:spPr>
+        <p:txBody>
+          <a:bodyPr wrap="square" lIns="0" rIns="0" tIns="0" bIns="0" anchor="t">
+            <a:spAutoFit/>
+          </a:bodyPr>
+          <a:lstStyle/>
+          <a:p>
+            <a:pPr algn="l">
+              <a:lnSpc>
+                <a:spcPct val="122000"/>
+              </a:lnSpc>
+              <a:spcAft>
+                <a:spcPts val="0"/>
+              </a:spcAft>
+            </a:pPr>
+            <a:r>
+              <a:rPr sz="1300" b="1" i="0">
+                <a:solidFill>
+                  <a:srgbClr val="0B0B0B"/>
+                </a:solidFill>
+                <a:latin typeface="Segoe UI"/>
+              </a:rPr>
+              <a:t>Las cotas quedan ancladas a la pieza: </a:t>
+            </a:r>
+            <a:r>
+              <a:rPr sz="1300" b="0" i="0">
+                <a:solidFill>
+                  <a:srgbClr val="52514E"/>
+                </a:solidFill>
+                <a:latin typeface="Segoe UI"/>
+              </a:rPr>
+              <a:t>si llega girada o descentrada, se mueven con ella.</a:t>
+            </a:r>
+          </a:p>
+        </p:txBody>
+      </p:sp>
+      <p:sp>
+        <p:nvSpPr>
+          <p:cNvPr id="9" name="TextBox 8"/>
+          <p:cNvSpPr txBox="1"/>
+          <p:nvPr/>
+        </p:nvSpPr>
+        <p:spPr>
+          <a:xfrm>
+            <a:off x="777240" y="3393693"/>
+            <a:ext cx="201168" cy="274320"/>
+          </a:xfrm>
+          <a:prstGeom prst="rect">
+            <a:avLst/>
+          </a:prstGeom>
+          <a:noFill/>
+        </p:spPr>
+        <p:txBody>
+          <a:bodyPr wrap="square" lIns="0" rIns="0" tIns="0" bIns="0" anchor="t">
+            <a:spAutoFit/>
+          </a:bodyPr>
+          <a:lstStyle/>
+          <a:p>
+            <a:pPr algn="l">
+              <a:lnSpc>
+                <a:spcPct val="100000"/>
+              </a:lnSpc>
+              <a:spcAft>
+                <a:spcPts val="0"/>
+              </a:spcAft>
+            </a:pPr>
+            <a:r>
+              <a:rPr sz="1300" b="0" i="0">
+                <a:solidFill>
+                  <a:srgbClr val="256ABF"/>
+                </a:solidFill>
+                <a:latin typeface="Segoe UI"/>
+              </a:rPr>
+              <a:t>—</a:t>
+            </a:r>
+          </a:p>
+        </p:txBody>
+      </p:sp>
+      <p:sp>
+        <p:nvSpPr>
+          <p:cNvPr id="10" name="TextBox 9"/>
+          <p:cNvSpPr txBox="1"/>
+          <p:nvPr/>
+        </p:nvSpPr>
+        <p:spPr>
+          <a:xfrm>
+            <a:off x="1088136" y="3393693"/>
             <a:ext cx="4581144" cy="695706"/>
           </a:xfrm>
           <a:prstGeom prst="rect">
@@ -9808,7 +9901,7 @@
                 </a:solidFill>
                 <a:latin typeface="Segoe UI"/>
               </a:rPr>
-              <a:t>Sobre ella se dibujan las cotas, </a:t>
+              <a:t>Cada pieza recibe OK/NG </a:t>
             </a:r>
             <a:r>
               <a:rPr sz="1300" b="0" i="0">
@@ -9817,20 +9910,20 @@
                 </a:solidFill>
                 <a:latin typeface="Segoe UI"/>
               </a:rPr>
-              <a:t>que quedan ancladas a la pieza: si llega girada o descentrada, se mueven con ella.</a:t>
-            </a:r>
-          </a:p>
-        </p:txBody>
-      </p:sp>
-      <p:sp>
-        <p:nvSpPr>
-          <p:cNvPr id="9" name="TextBox 8"/>
-          <p:cNvSpPr txBox="1"/>
-          <p:nvPr/>
-        </p:nvSpPr>
-        <p:spPr>
-          <a:xfrm>
-            <a:off x="777240" y="3595115"/>
+              <a:t>con el detalle de qué medida falló y por qué, más historial y estadísticas por día.</a:t>
+            </a:r>
+          </a:p>
+        </p:txBody>
+      </p:sp>
+      <p:sp>
+        <p:nvSpPr>
+          <p:cNvPr id="11" name="TextBox 10"/>
+          <p:cNvSpPr txBox="1"/>
+          <p:nvPr/>
+        </p:nvSpPr>
+        <p:spPr>
+          <a:xfrm>
+            <a:off x="777240" y="4253991"/>
             <a:ext cx="201168" cy="274320"/>
           </a:xfrm>
           <a:prstGeom prst="rect">
@@ -9866,14 +9959,14 @@
       </p:sp>
       <p:sp>
         <p:nvSpPr>
-          <p:cNvPr id="10" name="TextBox 9"/>
-          <p:cNvSpPr txBox="1"/>
-          <p:nvPr/>
-        </p:nvSpPr>
-        <p:spPr>
-          <a:xfrm>
-            <a:off x="1088136" y="3595115"/>
-            <a:ext cx="4581144" cy="695706"/>
+          <p:cNvPr id="12" name="TextBox 11"/>
+          <p:cNvSpPr txBox="1"/>
+          <p:nvPr/>
+        </p:nvSpPr>
+        <p:spPr>
+          <a:xfrm>
+            <a:off x="1088136" y="4253991"/>
+            <a:ext cx="4581144" cy="494284"/>
           </a:xfrm>
           <a:prstGeom prst="rect">
             <a:avLst/>
@@ -9901,7 +9994,7 @@
                 </a:solidFill>
                 <a:latin typeface="Segoe UI"/>
               </a:rPr>
-              <a:t>Cada pieza nueva recibe OK/NG </a:t>
+              <a:t>Todo local. </a:t>
             </a:r>
             <a:r>
               <a:rPr sz="1300" b="0" i="0">
@@ -9910,20 +10003,20 @@
                 </a:solidFill>
                 <a:latin typeface="Segoe UI"/>
               </a:rPr>
-              <a:t>con el detalle de qué medida falló y por qué, más historial y estadísticas por día.</a:t>
-            </a:r>
-          </a:p>
-        </p:txBody>
-      </p:sp>
-      <p:sp>
-        <p:nvSpPr>
-          <p:cNvPr id="11" name="TextBox 10"/>
-          <p:cNvSpPr txBox="1"/>
-          <p:nvPr/>
-        </p:nvSpPr>
-        <p:spPr>
-          <a:xfrm>
-            <a:off x="777240" y="4455413"/>
+              <a:t>Sin nube ni servidor: SQLite en un fichero junto al ejecutable.</a:t>
+            </a:r>
+          </a:p>
+        </p:txBody>
+      </p:sp>
+      <p:sp>
+        <p:nvSpPr>
+          <p:cNvPr id="13" name="TextBox 12"/>
+          <p:cNvSpPr txBox="1"/>
+          <p:nvPr/>
+        </p:nvSpPr>
+        <p:spPr>
+          <a:xfrm>
+            <a:off x="777240" y="4912867"/>
             <a:ext cx="201168" cy="274320"/>
           </a:xfrm>
           <a:prstGeom prst="rect">
@@ -9959,106 +10052,13 @@
       </p:sp>
       <p:sp>
         <p:nvSpPr>
-          <p:cNvPr id="12" name="TextBox 11"/>
-          <p:cNvSpPr txBox="1"/>
-          <p:nvPr/>
-        </p:nvSpPr>
-        <p:spPr>
-          <a:xfrm>
-            <a:off x="1088136" y="4455413"/>
-            <a:ext cx="4581144" cy="494284"/>
-          </a:xfrm>
-          <a:prstGeom prst="rect">
-            <a:avLst/>
-          </a:prstGeom>
-          <a:noFill/>
-        </p:spPr>
-        <p:txBody>
-          <a:bodyPr wrap="square" lIns="0" rIns="0" tIns="0" bIns="0" anchor="t">
-            <a:spAutoFit/>
-          </a:bodyPr>
-          <a:lstStyle/>
-          <a:p>
-            <a:pPr algn="l">
-              <a:lnSpc>
-                <a:spcPct val="122000"/>
-              </a:lnSpc>
-              <a:spcAft>
-                <a:spcPts val="0"/>
-              </a:spcAft>
-            </a:pPr>
-            <a:r>
-              <a:rPr sz="1300" b="1" i="0">
-                <a:solidFill>
-                  <a:srgbClr val="0B0B0B"/>
-                </a:solidFill>
-                <a:latin typeface="Segoe UI"/>
-              </a:rPr>
-              <a:t>Todo local. </a:t>
-            </a:r>
-            <a:r>
-              <a:rPr sz="1300" b="0" i="0">
-                <a:solidFill>
-                  <a:srgbClr val="52514E"/>
-                </a:solidFill>
-                <a:latin typeface="Segoe UI"/>
-              </a:rPr>
-              <a:t>Sin nube, sin internet, sin servidor: SQLite en un fichero junto al ejecutable.</a:t>
-            </a:r>
-          </a:p>
-        </p:txBody>
-      </p:sp>
-      <p:sp>
-        <p:nvSpPr>
-          <p:cNvPr id="13" name="TextBox 12"/>
-          <p:cNvSpPr txBox="1"/>
-          <p:nvPr/>
-        </p:nvSpPr>
-        <p:spPr>
-          <a:xfrm>
-            <a:off x="777240" y="5114289"/>
-            <a:ext cx="201168" cy="274320"/>
-          </a:xfrm>
-          <a:prstGeom prst="rect">
-            <a:avLst/>
-          </a:prstGeom>
-          <a:noFill/>
-        </p:spPr>
-        <p:txBody>
-          <a:bodyPr wrap="square" lIns="0" rIns="0" tIns="0" bIns="0" anchor="t">
-            <a:spAutoFit/>
-          </a:bodyPr>
-          <a:lstStyle/>
-          <a:p>
-            <a:pPr algn="l">
-              <a:lnSpc>
-                <a:spcPct val="100000"/>
-              </a:lnSpc>
-              <a:spcAft>
-                <a:spcPts val="0"/>
-              </a:spcAft>
-            </a:pPr>
-            <a:r>
-              <a:rPr sz="1300" b="0" i="0">
-                <a:solidFill>
-                  <a:srgbClr val="256ABF"/>
-                </a:solidFill>
-                <a:latin typeface="Segoe UI"/>
-              </a:rPr>
-              <a:t>—</a:t>
-            </a:r>
-          </a:p>
-        </p:txBody>
-      </p:sp>
-      <p:sp>
-        <p:nvSpPr>
           <p:cNvPr id="14" name="TextBox 13"/>
           <p:cNvSpPr txBox="1"/>
           <p:nvPr/>
         </p:nvSpPr>
         <p:spPr>
           <a:xfrm>
-            <a:off x="1088136" y="5114289"/>
+            <a:off x="1088136" y="4912867"/>
             <a:ext cx="4581144" cy="494284"/>
           </a:xfrm>
           <a:prstGeom prst="rect">
@@ -10109,7 +10109,7 @@
         </p:nvCxnSpPr>
         <p:spPr>
           <a:xfrm>
-            <a:off x="777240" y="5138928"/>
+            <a:off x="777240" y="5626607"/>
             <a:ext cx="4892040" cy="0"/>
           </a:xfrm>
           <a:prstGeom prst="line">
@@ -10145,7 +10145,7 @@
         </p:nvSpPr>
         <p:spPr>
           <a:xfrm>
-            <a:off x="777240" y="5321808"/>
+            <a:off x="777240" y="5809487"/>
             <a:ext cx="4892040" cy="731520"/>
           </a:xfrm>
           <a:prstGeom prst="rect">

--- a/PC_Inspector_presentacion.pptx
+++ b/PC_Inspector_presentacion.pptx
@@ -5,22 +5,22 @@
     <p:sldMasterId id="2147483648" r:id="rId1"/>
   </p:sldMasterIdLst>
   <p:sldIdLst>
-    <p:sldId id="256" r:id="rId7"/>
-    <p:sldId id="257" r:id="rId8"/>
-    <p:sldId id="258" r:id="rId9"/>
-    <p:sldId id="259" r:id="rId10"/>
-    <p:sldId id="260" r:id="rId11"/>
-    <p:sldId id="261" r:id="rId12"/>
-    <p:sldId id="262" r:id="rId13"/>
-    <p:sldId id="263" r:id="rId14"/>
-    <p:sldId id="264" r:id="rId15"/>
-    <p:sldId id="265" r:id="rId16"/>
-    <p:sldId id="266" r:id="rId17"/>
-    <p:sldId id="267" r:id="rId18"/>
-    <p:sldId id="268" r:id="rId19"/>
-    <p:sldId id="269" r:id="rId20"/>
+    <p:sldId id="256" r:id="rId2"/>
+    <p:sldId id="257" r:id="rId3"/>
+    <p:sldId id="258" r:id="rId4"/>
+    <p:sldId id="259" r:id="rId5"/>
+    <p:sldId id="260" r:id="rId6"/>
+    <p:sldId id="261" r:id="rId7"/>
+    <p:sldId id="262" r:id="rId8"/>
+    <p:sldId id="263" r:id="rId9"/>
+    <p:sldId id="264" r:id="rId10"/>
+    <p:sldId id="265" r:id="rId11"/>
+    <p:sldId id="266" r:id="rId12"/>
+    <p:sldId id="267" r:id="rId13"/>
+    <p:sldId id="268" r:id="rId14"/>
+    <p:sldId id="269" r:id="rId15"/>
   </p:sldIdLst>
-  <p:sldSz cx="12191695" cy="6858000" type="screen4x3"/>
+  <p:sldSz cx="12192000" cy="6858000"/>
   <p:notesSz cx="6858000" cy="9144000"/>
   <p:defaultTextStyle>
     <a:defPPr>
@@ -117,6 +117,22 @@
       </a:defRPr>
     </a:lvl9pPr>
   </p:defaultTextStyle>
+  <p:extLst>
+    <p:ext uri="{EFAFB233-063F-42B5-8137-9DF3F51BA10A}">
+      <p15:sldGuideLst xmlns:p15="http://schemas.microsoft.com/office/powerpoint/2012/main">
+        <p15:guide id="1" orient="horz" pos="2160">
+          <p15:clr>
+            <a:srgbClr val="A4A3A4"/>
+          </p15:clr>
+        </p15:guide>
+        <p15:guide id="2" pos="2880">
+          <p15:clr>
+            <a:srgbClr val="A4A3A4"/>
+          </p15:clr>
+        </p15:guide>
+      </p15:sldGuideLst>
+    </p:ext>
+  </p:extLst>
 </p:presentation>
 </file>
 
@@ -158,10 +174,9 @@
           <a:lstStyle/>
           <a:p>
             <a:r>
-              <a:rPr lang="en-US" smtClean="0"/>
+              <a:rPr lang="en-US"/>
               <a:t>Click to edit Master title style</a:t>
             </a:r>
-            <a:endParaRPr lang="en-US"/>
           </a:p>
         </p:txBody>
       </p:sp>
@@ -277,10 +292,9 @@
           </a:lstStyle>
           <a:p>
             <a:r>
-              <a:rPr lang="en-US" smtClean="0"/>
+              <a:rPr lang="en-US"/>
               <a:t>Click to edit Master subtitle style</a:t>
             </a:r>
-            <a:endParaRPr lang="en-US"/>
           </a:p>
         </p:txBody>
       </p:sp>
@@ -301,7 +315,7 @@
           <a:p>
             <a:fld id="{5BCAD085-E8A6-8845-BD4E-CB4CCA059FC4}" type="datetimeFigureOut">
               <a:rPr lang="en-US" smtClean="0"/>
-              <a:t>1/27/13</a:t>
+              <a:t>8/21/2026</a:t>
             </a:fld>
             <a:endParaRPr lang="en-US"/>
           </a:p>
@@ -343,7 +357,7 @@
           <a:p>
             <a:fld id="{C1FF6DA9-008F-8B48-92A6-B652298478BF}" type="slidenum">
               <a:rPr lang="en-US" smtClean="0"/>
-              <a:t>‹#›</a:t>
+              <a:t>‹Nº›</a:t>
             </a:fld>
             <a:endParaRPr lang="en-US"/>
           </a:p>
@@ -395,10 +409,9 @@
           <a:lstStyle/>
           <a:p>
             <a:r>
-              <a:rPr lang="en-US" smtClean="0"/>
+              <a:rPr lang="en-US"/>
               <a:t>Click to edit Master title style</a:t>
             </a:r>
-            <a:endParaRPr lang="en-US"/>
           </a:p>
         </p:txBody>
       </p:sp>
@@ -419,38 +432,37 @@
           <a:p>
             <a:pPr lvl="0"/>
             <a:r>
-              <a:rPr lang="en-US" smtClean="0"/>
+              <a:rPr lang="en-US"/>
               <a:t>Click to edit Master text styles</a:t>
             </a:r>
           </a:p>
           <a:p>
             <a:pPr lvl="1"/>
             <a:r>
-              <a:rPr lang="en-US" smtClean="0"/>
+              <a:rPr lang="en-US"/>
               <a:t>Second level</a:t>
             </a:r>
           </a:p>
           <a:p>
             <a:pPr lvl="2"/>
             <a:r>
-              <a:rPr lang="en-US" smtClean="0"/>
+              <a:rPr lang="en-US"/>
               <a:t>Third level</a:t>
             </a:r>
           </a:p>
           <a:p>
             <a:pPr lvl="3"/>
             <a:r>
-              <a:rPr lang="en-US" smtClean="0"/>
+              <a:rPr lang="en-US"/>
               <a:t>Fourth level</a:t>
             </a:r>
           </a:p>
           <a:p>
             <a:pPr lvl="4"/>
             <a:r>
-              <a:rPr lang="en-US" smtClean="0"/>
+              <a:rPr lang="en-US"/>
               <a:t>Fifth level</a:t>
             </a:r>
-            <a:endParaRPr lang="en-US"/>
           </a:p>
         </p:txBody>
       </p:sp>
@@ -471,7 +483,7 @@
           <a:p>
             <a:fld id="{5BCAD085-E8A6-8845-BD4E-CB4CCA059FC4}" type="datetimeFigureOut">
               <a:rPr lang="en-US" smtClean="0"/>
-              <a:t>1/27/13</a:t>
+              <a:t>8/21/2026</a:t>
             </a:fld>
             <a:endParaRPr lang="en-US"/>
           </a:p>
@@ -513,7 +525,7 @@
           <a:p>
             <a:fld id="{C1FF6DA9-008F-8B48-92A6-B652298478BF}" type="slidenum">
               <a:rPr lang="en-US" smtClean="0"/>
-              <a:t>‹#›</a:t>
+              <a:t>‹Nº›</a:t>
             </a:fld>
             <a:endParaRPr lang="en-US"/>
           </a:p>
@@ -570,10 +582,9 @@
           <a:lstStyle/>
           <a:p>
             <a:r>
-              <a:rPr lang="en-US" smtClean="0"/>
+              <a:rPr lang="en-US"/>
               <a:t>Click to edit Master title style</a:t>
             </a:r>
-            <a:endParaRPr lang="en-US"/>
           </a:p>
         </p:txBody>
       </p:sp>
@@ -599,38 +610,37 @@
           <a:p>
             <a:pPr lvl="0"/>
             <a:r>
-              <a:rPr lang="en-US" smtClean="0"/>
+              <a:rPr lang="en-US"/>
               <a:t>Click to edit Master text styles</a:t>
             </a:r>
           </a:p>
           <a:p>
             <a:pPr lvl="1"/>
             <a:r>
-              <a:rPr lang="en-US" smtClean="0"/>
+              <a:rPr lang="en-US"/>
               <a:t>Second level</a:t>
             </a:r>
           </a:p>
           <a:p>
             <a:pPr lvl="2"/>
             <a:r>
-              <a:rPr lang="en-US" smtClean="0"/>
+              <a:rPr lang="en-US"/>
               <a:t>Third level</a:t>
             </a:r>
           </a:p>
           <a:p>
             <a:pPr lvl="3"/>
             <a:r>
-              <a:rPr lang="en-US" smtClean="0"/>
+              <a:rPr lang="en-US"/>
               <a:t>Fourth level</a:t>
             </a:r>
           </a:p>
           <a:p>
             <a:pPr lvl="4"/>
             <a:r>
-              <a:rPr lang="en-US" smtClean="0"/>
+              <a:rPr lang="en-US"/>
               <a:t>Fifth level</a:t>
             </a:r>
-            <a:endParaRPr lang="en-US"/>
           </a:p>
         </p:txBody>
       </p:sp>
@@ -651,7 +661,7 @@
           <a:p>
             <a:fld id="{5BCAD085-E8A6-8845-BD4E-CB4CCA059FC4}" type="datetimeFigureOut">
               <a:rPr lang="en-US" smtClean="0"/>
-              <a:t>1/27/13</a:t>
+              <a:t>8/21/2026</a:t>
             </a:fld>
             <a:endParaRPr lang="en-US"/>
           </a:p>
@@ -693,7 +703,7 @@
           <a:p>
             <a:fld id="{C1FF6DA9-008F-8B48-92A6-B652298478BF}" type="slidenum">
               <a:rPr lang="en-US" smtClean="0"/>
-              <a:t>‹#›</a:t>
+              <a:t>‹Nº›</a:t>
             </a:fld>
             <a:endParaRPr lang="en-US"/>
           </a:p>
@@ -745,10 +755,9 @@
           <a:lstStyle/>
           <a:p>
             <a:r>
-              <a:rPr lang="en-US" smtClean="0"/>
+              <a:rPr lang="en-US"/>
               <a:t>Click to edit Master title style</a:t>
             </a:r>
-            <a:endParaRPr lang="en-US"/>
           </a:p>
         </p:txBody>
       </p:sp>
@@ -769,38 +778,37 @@
           <a:p>
             <a:pPr lvl="0"/>
             <a:r>
-              <a:rPr lang="en-US" smtClean="0"/>
+              <a:rPr lang="en-US"/>
               <a:t>Click to edit Master text styles</a:t>
             </a:r>
           </a:p>
           <a:p>
             <a:pPr lvl="1"/>
             <a:r>
-              <a:rPr lang="en-US" smtClean="0"/>
+              <a:rPr lang="en-US"/>
               <a:t>Second level</a:t>
             </a:r>
           </a:p>
           <a:p>
             <a:pPr lvl="2"/>
             <a:r>
-              <a:rPr lang="en-US" smtClean="0"/>
+              <a:rPr lang="en-US"/>
               <a:t>Third level</a:t>
             </a:r>
           </a:p>
           <a:p>
             <a:pPr lvl="3"/>
             <a:r>
-              <a:rPr lang="en-US" smtClean="0"/>
+              <a:rPr lang="en-US"/>
               <a:t>Fourth level</a:t>
             </a:r>
           </a:p>
           <a:p>
             <a:pPr lvl="4"/>
             <a:r>
-              <a:rPr lang="en-US" smtClean="0"/>
+              <a:rPr lang="en-US"/>
               <a:t>Fifth level</a:t>
             </a:r>
-            <a:endParaRPr lang="en-US"/>
           </a:p>
         </p:txBody>
       </p:sp>
@@ -821,7 +829,7 @@
           <a:p>
             <a:fld id="{5BCAD085-E8A6-8845-BD4E-CB4CCA059FC4}" type="datetimeFigureOut">
               <a:rPr lang="en-US" smtClean="0"/>
-              <a:t>1/27/13</a:t>
+              <a:t>8/21/2026</a:t>
             </a:fld>
             <a:endParaRPr lang="en-US"/>
           </a:p>
@@ -863,7 +871,7 @@
           <a:p>
             <a:fld id="{C1FF6DA9-008F-8B48-92A6-B652298478BF}" type="slidenum">
               <a:rPr lang="en-US" smtClean="0"/>
-              <a:t>‹#›</a:t>
+              <a:t>‹Nº›</a:t>
             </a:fld>
             <a:endParaRPr lang="en-US"/>
           </a:p>
@@ -924,10 +932,9 @@
           </a:lstStyle>
           <a:p>
             <a:r>
-              <a:rPr lang="en-US" smtClean="0"/>
+              <a:rPr lang="en-US"/>
               <a:t>Click to edit Master title style</a:t>
             </a:r>
-            <a:endParaRPr lang="en-US"/>
           </a:p>
         </p:txBody>
       </p:sp>
@@ -1044,7 +1051,7 @@
           <a:p>
             <a:pPr lvl="0"/>
             <a:r>
-              <a:rPr lang="en-US" smtClean="0"/>
+              <a:rPr lang="en-US"/>
               <a:t>Click to edit Master text styles</a:t>
             </a:r>
           </a:p>
@@ -1067,7 +1074,7 @@
           <a:p>
             <a:fld id="{5BCAD085-E8A6-8845-BD4E-CB4CCA059FC4}" type="datetimeFigureOut">
               <a:rPr lang="en-US" smtClean="0"/>
-              <a:t>1/27/13</a:t>
+              <a:t>8/21/2026</a:t>
             </a:fld>
             <a:endParaRPr lang="en-US"/>
           </a:p>
@@ -1109,7 +1116,7 @@
           <a:p>
             <a:fld id="{C1FF6DA9-008F-8B48-92A6-B652298478BF}" type="slidenum">
               <a:rPr lang="en-US" smtClean="0"/>
-              <a:t>‹#›</a:t>
+              <a:t>‹Nº›</a:t>
             </a:fld>
             <a:endParaRPr lang="en-US"/>
           </a:p>
@@ -1161,10 +1168,9 @@
           <a:lstStyle/>
           <a:p>
             <a:r>
-              <a:rPr lang="en-US" smtClean="0"/>
+              <a:rPr lang="en-US"/>
               <a:t>Click to edit Master title style</a:t>
             </a:r>
-            <a:endParaRPr lang="en-US"/>
           </a:p>
         </p:txBody>
       </p:sp>
@@ -1218,38 +1224,37 @@
           <a:p>
             <a:pPr lvl="0"/>
             <a:r>
-              <a:rPr lang="en-US" smtClean="0"/>
+              <a:rPr lang="en-US"/>
               <a:t>Click to edit Master text styles</a:t>
             </a:r>
           </a:p>
           <a:p>
             <a:pPr lvl="1"/>
             <a:r>
-              <a:rPr lang="en-US" smtClean="0"/>
+              <a:rPr lang="en-US"/>
               <a:t>Second level</a:t>
             </a:r>
           </a:p>
           <a:p>
             <a:pPr lvl="2"/>
             <a:r>
-              <a:rPr lang="en-US" smtClean="0"/>
+              <a:rPr lang="en-US"/>
               <a:t>Third level</a:t>
             </a:r>
           </a:p>
           <a:p>
             <a:pPr lvl="3"/>
             <a:r>
-              <a:rPr lang="en-US" smtClean="0"/>
+              <a:rPr lang="en-US"/>
               <a:t>Fourth level</a:t>
             </a:r>
           </a:p>
           <a:p>
             <a:pPr lvl="4"/>
             <a:r>
-              <a:rPr lang="en-US" smtClean="0"/>
+              <a:rPr lang="en-US"/>
               <a:t>Fifth level</a:t>
             </a:r>
-            <a:endParaRPr lang="en-US"/>
           </a:p>
         </p:txBody>
       </p:sp>
@@ -1303,38 +1308,37 @@
           <a:p>
             <a:pPr lvl="0"/>
             <a:r>
-              <a:rPr lang="en-US" smtClean="0"/>
+              <a:rPr lang="en-US"/>
               <a:t>Click to edit Master text styles</a:t>
             </a:r>
           </a:p>
           <a:p>
             <a:pPr lvl="1"/>
             <a:r>
-              <a:rPr lang="en-US" smtClean="0"/>
+              <a:rPr lang="en-US"/>
               <a:t>Second level</a:t>
             </a:r>
           </a:p>
           <a:p>
             <a:pPr lvl="2"/>
             <a:r>
-              <a:rPr lang="en-US" smtClean="0"/>
+              <a:rPr lang="en-US"/>
               <a:t>Third level</a:t>
             </a:r>
           </a:p>
           <a:p>
             <a:pPr lvl="3"/>
             <a:r>
-              <a:rPr lang="en-US" smtClean="0"/>
+              <a:rPr lang="en-US"/>
               <a:t>Fourth level</a:t>
             </a:r>
           </a:p>
           <a:p>
             <a:pPr lvl="4"/>
             <a:r>
-              <a:rPr lang="en-US" smtClean="0"/>
+              <a:rPr lang="en-US"/>
               <a:t>Fifth level</a:t>
             </a:r>
-            <a:endParaRPr lang="en-US"/>
           </a:p>
         </p:txBody>
       </p:sp>
@@ -1355,7 +1359,7 @@
           <a:p>
             <a:fld id="{5BCAD085-E8A6-8845-BD4E-CB4CCA059FC4}" type="datetimeFigureOut">
               <a:rPr lang="en-US" smtClean="0"/>
-              <a:t>1/27/13</a:t>
+              <a:t>8/21/2026</a:t>
             </a:fld>
             <a:endParaRPr lang="en-US"/>
           </a:p>
@@ -1397,7 +1401,7 @@
           <a:p>
             <a:fld id="{C1FF6DA9-008F-8B48-92A6-B652298478BF}" type="slidenum">
               <a:rPr lang="en-US" smtClean="0"/>
-              <a:t>‹#›</a:t>
+              <a:t>‹Nº›</a:t>
             </a:fld>
             <a:endParaRPr lang="en-US"/>
           </a:p>
@@ -1453,10 +1457,9 @@
           </a:lstStyle>
           <a:p>
             <a:r>
-              <a:rPr lang="en-US" smtClean="0"/>
+              <a:rPr lang="en-US"/>
               <a:t>Click to edit Master title style</a:t>
             </a:r>
-            <a:endParaRPr lang="en-US"/>
           </a:p>
         </p:txBody>
       </p:sp>
@@ -1519,7 +1522,7 @@
           <a:p>
             <a:pPr lvl="0"/>
             <a:r>
-              <a:rPr lang="en-US" smtClean="0"/>
+              <a:rPr lang="en-US"/>
               <a:t>Click to edit Master text styles</a:t>
             </a:r>
           </a:p>
@@ -1575,38 +1578,37 @@
           <a:p>
             <a:pPr lvl="0"/>
             <a:r>
-              <a:rPr lang="en-US" smtClean="0"/>
+              <a:rPr lang="en-US"/>
               <a:t>Click to edit Master text styles</a:t>
             </a:r>
           </a:p>
           <a:p>
             <a:pPr lvl="1"/>
             <a:r>
-              <a:rPr lang="en-US" smtClean="0"/>
+              <a:rPr lang="en-US"/>
               <a:t>Second level</a:t>
             </a:r>
           </a:p>
           <a:p>
             <a:pPr lvl="2"/>
             <a:r>
-              <a:rPr lang="en-US" smtClean="0"/>
+              <a:rPr lang="en-US"/>
               <a:t>Third level</a:t>
             </a:r>
           </a:p>
           <a:p>
             <a:pPr lvl="3"/>
             <a:r>
-              <a:rPr lang="en-US" smtClean="0"/>
+              <a:rPr lang="en-US"/>
               <a:t>Fourth level</a:t>
             </a:r>
           </a:p>
           <a:p>
             <a:pPr lvl="4"/>
             <a:r>
-              <a:rPr lang="en-US" smtClean="0"/>
+              <a:rPr lang="en-US"/>
               <a:t>Fifth level</a:t>
             </a:r>
-            <a:endParaRPr lang="en-US"/>
           </a:p>
         </p:txBody>
       </p:sp>
@@ -1669,7 +1671,7 @@
           <a:p>
             <a:pPr lvl="0"/>
             <a:r>
-              <a:rPr lang="en-US" smtClean="0"/>
+              <a:rPr lang="en-US"/>
               <a:t>Click to edit Master text styles</a:t>
             </a:r>
           </a:p>
@@ -1725,38 +1727,37 @@
           <a:p>
             <a:pPr lvl="0"/>
             <a:r>
-              <a:rPr lang="en-US" smtClean="0"/>
+              <a:rPr lang="en-US"/>
               <a:t>Click to edit Master text styles</a:t>
             </a:r>
           </a:p>
           <a:p>
             <a:pPr lvl="1"/>
             <a:r>
-              <a:rPr lang="en-US" smtClean="0"/>
+              <a:rPr lang="en-US"/>
               <a:t>Second level</a:t>
             </a:r>
           </a:p>
           <a:p>
             <a:pPr lvl="2"/>
             <a:r>
-              <a:rPr lang="en-US" smtClean="0"/>
+              <a:rPr lang="en-US"/>
               <a:t>Third level</a:t>
             </a:r>
           </a:p>
           <a:p>
             <a:pPr lvl="3"/>
             <a:r>
-              <a:rPr lang="en-US" smtClean="0"/>
+              <a:rPr lang="en-US"/>
               <a:t>Fourth level</a:t>
             </a:r>
           </a:p>
           <a:p>
             <a:pPr lvl="4"/>
             <a:r>
-              <a:rPr lang="en-US" smtClean="0"/>
+              <a:rPr lang="en-US"/>
               <a:t>Fifth level</a:t>
             </a:r>
-            <a:endParaRPr lang="en-US"/>
           </a:p>
         </p:txBody>
       </p:sp>
@@ -1777,7 +1778,7 @@
           <a:p>
             <a:fld id="{5BCAD085-E8A6-8845-BD4E-CB4CCA059FC4}" type="datetimeFigureOut">
               <a:rPr lang="en-US" smtClean="0"/>
-              <a:t>1/27/13</a:t>
+              <a:t>8/21/2026</a:t>
             </a:fld>
             <a:endParaRPr lang="en-US"/>
           </a:p>
@@ -1819,7 +1820,7 @@
           <a:p>
             <a:fld id="{C1FF6DA9-008F-8B48-92A6-B652298478BF}" type="slidenum">
               <a:rPr lang="en-US" smtClean="0"/>
-              <a:t>‹#›</a:t>
+              <a:t>‹Nº›</a:t>
             </a:fld>
             <a:endParaRPr lang="en-US"/>
           </a:p>
@@ -1871,10 +1872,9 @@
           <a:lstStyle/>
           <a:p>
             <a:r>
-              <a:rPr lang="en-US" smtClean="0"/>
+              <a:rPr lang="en-US"/>
               <a:t>Click to edit Master title style</a:t>
             </a:r>
-            <a:endParaRPr lang="en-US"/>
           </a:p>
         </p:txBody>
       </p:sp>
@@ -1895,7 +1895,7 @@
           <a:p>
             <a:fld id="{5BCAD085-E8A6-8845-BD4E-CB4CCA059FC4}" type="datetimeFigureOut">
               <a:rPr lang="en-US" smtClean="0"/>
-              <a:t>1/27/13</a:t>
+              <a:t>8/21/2026</a:t>
             </a:fld>
             <a:endParaRPr lang="en-US"/>
           </a:p>
@@ -1937,7 +1937,7 @@
           <a:p>
             <a:fld id="{C1FF6DA9-008F-8B48-92A6-B652298478BF}" type="slidenum">
               <a:rPr lang="en-US" smtClean="0"/>
-              <a:t>‹#›</a:t>
+              <a:t>‹Nº›</a:t>
             </a:fld>
             <a:endParaRPr lang="en-US"/>
           </a:p>
@@ -1990,7 +1990,7 @@
           <a:p>
             <a:fld id="{5BCAD085-E8A6-8845-BD4E-CB4CCA059FC4}" type="datetimeFigureOut">
               <a:rPr lang="en-US" smtClean="0"/>
-              <a:t>1/27/13</a:t>
+              <a:t>8/21/2026</a:t>
             </a:fld>
             <a:endParaRPr lang="en-US"/>
           </a:p>
@@ -2032,7 +2032,7 @@
           <a:p>
             <a:fld id="{C1FF6DA9-008F-8B48-92A6-B652298478BF}" type="slidenum">
               <a:rPr lang="en-US" smtClean="0"/>
-              <a:t>‹#›</a:t>
+              <a:t>‹Nº›</a:t>
             </a:fld>
             <a:endParaRPr lang="en-US"/>
           </a:p>
@@ -2093,10 +2093,9 @@
           </a:lstStyle>
           <a:p>
             <a:r>
-              <a:rPr lang="en-US" smtClean="0"/>
+              <a:rPr lang="en-US"/>
               <a:t>Click to edit Master title style</a:t>
             </a:r>
-            <a:endParaRPr lang="en-US"/>
           </a:p>
         </p:txBody>
       </p:sp>
@@ -2150,38 +2149,37 @@
           <a:p>
             <a:pPr lvl="0"/>
             <a:r>
-              <a:rPr lang="en-US" smtClean="0"/>
+              <a:rPr lang="en-US"/>
               <a:t>Click to edit Master text styles</a:t>
             </a:r>
           </a:p>
           <a:p>
             <a:pPr lvl="1"/>
             <a:r>
-              <a:rPr lang="en-US" smtClean="0"/>
+              <a:rPr lang="en-US"/>
               <a:t>Second level</a:t>
             </a:r>
           </a:p>
           <a:p>
             <a:pPr lvl="2"/>
             <a:r>
-              <a:rPr lang="en-US" smtClean="0"/>
+              <a:rPr lang="en-US"/>
               <a:t>Third level</a:t>
             </a:r>
           </a:p>
           <a:p>
             <a:pPr lvl="3"/>
             <a:r>
-              <a:rPr lang="en-US" smtClean="0"/>
+              <a:rPr lang="en-US"/>
               <a:t>Fourth level</a:t>
             </a:r>
           </a:p>
           <a:p>
             <a:pPr lvl="4"/>
             <a:r>
-              <a:rPr lang="en-US" smtClean="0"/>
+              <a:rPr lang="en-US"/>
               <a:t>Fifth level</a:t>
             </a:r>
-            <a:endParaRPr lang="en-US"/>
           </a:p>
         </p:txBody>
       </p:sp>
@@ -2244,7 +2242,7 @@
           <a:p>
             <a:pPr lvl="0"/>
             <a:r>
-              <a:rPr lang="en-US" smtClean="0"/>
+              <a:rPr lang="en-US"/>
               <a:t>Click to edit Master text styles</a:t>
             </a:r>
           </a:p>
@@ -2267,7 +2265,7 @@
           <a:p>
             <a:fld id="{5BCAD085-E8A6-8845-BD4E-CB4CCA059FC4}" type="datetimeFigureOut">
               <a:rPr lang="en-US" smtClean="0"/>
-              <a:t>1/27/13</a:t>
+              <a:t>8/21/2026</a:t>
             </a:fld>
             <a:endParaRPr lang="en-US"/>
           </a:p>
@@ -2309,7 +2307,7 @@
           <a:p>
             <a:fld id="{C1FF6DA9-008F-8B48-92A6-B652298478BF}" type="slidenum">
               <a:rPr lang="en-US" smtClean="0"/>
-              <a:t>‹#›</a:t>
+              <a:t>‹Nº›</a:t>
             </a:fld>
             <a:endParaRPr lang="en-US"/>
           </a:p>
@@ -2370,10 +2368,9 @@
           </a:lstStyle>
           <a:p>
             <a:r>
-              <a:rPr lang="en-US" smtClean="0"/>
+              <a:rPr lang="en-US"/>
               <a:t>Click to edit Master title style</a:t>
             </a:r>
-            <a:endParaRPr lang="en-US"/>
           </a:p>
         </p:txBody>
       </p:sp>
@@ -2497,7 +2494,7 @@
           <a:p>
             <a:pPr lvl="0"/>
             <a:r>
-              <a:rPr lang="en-US" smtClean="0"/>
+              <a:rPr lang="en-US"/>
               <a:t>Click to edit Master text styles</a:t>
             </a:r>
           </a:p>
@@ -2520,7 +2517,7 @@
           <a:p>
             <a:fld id="{5BCAD085-E8A6-8845-BD4E-CB4CCA059FC4}" type="datetimeFigureOut">
               <a:rPr lang="en-US" smtClean="0"/>
-              <a:t>1/27/13</a:t>
+              <a:t>8/21/2026</a:t>
             </a:fld>
             <a:endParaRPr lang="en-US"/>
           </a:p>
@@ -2562,7 +2559,7 @@
           <a:p>
             <a:fld id="{C1FF6DA9-008F-8B48-92A6-B652298478BF}" type="slidenum">
               <a:rPr lang="en-US" smtClean="0"/>
-              <a:t>‹#›</a:t>
+              <a:t>‹Nº›</a:t>
             </a:fld>
             <a:endParaRPr lang="en-US"/>
           </a:p>
@@ -2629,10 +2626,9 @@
           <a:lstStyle/>
           <a:p>
             <a:r>
-              <a:rPr lang="en-US" smtClean="0"/>
+              <a:rPr lang="en-US"/>
               <a:t>Click to edit Master title style</a:t>
             </a:r>
-            <a:endParaRPr lang="en-US"/>
           </a:p>
         </p:txBody>
       </p:sp>
@@ -2663,38 +2659,37 @@
           <a:p>
             <a:pPr lvl="0"/>
             <a:r>
-              <a:rPr lang="en-US" smtClean="0"/>
+              <a:rPr lang="en-US"/>
               <a:t>Click to edit Master text styles</a:t>
             </a:r>
           </a:p>
           <a:p>
             <a:pPr lvl="1"/>
             <a:r>
-              <a:rPr lang="en-US" smtClean="0"/>
+              <a:rPr lang="en-US"/>
               <a:t>Second level</a:t>
             </a:r>
           </a:p>
           <a:p>
             <a:pPr lvl="2"/>
             <a:r>
-              <a:rPr lang="en-US" smtClean="0"/>
+              <a:rPr lang="en-US"/>
               <a:t>Third level</a:t>
             </a:r>
           </a:p>
           <a:p>
             <a:pPr lvl="3"/>
             <a:r>
-              <a:rPr lang="en-US" smtClean="0"/>
+              <a:rPr lang="en-US"/>
               <a:t>Fourth level</a:t>
             </a:r>
           </a:p>
           <a:p>
             <a:pPr lvl="4"/>
             <a:r>
-              <a:rPr lang="en-US" smtClean="0"/>
+              <a:rPr lang="en-US"/>
               <a:t>Fifth level</a:t>
             </a:r>
-            <a:endParaRPr lang="en-US"/>
           </a:p>
         </p:txBody>
       </p:sp>
@@ -2733,7 +2728,7 @@
           <a:p>
             <a:fld id="{5BCAD085-E8A6-8845-BD4E-CB4CCA059FC4}" type="datetimeFigureOut">
               <a:rPr lang="en-US" smtClean="0"/>
-              <a:t>1/27/13</a:t>
+              <a:t>8/21/2026</a:t>
             </a:fld>
             <a:endParaRPr lang="en-US"/>
           </a:p>
@@ -2811,7 +2806,7 @@
           <a:p>
             <a:fld id="{C1FF6DA9-008F-8B48-92A6-B652298478BF}" type="slidenum">
               <a:rPr lang="en-US" smtClean="0"/>
-              <a:t>‹#›</a:t>
+              <a:t>‹Nº›</a:t>
             </a:fld>
             <a:endParaRPr lang="en-US"/>
           </a:p>
@@ -3092,7 +3087,7 @@
 </file>
 
 <file path=ppt/slides/slide1.xml><?xml version="1.0" encoding="utf-8"?>
-<p:sld xmlns:a="http://schemas.openxmlformats.org/drawingml/2006/main" xmlns:p="http://schemas.openxmlformats.org/presentationml/2006/main" xmlns:r="http://schemas.openxmlformats.org/officeDocument/2006/relationships">
+<p:sld xmlns:a="http://schemas.openxmlformats.org/drawingml/2006/main" xmlns:r="http://schemas.openxmlformats.org/officeDocument/2006/relationships" xmlns:p="http://schemas.openxmlformats.org/presentationml/2006/main">
   <p:cSld>
     <p:bg>
       <p:bgPr>
@@ -3108,7 +3103,14 @@
         <p:cNvGrpSpPr/>
         <p:nvPr/>
       </p:nvGrpSpPr>
-      <p:grpSpPr/>
+      <p:grpSpPr>
+        <a:xfrm>
+          <a:off x="0" y="0"/>
+          <a:ext cx="0" cy="0"/>
+          <a:chOff x="0" y="0"/>
+          <a:chExt cx="0" cy="0"/>
+        </a:xfrm>
+      </p:grpSpPr>
       <p:sp>
         <p:nvSpPr>
           <p:cNvPr id="2" name="Rectangle 1"/>
@@ -3148,7 +3150,9 @@
         <p:txBody>
           <a:bodyPr rtlCol="0" anchor="ctr"/>
           <a:lstStyle/>
-          <a:p/>
+          <a:p>
+            <a:endParaRPr/>
+          </a:p>
         </p:txBody>
       </p:sp>
       <p:sp>
@@ -3159,7 +3163,7 @@
         </p:nvSpPr>
         <p:spPr>
           <a:xfrm>
-            <a:off x="822960" y="2103120"/>
+            <a:off x="822960" y="1493320"/>
             <a:ext cx="10058400" cy="1005840"/>
           </a:xfrm>
           <a:prstGeom prst="rect">
@@ -3168,7 +3172,7 @@
           <a:noFill/>
         </p:spPr>
         <p:txBody>
-          <a:bodyPr wrap="square" lIns="0" rIns="0" tIns="0" bIns="0" anchor="t">
+          <a:bodyPr wrap="square" lIns="0" tIns="0" rIns="0" bIns="0" anchor="t">
             <a:spAutoFit/>
           </a:bodyPr>
           <a:lstStyle/>
@@ -3182,7 +3186,7 @@
               </a:spcAft>
             </a:pPr>
             <a:r>
-              <a:rPr sz="5800" b="0" i="0">
+              <a:rPr sz="5800" b="0" i="0" dirty="0">
                 <a:solidFill>
                   <a:srgbClr val="FFFFFF"/>
                 </a:solidFill>
@@ -3201,16 +3205,16 @@
         </p:nvSpPr>
         <p:spPr>
           <a:xfrm>
-            <a:off x="822960" y="3127248"/>
-            <a:ext cx="9144000" cy="365760"/>
-          </a:xfrm>
-          <a:prstGeom prst="rect">
-            <a:avLst/>
-          </a:prstGeom>
-          <a:noFill/>
-        </p:spPr>
-        <p:txBody>
-          <a:bodyPr wrap="square" lIns="0" rIns="0" tIns="0" bIns="0" anchor="t">
+            <a:off x="822960" y="2874887"/>
+            <a:ext cx="9144000" cy="923330"/>
+          </a:xfrm>
+          <a:prstGeom prst="rect">
+            <a:avLst/>
+          </a:prstGeom>
+          <a:noFill/>
+        </p:spPr>
+        <p:txBody>
+          <a:bodyPr wrap="square" lIns="0" tIns="0" rIns="0" bIns="0" anchor="t">
             <a:spAutoFit/>
           </a:bodyPr>
           <a:lstStyle/>
@@ -3224,14 +3228,100 @@
               </a:spcAft>
             </a:pPr>
             <a:r>
-              <a:rPr sz="2000" b="0" i="0">
+              <a:rPr sz="2000" b="0" i="0" dirty="0" err="1">
                 <a:solidFill>
                   <a:srgbClr val="B9BEC6"/>
                 </a:solidFill>
                 <a:latin typeface="Segoe UI"/>
               </a:rPr>
-              <a:t>Inspección visual industrial de piezas 2D</a:t>
-            </a:r>
+              <a:t>Inspección</a:t>
+            </a:r>
+            <a:r>
+              <a:rPr sz="2000" b="0" i="0" dirty="0">
+                <a:solidFill>
+                  <a:srgbClr val="B9BEC6"/>
+                </a:solidFill>
+                <a:latin typeface="Segoe UI"/>
+              </a:rPr>
+              <a:t> visual industrial de </a:t>
+            </a:r>
+            <a:r>
+              <a:rPr sz="2000" b="0" i="0" dirty="0" err="1">
+                <a:solidFill>
+                  <a:srgbClr val="B9BEC6"/>
+                </a:solidFill>
+                <a:latin typeface="Segoe UI"/>
+              </a:rPr>
+              <a:t>piezas</a:t>
+            </a:r>
+            <a:r>
+              <a:rPr sz="2000" b="0" i="0" dirty="0">
+                <a:solidFill>
+                  <a:srgbClr val="B9BEC6"/>
+                </a:solidFill>
+                <a:latin typeface="Segoe UI"/>
+              </a:rPr>
+              <a:t> 2D</a:t>
+            </a:r>
+            <a:endParaRPr lang="es-MX" sz="2000" b="0" i="0" dirty="0">
+              <a:solidFill>
+                <a:srgbClr val="B9BEC6"/>
+              </a:solidFill>
+              <a:latin typeface="Segoe UI"/>
+            </a:endParaRPr>
+          </a:p>
+          <a:p>
+            <a:pPr algn="l">
+              <a:lnSpc>
+                <a:spcPct val="100000"/>
+              </a:lnSpc>
+              <a:spcAft>
+                <a:spcPts val="0"/>
+              </a:spcAft>
+            </a:pPr>
+            <a:r>
+              <a:rPr lang="es-ES" sz="2000" dirty="0">
+                <a:solidFill>
+                  <a:srgbClr val="B9BEC6"/>
+                </a:solidFill>
+                <a:latin typeface="Segoe UI"/>
+              </a:rPr>
+              <a:t>Por Gerardo Lazcano Aguilar </a:t>
+            </a:r>
+          </a:p>
+          <a:p>
+            <a:pPr algn="l">
+              <a:lnSpc>
+                <a:spcPct val="100000"/>
+              </a:lnSpc>
+              <a:spcAft>
+                <a:spcPts val="0"/>
+              </a:spcAft>
+            </a:pPr>
+            <a:r>
+              <a:rPr lang="es-ES" sz="2000" dirty="0" err="1">
+                <a:solidFill>
+                  <a:srgbClr val="B9BEC6"/>
+                </a:solidFill>
+                <a:latin typeface="Segoe UI"/>
+              </a:rPr>
+              <a:t>Robybam</a:t>
+            </a:r>
+            <a:r>
+              <a:rPr lang="es-ES" sz="2000" dirty="0">
+                <a:solidFill>
+                  <a:srgbClr val="B9BEC6"/>
+                </a:solidFill>
+                <a:latin typeface="Segoe UI"/>
+              </a:rPr>
+              <a:t> Tijuana B.C.</a:t>
+            </a:r>
+            <a:endParaRPr sz="2000" b="0" i="0" dirty="0">
+              <a:solidFill>
+                <a:srgbClr val="B9BEC6"/>
+              </a:solidFill>
+              <a:latin typeface="Segoe UI"/>
+            </a:endParaRPr>
           </a:p>
         </p:txBody>
       </p:sp>
@@ -3280,15 +3370,15 @@
         <p:spPr>
           <a:xfrm>
             <a:off x="822960" y="4133087"/>
-            <a:ext cx="10058400" cy="822960"/>
-          </a:xfrm>
-          <a:prstGeom prst="rect">
-            <a:avLst/>
-          </a:prstGeom>
-          <a:noFill/>
-        </p:spPr>
-        <p:txBody>
-          <a:bodyPr wrap="square" lIns="0" rIns="0" tIns="0" bIns="0" anchor="t">
+            <a:ext cx="10058400" cy="568489"/>
+          </a:xfrm>
+          <a:prstGeom prst="rect">
+            <a:avLst/>
+          </a:prstGeom>
+          <a:noFill/>
+        </p:spPr>
+        <p:txBody>
+          <a:bodyPr wrap="square" lIns="0" tIns="0" rIns="0" bIns="0" anchor="t">
             <a:spAutoFit/>
           </a:bodyPr>
           <a:lstStyle/>
@@ -3302,13 +3392,274 @@
               </a:spcAft>
             </a:pPr>
             <a:r>
-              <a:rPr sz="1400" b="0" i="0">
+              <a:rPr sz="1400" b="0" i="0" dirty="0" err="1">
                 <a:solidFill>
                   <a:srgbClr val="B9BEC6"/>
                 </a:solidFill>
                 <a:latin typeface="Segoe UI"/>
               </a:rPr>
-              <a:t>Aplicación de escritorio para Windows y Linux. Mide cotas sobre la pieza, compara su aspecto con el de una pieza patrón y emite un veredicto OK/NG. Funciona sin conexión y sin tarjeta gráfica.</a:t>
+              <a:t>Aplicación</a:t>
+            </a:r>
+            <a:r>
+              <a:rPr sz="1400" b="0" i="0" dirty="0">
+                <a:solidFill>
+                  <a:srgbClr val="B9BEC6"/>
+                </a:solidFill>
+                <a:latin typeface="Segoe UI"/>
+              </a:rPr>
+              <a:t> de </a:t>
+            </a:r>
+            <a:r>
+              <a:rPr sz="1400" b="0" i="0" dirty="0" err="1">
+                <a:solidFill>
+                  <a:srgbClr val="B9BEC6"/>
+                </a:solidFill>
+                <a:latin typeface="Segoe UI"/>
+              </a:rPr>
+              <a:t>escritorio</a:t>
+            </a:r>
+            <a:r>
+              <a:rPr sz="1400" b="0" i="0" dirty="0">
+                <a:solidFill>
+                  <a:srgbClr val="B9BEC6"/>
+                </a:solidFill>
+                <a:latin typeface="Segoe UI"/>
+              </a:rPr>
+              <a:t> para Windows y Linux. Mide </a:t>
+            </a:r>
+            <a:r>
+              <a:rPr sz="1400" b="0" i="0" dirty="0" err="1">
+                <a:solidFill>
+                  <a:srgbClr val="B9BEC6"/>
+                </a:solidFill>
+                <a:latin typeface="Segoe UI"/>
+              </a:rPr>
+              <a:t>cotas</a:t>
+            </a:r>
+            <a:r>
+              <a:rPr sz="1400" b="0" i="0" dirty="0">
+                <a:solidFill>
+                  <a:srgbClr val="B9BEC6"/>
+                </a:solidFill>
+                <a:latin typeface="Segoe UI"/>
+              </a:rPr>
+              <a:t> </a:t>
+            </a:r>
+            <a:r>
+              <a:rPr sz="1400" b="0" i="0" dirty="0" err="1">
+                <a:solidFill>
+                  <a:srgbClr val="B9BEC6"/>
+                </a:solidFill>
+                <a:latin typeface="Segoe UI"/>
+              </a:rPr>
+              <a:t>sobre</a:t>
+            </a:r>
+            <a:r>
+              <a:rPr sz="1400" b="0" i="0" dirty="0">
+                <a:solidFill>
+                  <a:srgbClr val="B9BEC6"/>
+                </a:solidFill>
+                <a:latin typeface="Segoe UI"/>
+              </a:rPr>
+              <a:t> la </a:t>
+            </a:r>
+            <a:r>
+              <a:rPr sz="1400" b="0" i="0" dirty="0" err="1">
+                <a:solidFill>
+                  <a:srgbClr val="B9BEC6"/>
+                </a:solidFill>
+                <a:latin typeface="Segoe UI"/>
+              </a:rPr>
+              <a:t>pieza</a:t>
+            </a:r>
+            <a:r>
+              <a:rPr sz="1400" b="0" i="0" dirty="0">
+                <a:solidFill>
+                  <a:srgbClr val="B9BEC6"/>
+                </a:solidFill>
+                <a:latin typeface="Segoe UI"/>
+              </a:rPr>
+              <a:t>, </a:t>
+            </a:r>
+            <a:r>
+              <a:rPr sz="1400" b="0" i="0" dirty="0" err="1">
+                <a:solidFill>
+                  <a:srgbClr val="B9BEC6"/>
+                </a:solidFill>
+                <a:latin typeface="Segoe UI"/>
+              </a:rPr>
+              <a:t>compara</a:t>
+            </a:r>
+            <a:r>
+              <a:rPr sz="1400" b="0" i="0" dirty="0">
+                <a:solidFill>
+                  <a:srgbClr val="B9BEC6"/>
+                </a:solidFill>
+                <a:latin typeface="Segoe UI"/>
+              </a:rPr>
+              <a:t> </a:t>
+            </a:r>
+            <a:r>
+              <a:rPr sz="1400" b="0" i="0" dirty="0" err="1">
+                <a:solidFill>
+                  <a:srgbClr val="B9BEC6"/>
+                </a:solidFill>
+                <a:latin typeface="Segoe UI"/>
+              </a:rPr>
+              <a:t>su</a:t>
+            </a:r>
+            <a:r>
+              <a:rPr sz="1400" b="0" i="0" dirty="0">
+                <a:solidFill>
+                  <a:srgbClr val="B9BEC6"/>
+                </a:solidFill>
+                <a:latin typeface="Segoe UI"/>
+              </a:rPr>
+              <a:t> </a:t>
+            </a:r>
+            <a:r>
+              <a:rPr sz="1400" b="0" i="0" dirty="0" err="1">
+                <a:solidFill>
+                  <a:srgbClr val="B9BEC6"/>
+                </a:solidFill>
+                <a:latin typeface="Segoe UI"/>
+              </a:rPr>
+              <a:t>aspecto</a:t>
+            </a:r>
+            <a:r>
+              <a:rPr sz="1400" b="0" i="0" dirty="0">
+                <a:solidFill>
+                  <a:srgbClr val="B9BEC6"/>
+                </a:solidFill>
+                <a:latin typeface="Segoe UI"/>
+              </a:rPr>
+              <a:t> con el de </a:t>
+            </a:r>
+            <a:r>
+              <a:rPr sz="1400" b="0" i="0" dirty="0" err="1">
+                <a:solidFill>
+                  <a:srgbClr val="B9BEC6"/>
+                </a:solidFill>
+                <a:latin typeface="Segoe UI"/>
+              </a:rPr>
+              <a:t>una</a:t>
+            </a:r>
+            <a:r>
+              <a:rPr sz="1400" b="0" i="0" dirty="0">
+                <a:solidFill>
+                  <a:srgbClr val="B9BEC6"/>
+                </a:solidFill>
+                <a:latin typeface="Segoe UI"/>
+              </a:rPr>
+              <a:t> </a:t>
+            </a:r>
+            <a:r>
+              <a:rPr sz="1400" b="0" i="0" dirty="0" err="1">
+                <a:solidFill>
+                  <a:srgbClr val="B9BEC6"/>
+                </a:solidFill>
+                <a:latin typeface="Segoe UI"/>
+              </a:rPr>
+              <a:t>pieza</a:t>
+            </a:r>
+            <a:r>
+              <a:rPr sz="1400" b="0" i="0" dirty="0">
+                <a:solidFill>
+                  <a:srgbClr val="B9BEC6"/>
+                </a:solidFill>
+                <a:latin typeface="Segoe UI"/>
+              </a:rPr>
+              <a:t> </a:t>
+            </a:r>
+            <a:r>
+              <a:rPr sz="1400" b="0" i="0" dirty="0" err="1">
+                <a:solidFill>
+                  <a:srgbClr val="B9BEC6"/>
+                </a:solidFill>
+                <a:latin typeface="Segoe UI"/>
+              </a:rPr>
+              <a:t>patrón</a:t>
+            </a:r>
+            <a:r>
+              <a:rPr sz="1400" b="0" i="0" dirty="0">
+                <a:solidFill>
+                  <a:srgbClr val="B9BEC6"/>
+                </a:solidFill>
+                <a:latin typeface="Segoe UI"/>
+              </a:rPr>
+              <a:t> y </a:t>
+            </a:r>
+            <a:r>
+              <a:rPr sz="1400" b="0" i="0" dirty="0" err="1">
+                <a:solidFill>
+                  <a:srgbClr val="B9BEC6"/>
+                </a:solidFill>
+                <a:latin typeface="Segoe UI"/>
+              </a:rPr>
+              <a:t>emite</a:t>
+            </a:r>
+            <a:r>
+              <a:rPr sz="1400" b="0" i="0" dirty="0">
+                <a:solidFill>
+                  <a:srgbClr val="B9BEC6"/>
+                </a:solidFill>
+                <a:latin typeface="Segoe UI"/>
+              </a:rPr>
+              <a:t> un </a:t>
+            </a:r>
+            <a:r>
+              <a:rPr sz="1400" b="0" i="0" dirty="0" err="1">
+                <a:solidFill>
+                  <a:srgbClr val="B9BEC6"/>
+                </a:solidFill>
+                <a:latin typeface="Segoe UI"/>
+              </a:rPr>
+              <a:t>veredicto</a:t>
+            </a:r>
+            <a:r>
+              <a:rPr sz="1400" b="0" i="0" dirty="0">
+                <a:solidFill>
+                  <a:srgbClr val="B9BEC6"/>
+                </a:solidFill>
+                <a:latin typeface="Segoe UI"/>
+              </a:rPr>
+              <a:t>. </a:t>
+            </a:r>
+            <a:r>
+              <a:rPr sz="1400" b="0" i="0" dirty="0" err="1">
+                <a:solidFill>
+                  <a:srgbClr val="B9BEC6"/>
+                </a:solidFill>
+                <a:latin typeface="Segoe UI"/>
+              </a:rPr>
+              <a:t>Funciona</a:t>
+            </a:r>
+            <a:r>
+              <a:rPr sz="1400" b="0" i="0" dirty="0">
+                <a:solidFill>
+                  <a:srgbClr val="B9BEC6"/>
+                </a:solidFill>
+                <a:latin typeface="Segoe UI"/>
+              </a:rPr>
+              <a:t> sin </a:t>
+            </a:r>
+            <a:r>
+              <a:rPr sz="1400" b="0" i="0" dirty="0" err="1">
+                <a:solidFill>
+                  <a:srgbClr val="B9BEC6"/>
+                </a:solidFill>
+                <a:latin typeface="Segoe UI"/>
+              </a:rPr>
+              <a:t>conexión</a:t>
+            </a:r>
+            <a:r>
+              <a:rPr sz="1400" b="0" i="0" dirty="0">
+                <a:solidFill>
+                  <a:srgbClr val="B9BEC6"/>
+                </a:solidFill>
+                <a:latin typeface="Segoe UI"/>
+              </a:rPr>
+              <a:t>.</a:t>
             </a:r>
           </a:p>
         </p:txBody>
@@ -3322,15 +3673,15 @@
         <p:spPr>
           <a:xfrm>
             <a:off x="822960" y="5577840"/>
-            <a:ext cx="10515600" cy="274320"/>
-          </a:xfrm>
-          <a:prstGeom prst="rect">
-            <a:avLst/>
-          </a:prstGeom>
-          <a:noFill/>
-        </p:spPr>
-        <p:txBody>
-          <a:bodyPr wrap="square" lIns="0" rIns="0" tIns="0" bIns="0" anchor="t">
+            <a:ext cx="10515600" cy="176972"/>
+          </a:xfrm>
+          <a:prstGeom prst="rect">
+            <a:avLst/>
+          </a:prstGeom>
+          <a:noFill/>
+        </p:spPr>
+        <p:txBody>
+          <a:bodyPr wrap="square" lIns="0" tIns="0" rIns="0" bIns="0" anchor="t">
             <a:spAutoFit/>
           </a:bodyPr>
           <a:lstStyle/>
@@ -3344,13 +3695,139 @@
               </a:spcAft>
             </a:pPr>
             <a:r>
-              <a:rPr sz="1150" b="0" i="0">
+              <a:rPr lang="es-MX" sz="1150" dirty="0">
                 <a:solidFill>
                   <a:srgbClr val="B9BEC6"/>
                 </a:solidFill>
                 <a:latin typeface="Segoe UI"/>
               </a:rPr>
-              <a:t>32 herramientas de medición   ·   tolerancias geométricas GD&amp;T   ·   comparación de apariencia   ·   base de datos local</a:t>
+              <a:t>Mas de 7 </a:t>
+            </a:r>
+            <a:r>
+              <a:rPr sz="1150" b="0" i="0" dirty="0" err="1">
+                <a:solidFill>
+                  <a:srgbClr val="B9BEC6"/>
+                </a:solidFill>
+                <a:latin typeface="Segoe UI"/>
+              </a:rPr>
+              <a:t>herramientas</a:t>
+            </a:r>
+            <a:r>
+              <a:rPr sz="1150" b="0" i="0" dirty="0">
+                <a:solidFill>
+                  <a:srgbClr val="B9BEC6"/>
+                </a:solidFill>
+                <a:latin typeface="Segoe UI"/>
+              </a:rPr>
+              <a:t> de </a:t>
+            </a:r>
+            <a:r>
+              <a:rPr sz="1150" b="0" i="0" dirty="0" err="1">
+                <a:solidFill>
+                  <a:srgbClr val="B9BEC6"/>
+                </a:solidFill>
+                <a:latin typeface="Segoe UI"/>
+              </a:rPr>
+              <a:t>medición</a:t>
+            </a:r>
+            <a:r>
+              <a:rPr sz="1150" b="0" i="0" dirty="0">
+                <a:solidFill>
+                  <a:srgbClr val="B9BEC6"/>
+                </a:solidFill>
+                <a:latin typeface="Segoe UI"/>
+              </a:rPr>
+              <a:t>   ·   </a:t>
+            </a:r>
+            <a:r>
+              <a:rPr sz="1150" b="0" i="0" dirty="0" err="1">
+                <a:solidFill>
+                  <a:srgbClr val="B9BEC6"/>
+                </a:solidFill>
+                <a:latin typeface="Segoe UI"/>
+              </a:rPr>
+              <a:t>tolerancias</a:t>
+            </a:r>
+            <a:r>
+              <a:rPr sz="1150" b="0" i="0" dirty="0">
+                <a:solidFill>
+                  <a:srgbClr val="B9BEC6"/>
+                </a:solidFill>
+                <a:latin typeface="Segoe UI"/>
+              </a:rPr>
+              <a:t> </a:t>
+            </a:r>
+            <a:r>
+              <a:rPr sz="1150" b="0" i="0" dirty="0" err="1">
+                <a:solidFill>
+                  <a:srgbClr val="B9BEC6"/>
+                </a:solidFill>
+                <a:latin typeface="Segoe UI"/>
+              </a:rPr>
+              <a:t>geométricas</a:t>
+            </a:r>
+            <a:r>
+              <a:rPr sz="1150" b="0" i="0" dirty="0">
+                <a:solidFill>
+                  <a:srgbClr val="B9BEC6"/>
+                </a:solidFill>
+                <a:latin typeface="Segoe UI"/>
+              </a:rPr>
+              <a:t> GD&amp;T   ·   </a:t>
+            </a:r>
+            <a:r>
+              <a:rPr sz="1150" b="0" i="0" dirty="0" err="1">
+                <a:solidFill>
+                  <a:srgbClr val="B9BEC6"/>
+                </a:solidFill>
+                <a:latin typeface="Segoe UI"/>
+              </a:rPr>
+              <a:t>comparación</a:t>
+            </a:r>
+            <a:r>
+              <a:rPr sz="1150" b="0" i="0" dirty="0">
+                <a:solidFill>
+                  <a:srgbClr val="B9BEC6"/>
+                </a:solidFill>
+                <a:latin typeface="Segoe UI"/>
+              </a:rPr>
+              <a:t> de </a:t>
+            </a:r>
+            <a:r>
+              <a:rPr sz="1150" b="0" i="0" dirty="0" err="1">
+                <a:solidFill>
+                  <a:srgbClr val="B9BEC6"/>
+                </a:solidFill>
+                <a:latin typeface="Segoe UI"/>
+              </a:rPr>
+              <a:t>apariencia</a:t>
+            </a:r>
+            <a:r>
+              <a:rPr sz="1150" b="0" i="0" dirty="0">
+                <a:solidFill>
+                  <a:srgbClr val="B9BEC6"/>
+                </a:solidFill>
+                <a:latin typeface="Segoe UI"/>
+              </a:rPr>
+              <a:t>   ·   base de </a:t>
+            </a:r>
+            <a:r>
+              <a:rPr sz="1150" b="0" i="0" dirty="0" err="1">
+                <a:solidFill>
+                  <a:srgbClr val="B9BEC6"/>
+                </a:solidFill>
+                <a:latin typeface="Segoe UI"/>
+              </a:rPr>
+              <a:t>datos</a:t>
+            </a:r>
+            <a:r>
+              <a:rPr sz="1150" b="0" i="0" dirty="0">
+                <a:solidFill>
+                  <a:srgbClr val="B9BEC6"/>
+                </a:solidFill>
+                <a:latin typeface="Segoe UI"/>
+              </a:rPr>
+              <a:t> local</a:t>
             </a:r>
           </a:p>
         </p:txBody>
@@ -3372,7 +3849,7 @@
           <a:noFill/>
         </p:spPr>
         <p:txBody>
-          <a:bodyPr wrap="square" lIns="0" rIns="0" tIns="0" bIns="0" anchor="t">
+          <a:bodyPr wrap="square" lIns="0" tIns="0" rIns="0" bIns="0" anchor="t">
             <a:spAutoFit/>
           </a:bodyPr>
           <a:lstStyle/>
@@ -3406,7 +3883,7 @@
 </file>
 
 <file path=ppt/slides/slide10.xml><?xml version="1.0" encoding="utf-8"?>
-<p:sld xmlns:a="http://schemas.openxmlformats.org/drawingml/2006/main" xmlns:p="http://schemas.openxmlformats.org/presentationml/2006/main" xmlns:r="http://schemas.openxmlformats.org/officeDocument/2006/relationships">
+<p:sld xmlns:a="http://schemas.openxmlformats.org/drawingml/2006/main" xmlns:r="http://schemas.openxmlformats.org/officeDocument/2006/relationships" xmlns:p="http://schemas.openxmlformats.org/presentationml/2006/main">
   <p:cSld>
     <p:bg>
       <p:bgPr>
@@ -3422,7 +3899,14 @@
         <p:cNvGrpSpPr/>
         <p:nvPr/>
       </p:nvGrpSpPr>
-      <p:grpSpPr/>
+      <p:grpSpPr>
+        <a:xfrm>
+          <a:off x="0" y="0"/>
+          <a:ext cx="0" cy="0"/>
+          <a:chOff x="0" y="0"/>
+          <a:chExt cx="0" cy="0"/>
+        </a:xfrm>
+      </p:grpSpPr>
       <p:sp>
         <p:nvSpPr>
           <p:cNvPr id="2" name="TextBox 1"/>
@@ -3440,7 +3924,7 @@
           <a:noFill/>
         </p:spPr>
         <p:txBody>
-          <a:bodyPr wrap="square" lIns="0" rIns="0" tIns="0" bIns="0" anchor="t">
+          <a:bodyPr wrap="square" lIns="0" tIns="0" rIns="0" bIns="0" anchor="t">
             <a:spAutoFit/>
           </a:bodyPr>
           <a:lstStyle/>
@@ -3482,7 +3966,7 @@
           <a:noFill/>
         </p:spPr>
         <p:txBody>
-          <a:bodyPr wrap="square" lIns="0" rIns="0" tIns="0" bIns="0" anchor="t">
+          <a:bodyPr wrap="square" lIns="0" tIns="0" rIns="0" bIns="0" anchor="t">
             <a:spAutoFit/>
           </a:bodyPr>
           <a:lstStyle/>
@@ -3560,7 +4044,7 @@
           <a:noFill/>
         </p:spPr>
         <p:txBody>
-          <a:bodyPr wrap="square" lIns="0" rIns="0" tIns="0" bIns="0" anchor="t">
+          <a:bodyPr wrap="square" lIns="0" tIns="0" rIns="0" bIns="0" anchor="t">
             <a:spAutoFit/>
           </a:bodyPr>
           <a:lstStyle/>
@@ -3639,7 +4123,7 @@
           <a:noFill/>
         </p:spPr>
         <p:txBody>
-          <a:bodyPr wrap="square" lIns="0" rIns="0" tIns="0" bIns="0" anchor="t">
+          <a:bodyPr wrap="square" lIns="0" tIns="0" rIns="0" bIns="0" anchor="t">
             <a:spAutoFit/>
           </a:bodyPr>
           <a:lstStyle/>
@@ -3681,7 +4165,7 @@
           <a:noFill/>
         </p:spPr>
         <p:txBody>
-          <a:bodyPr wrap="square" lIns="0" rIns="0" tIns="0" bIns="0" anchor="t">
+          <a:bodyPr wrap="square" lIns="0" tIns="0" rIns="0" bIns="0" anchor="t">
             <a:spAutoFit/>
           </a:bodyPr>
           <a:lstStyle/>
@@ -3745,7 +4229,9 @@
         <p:txBody>
           <a:bodyPr rtlCol="0" anchor="ctr"/>
           <a:lstStyle/>
-          <a:p/>
+          <a:p>
+            <a:endParaRPr/>
+          </a:p>
         </p:txBody>
       </p:sp>
       <p:sp>
@@ -3765,7 +4251,7 @@
           <a:noFill/>
         </p:spPr>
         <p:txBody>
-          <a:bodyPr wrap="square" lIns="0" rIns="0" tIns="0" bIns="0" anchor="ctr">
+          <a:bodyPr wrap="square" lIns="0" tIns="0" rIns="0" bIns="0" anchor="ctr">
             <a:spAutoFit/>
           </a:bodyPr>
           <a:lstStyle/>
@@ -3829,7 +4315,9 @@
         <p:txBody>
           <a:bodyPr rtlCol="0" anchor="ctr"/>
           <a:lstStyle/>
-          <a:p/>
+          <a:p>
+            <a:endParaRPr/>
+          </a:p>
         </p:txBody>
       </p:sp>
       <p:sp>
@@ -3849,7 +4337,7 @@
           <a:noFill/>
         </p:spPr>
         <p:txBody>
-          <a:bodyPr wrap="square" lIns="0" rIns="0" tIns="0" bIns="0" anchor="ctr">
+          <a:bodyPr wrap="square" lIns="0" tIns="0" rIns="0" bIns="0" anchor="ctr">
             <a:spAutoFit/>
           </a:bodyPr>
           <a:lstStyle/>
@@ -3891,7 +4379,7 @@
           <a:noFill/>
         </p:spPr>
         <p:txBody>
-          <a:bodyPr wrap="square" lIns="0" rIns="0" tIns="0" bIns="0" anchor="t">
+          <a:bodyPr wrap="square" lIns="0" tIns="0" rIns="0" bIns="0" anchor="t">
             <a:spAutoFit/>
           </a:bodyPr>
           <a:lstStyle/>
@@ -3933,7 +4421,7 @@
           <a:noFill/>
         </p:spPr>
         <p:txBody>
-          <a:bodyPr wrap="square" lIns="0" rIns="0" tIns="0" bIns="0" anchor="t">
+          <a:bodyPr wrap="square" lIns="0" tIns="0" rIns="0" bIns="0" anchor="t">
             <a:spAutoFit/>
           </a:bodyPr>
           <a:lstStyle/>
@@ -3997,7 +4485,9 @@
         <p:txBody>
           <a:bodyPr rtlCol="0" anchor="ctr"/>
           <a:lstStyle/>
-          <a:p/>
+          <a:p>
+            <a:endParaRPr/>
+          </a:p>
         </p:txBody>
       </p:sp>
       <p:sp>
@@ -4017,7 +4507,7 @@
           <a:noFill/>
         </p:spPr>
         <p:txBody>
-          <a:bodyPr wrap="square" lIns="0" rIns="0" tIns="0" bIns="0" anchor="ctr">
+          <a:bodyPr wrap="square" lIns="0" tIns="0" rIns="0" bIns="0" anchor="ctr">
             <a:spAutoFit/>
           </a:bodyPr>
           <a:lstStyle/>
@@ -4081,7 +4571,9 @@
         <p:txBody>
           <a:bodyPr rtlCol="0" anchor="ctr"/>
           <a:lstStyle/>
-          <a:p/>
+          <a:p>
+            <a:endParaRPr/>
+          </a:p>
         </p:txBody>
       </p:sp>
       <p:sp>
@@ -4101,7 +4593,7 @@
           <a:noFill/>
         </p:spPr>
         <p:txBody>
-          <a:bodyPr wrap="square" lIns="0" rIns="0" tIns="0" bIns="0" anchor="ctr">
+          <a:bodyPr wrap="square" lIns="0" tIns="0" rIns="0" bIns="0" anchor="ctr">
             <a:spAutoFit/>
           </a:bodyPr>
           <a:lstStyle/>
@@ -4143,7 +4635,7 @@
           <a:noFill/>
         </p:spPr>
         <p:txBody>
-          <a:bodyPr wrap="square" lIns="0" rIns="0" tIns="0" bIns="0" anchor="t">
+          <a:bodyPr wrap="square" lIns="0" tIns="0" rIns="0" bIns="0" anchor="t">
             <a:spAutoFit/>
           </a:bodyPr>
           <a:lstStyle/>
@@ -4185,7 +4677,7 @@
           <a:noFill/>
         </p:spPr>
         <p:txBody>
-          <a:bodyPr wrap="square" lIns="0" rIns="0" tIns="0" bIns="0" anchor="t">
+          <a:bodyPr wrap="square" lIns="0" tIns="0" rIns="0" bIns="0" anchor="t">
             <a:spAutoFit/>
           </a:bodyPr>
           <a:lstStyle/>
@@ -4249,7 +4741,9 @@
         <p:txBody>
           <a:bodyPr rtlCol="0" anchor="ctr"/>
           <a:lstStyle/>
-          <a:p/>
+          <a:p>
+            <a:endParaRPr/>
+          </a:p>
         </p:txBody>
       </p:sp>
       <p:sp>
@@ -4269,7 +4763,7 @@
           <a:noFill/>
         </p:spPr>
         <p:txBody>
-          <a:bodyPr wrap="square" lIns="0" rIns="0" tIns="0" bIns="0" anchor="ctr">
+          <a:bodyPr wrap="square" lIns="0" tIns="0" rIns="0" bIns="0" anchor="ctr">
             <a:spAutoFit/>
           </a:bodyPr>
           <a:lstStyle/>
@@ -4333,7 +4827,9 @@
         <p:txBody>
           <a:bodyPr rtlCol="0" anchor="ctr"/>
           <a:lstStyle/>
-          <a:p/>
+          <a:p>
+            <a:endParaRPr/>
+          </a:p>
         </p:txBody>
       </p:sp>
       <p:sp>
@@ -4353,7 +4849,7 @@
           <a:noFill/>
         </p:spPr>
         <p:txBody>
-          <a:bodyPr wrap="square" lIns="0" rIns="0" tIns="0" bIns="0" anchor="ctr">
+          <a:bodyPr wrap="square" lIns="0" tIns="0" rIns="0" bIns="0" anchor="ctr">
             <a:spAutoFit/>
           </a:bodyPr>
           <a:lstStyle/>
@@ -4395,7 +4891,7 @@
           <a:noFill/>
         </p:spPr>
         <p:txBody>
-          <a:bodyPr wrap="square" lIns="0" rIns="0" tIns="0" bIns="0" anchor="t">
+          <a:bodyPr wrap="square" lIns="0" tIns="0" rIns="0" bIns="0" anchor="t">
             <a:spAutoFit/>
           </a:bodyPr>
           <a:lstStyle/>
@@ -4459,7 +4955,9 @@
         <p:txBody>
           <a:bodyPr rtlCol="0" anchor="ctr"/>
           <a:lstStyle/>
-          <a:p/>
+          <a:p>
+            <a:endParaRPr/>
+          </a:p>
         </p:txBody>
       </p:sp>
       <p:sp>
@@ -4479,7 +4977,7 @@
           <a:noFill/>
         </p:spPr>
         <p:txBody>
-          <a:bodyPr wrap="square" lIns="0" rIns="0" tIns="0" bIns="0" anchor="t">
+          <a:bodyPr wrap="square" lIns="0" tIns="0" rIns="0" bIns="0" anchor="t">
             <a:spAutoFit/>
           </a:bodyPr>
           <a:lstStyle/>
@@ -4543,7 +5041,9 @@
         <p:txBody>
           <a:bodyPr rtlCol="0" anchor="ctr"/>
           <a:lstStyle/>
-          <a:p/>
+          <a:p>
+            <a:endParaRPr/>
+          </a:p>
         </p:txBody>
       </p:sp>
       <p:sp>
@@ -4563,7 +5063,7 @@
           <a:noFill/>
         </p:spPr>
         <p:txBody>
-          <a:bodyPr wrap="square" lIns="0" rIns="0" tIns="0" bIns="0" anchor="t">
+          <a:bodyPr wrap="square" lIns="0" tIns="0" rIns="0" bIns="0" anchor="t">
             <a:spAutoFit/>
           </a:bodyPr>
           <a:lstStyle/>
@@ -4605,7 +5105,7 @@
           <a:noFill/>
         </p:spPr>
         <p:txBody>
-          <a:bodyPr wrap="square" lIns="0" rIns="0" tIns="0" bIns="0" anchor="t">
+          <a:bodyPr wrap="square" lIns="0" tIns="0" rIns="0" bIns="0" anchor="t">
             <a:spAutoFit/>
           </a:bodyPr>
           <a:lstStyle/>
@@ -4647,7 +5147,7 @@
           <a:noFill/>
         </p:spPr>
         <p:txBody>
-          <a:bodyPr wrap="square" lIns="0" rIns="0" tIns="0" bIns="0" anchor="t">
+          <a:bodyPr wrap="square" lIns="0" tIns="0" rIns="0" bIns="0" anchor="t">
             <a:spAutoFit/>
           </a:bodyPr>
           <a:lstStyle/>
@@ -4689,7 +5189,7 @@
           <a:noFill/>
         </p:spPr>
         <p:txBody>
-          <a:bodyPr wrap="square" lIns="0" rIns="0" tIns="0" bIns="0" anchor="t">
+          <a:bodyPr wrap="square" lIns="0" tIns="0" rIns="0" bIns="0" anchor="t">
             <a:spAutoFit/>
           </a:bodyPr>
           <a:lstStyle/>
@@ -4767,7 +5267,7 @@
           <a:noFill/>
         </p:spPr>
         <p:txBody>
-          <a:bodyPr wrap="square" lIns="0" rIns="0" tIns="0" bIns="0" anchor="t">
+          <a:bodyPr wrap="square" lIns="0" tIns="0" rIns="0" bIns="0" anchor="t">
             <a:spAutoFit/>
           </a:bodyPr>
           <a:lstStyle/>
@@ -4809,7 +5309,7 @@
           <a:noFill/>
         </p:spPr>
         <p:txBody>
-          <a:bodyPr wrap="square" lIns="0" rIns="0" tIns="0" bIns="0" anchor="t">
+          <a:bodyPr wrap="square" lIns="0" tIns="0" rIns="0" bIns="0" anchor="t">
             <a:spAutoFit/>
           </a:bodyPr>
           <a:lstStyle/>
@@ -4887,7 +5387,7 @@
           <a:noFill/>
         </p:spPr>
         <p:txBody>
-          <a:bodyPr wrap="square" lIns="0" rIns="0" tIns="0" bIns="0" anchor="t">
+          <a:bodyPr wrap="square" lIns="0" tIns="0" rIns="0" bIns="0" anchor="t">
             <a:spAutoFit/>
           </a:bodyPr>
           <a:lstStyle/>
@@ -4929,7 +5429,7 @@
           <a:noFill/>
         </p:spPr>
         <p:txBody>
-          <a:bodyPr wrap="square" lIns="0" rIns="0" tIns="0" bIns="0" anchor="t">
+          <a:bodyPr wrap="square" lIns="0" tIns="0" rIns="0" bIns="0" anchor="t">
             <a:spAutoFit/>
           </a:bodyPr>
           <a:lstStyle/>
@@ -5007,7 +5507,7 @@
           <a:noFill/>
         </p:spPr>
         <p:txBody>
-          <a:bodyPr wrap="square" lIns="0" rIns="0" tIns="0" bIns="0" anchor="t">
+          <a:bodyPr wrap="square" lIns="0" tIns="0" rIns="0" bIns="0" anchor="t">
             <a:spAutoFit/>
           </a:bodyPr>
           <a:lstStyle/>
@@ -5049,7 +5549,7 @@
           <a:noFill/>
         </p:spPr>
         <p:txBody>
-          <a:bodyPr wrap="square" lIns="0" rIns="0" tIns="0" bIns="0" anchor="t">
+          <a:bodyPr wrap="square" lIns="0" tIns="0" rIns="0" bIns="0" anchor="t">
             <a:spAutoFit/>
           </a:bodyPr>
           <a:lstStyle/>
@@ -5127,7 +5627,7 @@
           <a:noFill/>
         </p:spPr>
         <p:txBody>
-          <a:bodyPr wrap="square" lIns="0" rIns="0" tIns="0" bIns="0" anchor="t">
+          <a:bodyPr wrap="square" lIns="0" tIns="0" rIns="0" bIns="0" anchor="t">
             <a:spAutoFit/>
           </a:bodyPr>
           <a:lstStyle/>
@@ -5169,7 +5669,7 @@
           <a:noFill/>
         </p:spPr>
         <p:txBody>
-          <a:bodyPr wrap="square" lIns="0" rIns="0" tIns="0" bIns="0" anchor="t">
+          <a:bodyPr wrap="square" lIns="0" tIns="0" rIns="0" bIns="0" anchor="t">
             <a:spAutoFit/>
           </a:bodyPr>
           <a:lstStyle/>
@@ -5247,7 +5747,7 @@
           <a:noFill/>
         </p:spPr>
         <p:txBody>
-          <a:bodyPr wrap="square" lIns="0" rIns="0" tIns="0" bIns="0" anchor="t">
+          <a:bodyPr wrap="square" lIns="0" tIns="0" rIns="0" bIns="0" anchor="t">
             <a:spAutoFit/>
           </a:bodyPr>
           <a:lstStyle/>
@@ -5289,7 +5789,7 @@
           <a:noFill/>
         </p:spPr>
         <p:txBody>
-          <a:bodyPr wrap="square" lIns="0" rIns="0" tIns="0" bIns="0" anchor="t">
+          <a:bodyPr wrap="square" lIns="0" tIns="0" rIns="0" bIns="0" anchor="t">
             <a:spAutoFit/>
           </a:bodyPr>
           <a:lstStyle/>
@@ -5323,7 +5823,7 @@
 </file>
 
 <file path=ppt/slides/slide11.xml><?xml version="1.0" encoding="utf-8"?>
-<p:sld xmlns:a="http://schemas.openxmlformats.org/drawingml/2006/main" xmlns:p="http://schemas.openxmlformats.org/presentationml/2006/main" xmlns:r="http://schemas.openxmlformats.org/officeDocument/2006/relationships">
+<p:sld xmlns:a="http://schemas.openxmlformats.org/drawingml/2006/main" xmlns:r="http://schemas.openxmlformats.org/officeDocument/2006/relationships" xmlns:p="http://schemas.openxmlformats.org/presentationml/2006/main">
   <p:cSld>
     <p:bg>
       <p:bgPr>
@@ -5339,7 +5839,14 @@
         <p:cNvGrpSpPr/>
         <p:nvPr/>
       </p:nvGrpSpPr>
-      <p:grpSpPr/>
+      <p:grpSpPr>
+        <a:xfrm>
+          <a:off x="0" y="0"/>
+          <a:ext cx="0" cy="0"/>
+          <a:chOff x="0" y="0"/>
+          <a:chExt cx="0" cy="0"/>
+        </a:xfrm>
+      </p:grpSpPr>
       <p:sp>
         <p:nvSpPr>
           <p:cNvPr id="2" name="TextBox 1"/>
@@ -5357,7 +5864,7 @@
           <a:noFill/>
         </p:spPr>
         <p:txBody>
-          <a:bodyPr wrap="square" lIns="0" rIns="0" tIns="0" bIns="0" anchor="t">
+          <a:bodyPr wrap="square" lIns="0" tIns="0" rIns="0" bIns="0" anchor="t">
             <a:spAutoFit/>
           </a:bodyPr>
           <a:lstStyle/>
@@ -5399,7 +5906,7 @@
           <a:noFill/>
         </p:spPr>
         <p:txBody>
-          <a:bodyPr wrap="square" lIns="0" rIns="0" tIns="0" bIns="0" anchor="t">
+          <a:bodyPr wrap="square" lIns="0" tIns="0" rIns="0" bIns="0" anchor="t">
             <a:spAutoFit/>
           </a:bodyPr>
           <a:lstStyle/>
@@ -5477,7 +5984,7 @@
           <a:noFill/>
         </p:spPr>
         <p:txBody>
-          <a:bodyPr wrap="square" lIns="0" rIns="0" tIns="0" bIns="0" anchor="t">
+          <a:bodyPr wrap="square" lIns="0" tIns="0" rIns="0" bIns="0" anchor="t">
             <a:spAutoFit/>
           </a:bodyPr>
           <a:lstStyle/>
@@ -5519,7 +6026,7 @@
           <a:noFill/>
         </p:spPr>
         <p:txBody>
-          <a:bodyPr wrap="square" lIns="0" rIns="0" tIns="0" bIns="0" anchor="t">
+          <a:bodyPr wrap="square" lIns="0" tIns="0" rIns="0" bIns="0" anchor="t">
             <a:spAutoFit/>
           </a:bodyPr>
           <a:lstStyle/>
@@ -5561,7 +6068,7 @@
           <a:noFill/>
         </p:spPr>
         <p:txBody>
-          <a:bodyPr wrap="square" lIns="0" rIns="0" tIns="0" bIns="0" anchor="t">
+          <a:bodyPr wrap="square" lIns="0" tIns="0" rIns="0" bIns="0" anchor="t">
             <a:spAutoFit/>
           </a:bodyPr>
           <a:lstStyle/>
@@ -5639,7 +6146,7 @@
           <a:noFill/>
         </p:spPr>
         <p:txBody>
-          <a:bodyPr wrap="square" lIns="0" rIns="0" tIns="0" bIns="0" anchor="t">
+          <a:bodyPr wrap="square" lIns="0" tIns="0" rIns="0" bIns="0" anchor="t">
             <a:spAutoFit/>
           </a:bodyPr>
           <a:lstStyle/>
@@ -5681,7 +6188,7 @@
           <a:noFill/>
         </p:spPr>
         <p:txBody>
-          <a:bodyPr wrap="square" lIns="0" rIns="0" tIns="0" bIns="0" anchor="t">
+          <a:bodyPr wrap="square" lIns="0" tIns="0" rIns="0" bIns="0" anchor="t">
             <a:spAutoFit/>
           </a:bodyPr>
           <a:lstStyle/>
@@ -5759,7 +6266,7 @@
           <a:noFill/>
         </p:spPr>
         <p:txBody>
-          <a:bodyPr wrap="square" lIns="0" rIns="0" tIns="0" bIns="0" anchor="t">
+          <a:bodyPr wrap="square" lIns="0" tIns="0" rIns="0" bIns="0" anchor="t">
             <a:spAutoFit/>
           </a:bodyPr>
           <a:lstStyle/>
@@ -5801,7 +6308,7 @@
           <a:noFill/>
         </p:spPr>
         <p:txBody>
-          <a:bodyPr wrap="square" lIns="0" rIns="0" tIns="0" bIns="0" anchor="t">
+          <a:bodyPr wrap="square" lIns="0" tIns="0" rIns="0" bIns="0" anchor="t">
             <a:spAutoFit/>
           </a:bodyPr>
           <a:lstStyle/>
@@ -5879,7 +6386,7 @@
           <a:noFill/>
         </p:spPr>
         <p:txBody>
-          <a:bodyPr wrap="square" lIns="0" rIns="0" tIns="0" bIns="0" anchor="t">
+          <a:bodyPr wrap="square" lIns="0" tIns="0" rIns="0" bIns="0" anchor="t">
             <a:spAutoFit/>
           </a:bodyPr>
           <a:lstStyle/>
@@ -5921,7 +6428,7 @@
           <a:noFill/>
         </p:spPr>
         <p:txBody>
-          <a:bodyPr wrap="square" lIns="0" rIns="0" tIns="0" bIns="0" anchor="t">
+          <a:bodyPr wrap="square" lIns="0" tIns="0" rIns="0" bIns="0" anchor="t">
             <a:spAutoFit/>
           </a:bodyPr>
           <a:lstStyle/>
@@ -5999,7 +6506,7 @@
           <a:noFill/>
         </p:spPr>
         <p:txBody>
-          <a:bodyPr wrap="square" lIns="0" rIns="0" tIns="0" bIns="0" anchor="t">
+          <a:bodyPr wrap="square" lIns="0" tIns="0" rIns="0" bIns="0" anchor="t">
             <a:spAutoFit/>
           </a:bodyPr>
           <a:lstStyle/>
@@ -6041,7 +6548,7 @@
           <a:noFill/>
         </p:spPr>
         <p:txBody>
-          <a:bodyPr wrap="square" lIns="0" rIns="0" tIns="0" bIns="0" anchor="t">
+          <a:bodyPr wrap="square" lIns="0" tIns="0" rIns="0" bIns="0" anchor="t">
             <a:spAutoFit/>
           </a:bodyPr>
           <a:lstStyle/>
@@ -6119,7 +6626,7 @@
           <a:noFill/>
         </p:spPr>
         <p:txBody>
-          <a:bodyPr wrap="square" lIns="0" rIns="0" tIns="0" bIns="0" anchor="t">
+          <a:bodyPr wrap="square" lIns="0" tIns="0" rIns="0" bIns="0" anchor="t">
             <a:spAutoFit/>
           </a:bodyPr>
           <a:lstStyle/>
@@ -6161,7 +6668,7 @@
           <a:noFill/>
         </p:spPr>
         <p:txBody>
-          <a:bodyPr wrap="square" lIns="0" rIns="0" tIns="0" bIns="0" anchor="t">
+          <a:bodyPr wrap="square" lIns="0" tIns="0" rIns="0" bIns="0" anchor="t">
             <a:spAutoFit/>
           </a:bodyPr>
           <a:lstStyle/>
@@ -6203,7 +6710,7 @@
           <a:noFill/>
         </p:spPr>
         <p:txBody>
-          <a:bodyPr wrap="square" lIns="0" rIns="0" tIns="0" bIns="0" anchor="t">
+          <a:bodyPr wrap="square" lIns="0" tIns="0" rIns="0" bIns="0" anchor="t">
             <a:spAutoFit/>
           </a:bodyPr>
           <a:lstStyle/>
@@ -6245,7 +6752,7 @@
           <a:noFill/>
         </p:spPr>
         <p:txBody>
-          <a:bodyPr wrap="square" lIns="0" rIns="0" tIns="0" bIns="0" anchor="t">
+          <a:bodyPr wrap="square" lIns="0" tIns="0" rIns="0" bIns="0" anchor="t">
             <a:spAutoFit/>
           </a:bodyPr>
           <a:lstStyle/>
@@ -6287,7 +6794,7 @@
           <a:noFill/>
         </p:spPr>
         <p:txBody>
-          <a:bodyPr wrap="square" lIns="0" rIns="0" tIns="0" bIns="0" anchor="t">
+          <a:bodyPr wrap="square" lIns="0" tIns="0" rIns="0" bIns="0" anchor="t">
             <a:spAutoFit/>
           </a:bodyPr>
           <a:lstStyle/>
@@ -6329,7 +6836,7 @@
           <a:noFill/>
         </p:spPr>
         <p:txBody>
-          <a:bodyPr wrap="square" lIns="0" rIns="0" tIns="0" bIns="0" anchor="t">
+          <a:bodyPr wrap="square" lIns="0" tIns="0" rIns="0" bIns="0" anchor="t">
             <a:spAutoFit/>
           </a:bodyPr>
           <a:lstStyle/>
@@ -6371,7 +6878,7 @@
           <a:noFill/>
         </p:spPr>
         <p:txBody>
-          <a:bodyPr wrap="square" lIns="0" rIns="0" tIns="0" bIns="0" anchor="t">
+          <a:bodyPr wrap="square" lIns="0" tIns="0" rIns="0" bIns="0" anchor="t">
             <a:spAutoFit/>
           </a:bodyPr>
           <a:lstStyle/>
@@ -6413,7 +6920,7 @@
           <a:noFill/>
         </p:spPr>
         <p:txBody>
-          <a:bodyPr wrap="square" lIns="0" rIns="0" tIns="0" bIns="0" anchor="t">
+          <a:bodyPr wrap="square" lIns="0" tIns="0" rIns="0" bIns="0" anchor="t">
             <a:spAutoFit/>
           </a:bodyPr>
           <a:lstStyle/>
@@ -6455,7 +6962,7 @@
           <a:noFill/>
         </p:spPr>
         <p:txBody>
-          <a:bodyPr wrap="square" lIns="0" rIns="0" tIns="0" bIns="0" anchor="t">
+          <a:bodyPr wrap="square" lIns="0" tIns="0" rIns="0" bIns="0" anchor="t">
             <a:spAutoFit/>
           </a:bodyPr>
           <a:lstStyle/>
@@ -6497,7 +7004,7 @@
           <a:noFill/>
         </p:spPr>
         <p:txBody>
-          <a:bodyPr wrap="square" lIns="0" rIns="0" tIns="0" bIns="0" anchor="t">
+          <a:bodyPr wrap="square" lIns="0" tIns="0" rIns="0" bIns="0" anchor="t">
             <a:spAutoFit/>
           </a:bodyPr>
           <a:lstStyle/>
@@ -6539,7 +7046,7 @@
           <a:noFill/>
         </p:spPr>
         <p:txBody>
-          <a:bodyPr wrap="square" lIns="0" rIns="0" tIns="0" bIns="0" anchor="t">
+          <a:bodyPr wrap="square" lIns="0" tIns="0" rIns="0" bIns="0" anchor="t">
             <a:spAutoFit/>
           </a:bodyPr>
           <a:lstStyle/>
@@ -6581,7 +7088,7 @@
           <a:noFill/>
         </p:spPr>
         <p:txBody>
-          <a:bodyPr wrap="square" lIns="0" rIns="0" tIns="0" bIns="0" anchor="t">
+          <a:bodyPr wrap="square" lIns="0" tIns="0" rIns="0" bIns="0" anchor="t">
             <a:spAutoFit/>
           </a:bodyPr>
           <a:lstStyle/>
@@ -6615,7 +7122,7 @@
 </file>
 
 <file path=ppt/slides/slide12.xml><?xml version="1.0" encoding="utf-8"?>
-<p:sld xmlns:a="http://schemas.openxmlformats.org/drawingml/2006/main" xmlns:p="http://schemas.openxmlformats.org/presentationml/2006/main" xmlns:r="http://schemas.openxmlformats.org/officeDocument/2006/relationships">
+<p:sld xmlns:a="http://schemas.openxmlformats.org/drawingml/2006/main" xmlns:r="http://schemas.openxmlformats.org/officeDocument/2006/relationships" xmlns:p="http://schemas.openxmlformats.org/presentationml/2006/main">
   <p:cSld>
     <p:bg>
       <p:bgPr>
@@ -6631,7 +7138,14 @@
         <p:cNvGrpSpPr/>
         <p:nvPr/>
       </p:nvGrpSpPr>
-      <p:grpSpPr/>
+      <p:grpSpPr>
+        <a:xfrm>
+          <a:off x="0" y="0"/>
+          <a:ext cx="0" cy="0"/>
+          <a:chOff x="0" y="0"/>
+          <a:chExt cx="0" cy="0"/>
+        </a:xfrm>
+      </p:grpSpPr>
       <p:sp>
         <p:nvSpPr>
           <p:cNvPr id="2" name="TextBox 1"/>
@@ -6649,7 +7163,7 @@
           <a:noFill/>
         </p:spPr>
         <p:txBody>
-          <a:bodyPr wrap="square" lIns="0" rIns="0" tIns="0" bIns="0" anchor="t">
+          <a:bodyPr wrap="square" lIns="0" tIns="0" rIns="0" bIns="0" anchor="t">
             <a:spAutoFit/>
           </a:bodyPr>
           <a:lstStyle/>
@@ -6691,7 +7205,7 @@
           <a:noFill/>
         </p:spPr>
         <p:txBody>
-          <a:bodyPr wrap="square" lIns="0" rIns="0" tIns="0" bIns="0" anchor="t">
+          <a:bodyPr wrap="square" lIns="0" tIns="0" rIns="0" bIns="0" anchor="t">
             <a:spAutoFit/>
           </a:bodyPr>
           <a:lstStyle/>
@@ -6769,7 +7283,7 @@
           <a:noFill/>
         </p:spPr>
         <p:txBody>
-          <a:bodyPr wrap="square" lIns="0" rIns="0" tIns="0" bIns="0" anchor="t">
+          <a:bodyPr wrap="square" lIns="0" tIns="0" rIns="0" bIns="0" anchor="t">
             <a:spAutoFit/>
           </a:bodyPr>
           <a:lstStyle/>
@@ -6811,7 +7325,7 @@
           <a:noFill/>
         </p:spPr>
         <p:txBody>
-          <a:bodyPr wrap="square" lIns="0" rIns="0" tIns="0" bIns="0" anchor="t">
+          <a:bodyPr wrap="square" lIns="0" tIns="0" rIns="0" bIns="0" anchor="t">
             <a:spAutoFit/>
           </a:bodyPr>
           <a:lstStyle/>
@@ -6889,7 +7403,7 @@
           <a:noFill/>
         </p:spPr>
         <p:txBody>
-          <a:bodyPr wrap="square" lIns="0" rIns="0" tIns="0" bIns="0" anchor="t">
+          <a:bodyPr wrap="square" lIns="0" tIns="0" rIns="0" bIns="0" anchor="t">
             <a:spAutoFit/>
           </a:bodyPr>
           <a:lstStyle/>
@@ -6931,7 +7445,7 @@
           <a:noFill/>
         </p:spPr>
         <p:txBody>
-          <a:bodyPr wrap="square" lIns="0" rIns="0" tIns="0" bIns="0" anchor="t">
+          <a:bodyPr wrap="square" lIns="0" tIns="0" rIns="0" bIns="0" anchor="t">
             <a:spAutoFit/>
           </a:bodyPr>
           <a:lstStyle/>
@@ -7009,7 +7523,7 @@
           <a:noFill/>
         </p:spPr>
         <p:txBody>
-          <a:bodyPr wrap="square" lIns="0" rIns="0" tIns="0" bIns="0" anchor="t">
+          <a:bodyPr wrap="square" lIns="0" tIns="0" rIns="0" bIns="0" anchor="t">
             <a:spAutoFit/>
           </a:bodyPr>
           <a:lstStyle/>
@@ -7051,7 +7565,7 @@
           <a:noFill/>
         </p:spPr>
         <p:txBody>
-          <a:bodyPr wrap="square" lIns="0" rIns="0" tIns="0" bIns="0" anchor="t">
+          <a:bodyPr wrap="square" lIns="0" tIns="0" rIns="0" bIns="0" anchor="t">
             <a:spAutoFit/>
           </a:bodyPr>
           <a:lstStyle/>
@@ -7129,7 +7643,7 @@
           <a:noFill/>
         </p:spPr>
         <p:txBody>
-          <a:bodyPr wrap="square" lIns="0" rIns="0" tIns="0" bIns="0" anchor="t">
+          <a:bodyPr wrap="square" lIns="0" tIns="0" rIns="0" bIns="0" anchor="t">
             <a:spAutoFit/>
           </a:bodyPr>
           <a:lstStyle/>
@@ -7171,7 +7685,7 @@
           <a:noFill/>
         </p:spPr>
         <p:txBody>
-          <a:bodyPr wrap="square" lIns="0" rIns="0" tIns="0" bIns="0" anchor="t">
+          <a:bodyPr wrap="square" lIns="0" tIns="0" rIns="0" bIns="0" anchor="t">
             <a:spAutoFit/>
           </a:bodyPr>
           <a:lstStyle/>
@@ -7249,7 +7763,7 @@
           <a:noFill/>
         </p:spPr>
         <p:txBody>
-          <a:bodyPr wrap="square" lIns="0" rIns="0" tIns="0" bIns="0" anchor="t">
+          <a:bodyPr wrap="square" lIns="0" tIns="0" rIns="0" bIns="0" anchor="t">
             <a:spAutoFit/>
           </a:bodyPr>
           <a:lstStyle/>
@@ -7291,7 +7805,7 @@
           <a:noFill/>
         </p:spPr>
         <p:txBody>
-          <a:bodyPr wrap="square" lIns="0" rIns="0" tIns="0" bIns="0" anchor="t">
+          <a:bodyPr wrap="square" lIns="0" tIns="0" rIns="0" bIns="0" anchor="t">
             <a:spAutoFit/>
           </a:bodyPr>
           <a:lstStyle/>
@@ -7369,7 +7883,7 @@
           <a:noFill/>
         </p:spPr>
         <p:txBody>
-          <a:bodyPr wrap="square" lIns="0" rIns="0" tIns="0" bIns="0" anchor="t">
+          <a:bodyPr wrap="square" lIns="0" tIns="0" rIns="0" bIns="0" anchor="t">
             <a:spAutoFit/>
           </a:bodyPr>
           <a:lstStyle/>
@@ -7411,7 +7925,7 @@
           <a:noFill/>
         </p:spPr>
         <p:txBody>
-          <a:bodyPr wrap="square" lIns="0" rIns="0" tIns="0" bIns="0" anchor="t">
+          <a:bodyPr wrap="square" lIns="0" tIns="0" rIns="0" bIns="0" anchor="t">
             <a:spAutoFit/>
           </a:bodyPr>
           <a:lstStyle/>
@@ -7489,7 +8003,7 @@
           <a:noFill/>
         </p:spPr>
         <p:txBody>
-          <a:bodyPr wrap="square" lIns="0" rIns="0" tIns="0" bIns="0" anchor="t">
+          <a:bodyPr wrap="square" lIns="0" tIns="0" rIns="0" bIns="0" anchor="t">
             <a:spAutoFit/>
           </a:bodyPr>
           <a:lstStyle/>
@@ -7531,7 +8045,7 @@
           <a:noFill/>
         </p:spPr>
         <p:txBody>
-          <a:bodyPr wrap="square" lIns="0" rIns="0" tIns="0" bIns="0" anchor="t">
+          <a:bodyPr wrap="square" lIns="0" tIns="0" rIns="0" bIns="0" anchor="t">
             <a:spAutoFit/>
           </a:bodyPr>
           <a:lstStyle/>
@@ -7609,7 +8123,7 @@
           <a:noFill/>
         </p:spPr>
         <p:txBody>
-          <a:bodyPr wrap="square" lIns="0" rIns="0" tIns="0" bIns="0" anchor="t">
+          <a:bodyPr wrap="square" lIns="0" tIns="0" rIns="0" bIns="0" anchor="t">
             <a:spAutoFit/>
           </a:bodyPr>
           <a:lstStyle/>
@@ -7651,7 +8165,7 @@
           <a:noFill/>
         </p:spPr>
         <p:txBody>
-          <a:bodyPr wrap="square" lIns="0" rIns="0" tIns="0" bIns="0" anchor="t">
+          <a:bodyPr wrap="square" lIns="0" tIns="0" rIns="0" bIns="0" anchor="t">
             <a:spAutoFit/>
           </a:bodyPr>
           <a:lstStyle/>
@@ -7729,7 +8243,7 @@
           <a:noFill/>
         </p:spPr>
         <p:txBody>
-          <a:bodyPr wrap="square" lIns="0" rIns="0" tIns="0" bIns="0" anchor="t">
+          <a:bodyPr wrap="square" lIns="0" tIns="0" rIns="0" bIns="0" anchor="t">
             <a:spAutoFit/>
           </a:bodyPr>
           <a:lstStyle/>
@@ -7771,7 +8285,7 @@
           <a:noFill/>
         </p:spPr>
         <p:txBody>
-          <a:bodyPr wrap="square" lIns="0" rIns="0" tIns="0" bIns="0" anchor="t">
+          <a:bodyPr wrap="square" lIns="0" tIns="0" rIns="0" bIns="0" anchor="t">
             <a:spAutoFit/>
           </a:bodyPr>
           <a:lstStyle/>
@@ -7849,7 +8363,7 @@
           <a:noFill/>
         </p:spPr>
         <p:txBody>
-          <a:bodyPr wrap="square" lIns="0" rIns="0" tIns="0" bIns="0" anchor="t">
+          <a:bodyPr wrap="square" lIns="0" tIns="0" rIns="0" bIns="0" anchor="t">
             <a:spAutoFit/>
           </a:bodyPr>
           <a:lstStyle/>
@@ -7883,15 +8397,15 @@
         <p:spPr>
           <a:xfrm>
             <a:off x="8198912" y="4251960"/>
-            <a:ext cx="3169822" cy="281940"/>
-          </a:xfrm>
-          <a:prstGeom prst="rect">
-            <a:avLst/>
-          </a:prstGeom>
-          <a:noFill/>
-        </p:spPr>
-        <p:txBody>
-          <a:bodyPr wrap="square" lIns="0" rIns="0" tIns="0" bIns="0" anchor="t">
+            <a:ext cx="3169822" cy="207942"/>
+          </a:xfrm>
+          <a:prstGeom prst="rect">
+            <a:avLst/>
+          </a:prstGeom>
+          <a:noFill/>
+        </p:spPr>
+        <p:txBody>
+          <a:bodyPr wrap="square" lIns="0" tIns="0" rIns="0" bIns="0" anchor="t">
             <a:spAutoFit/>
           </a:bodyPr>
           <a:lstStyle/>
@@ -7905,14 +8419,20 @@
               </a:spcAft>
             </a:pPr>
             <a:r>
-              <a:rPr sz="1200" b="0" i="0">
+              <a:rPr lang="es-MX" sz="1200" b="0" i="0" dirty="0">
                 <a:solidFill>
                   <a:srgbClr val="14161A"/>
                 </a:solidFill>
                 <a:latin typeface="Segoe UI"/>
               </a:rPr>
-              <a:t>Sin coste ni cuota</a:t>
-            </a:r>
+              <a:t>N/A</a:t>
+            </a:r>
+            <a:endParaRPr sz="1200" b="0" i="0" dirty="0">
+              <a:solidFill>
+                <a:srgbClr val="14161A"/>
+              </a:solidFill>
+              <a:latin typeface="Segoe UI"/>
+            </a:endParaRPr>
           </a:p>
         </p:txBody>
       </p:sp>
@@ -7991,7 +8511,9 @@
         <p:txBody>
           <a:bodyPr rtlCol="0" anchor="ctr"/>
           <a:lstStyle/>
-          <a:p/>
+          <a:p>
+            <a:endParaRPr/>
+          </a:p>
         </p:txBody>
       </p:sp>
       <p:sp>
@@ -8011,7 +8533,7 @@
           <a:noFill/>
         </p:spPr>
         <p:txBody>
-          <a:bodyPr wrap="square" lIns="0" rIns="0" tIns="0" bIns="0" anchor="t">
+          <a:bodyPr wrap="square" lIns="0" tIns="0" rIns="0" bIns="0" anchor="t">
             <a:spAutoFit/>
           </a:bodyPr>
           <a:lstStyle/>
@@ -8053,7 +8575,7 @@
           <a:noFill/>
         </p:spPr>
         <p:txBody>
-          <a:bodyPr wrap="square" lIns="0" rIns="0" tIns="0" bIns="0" anchor="t">
+          <a:bodyPr wrap="square" lIns="0" tIns="0" rIns="0" bIns="0" anchor="t">
             <a:spAutoFit/>
           </a:bodyPr>
           <a:lstStyle/>
@@ -8095,7 +8617,7 @@
           <a:noFill/>
         </p:spPr>
         <p:txBody>
-          <a:bodyPr wrap="square" lIns="0" rIns="0" tIns="0" bIns="0" anchor="t">
+          <a:bodyPr wrap="square" lIns="0" tIns="0" rIns="0" bIns="0" anchor="t">
             <a:spAutoFit/>
           </a:bodyPr>
           <a:lstStyle/>
@@ -8129,7 +8651,7 @@
 </file>
 
 <file path=ppt/slides/slide13.xml><?xml version="1.0" encoding="utf-8"?>
-<p:sld xmlns:a="http://schemas.openxmlformats.org/drawingml/2006/main" xmlns:p="http://schemas.openxmlformats.org/presentationml/2006/main" xmlns:r="http://schemas.openxmlformats.org/officeDocument/2006/relationships">
+<p:sld xmlns:a="http://schemas.openxmlformats.org/drawingml/2006/main" xmlns:r="http://schemas.openxmlformats.org/officeDocument/2006/relationships" xmlns:p="http://schemas.openxmlformats.org/presentationml/2006/main">
   <p:cSld>
     <p:bg>
       <p:bgPr>
@@ -8145,7 +8667,14 @@
         <p:cNvGrpSpPr/>
         <p:nvPr/>
       </p:nvGrpSpPr>
-      <p:grpSpPr/>
+      <p:grpSpPr>
+        <a:xfrm>
+          <a:off x="0" y="0"/>
+          <a:ext cx="0" cy="0"/>
+          <a:chOff x="0" y="0"/>
+          <a:chExt cx="0" cy="0"/>
+        </a:xfrm>
+      </p:grpSpPr>
       <p:sp>
         <p:nvSpPr>
           <p:cNvPr id="2" name="TextBox 1"/>
@@ -8163,7 +8692,7 @@
           <a:noFill/>
         </p:spPr>
         <p:txBody>
-          <a:bodyPr wrap="square" lIns="0" rIns="0" tIns="0" bIns="0" anchor="t">
+          <a:bodyPr wrap="square" lIns="0" tIns="0" rIns="0" bIns="0" anchor="t">
             <a:spAutoFit/>
           </a:bodyPr>
           <a:lstStyle/>
@@ -8205,7 +8734,7 @@
           <a:noFill/>
         </p:spPr>
         <p:txBody>
-          <a:bodyPr wrap="square" lIns="0" rIns="0" tIns="0" bIns="0" anchor="t">
+          <a:bodyPr wrap="square" lIns="0" tIns="0" rIns="0" bIns="0" anchor="t">
             <a:spAutoFit/>
           </a:bodyPr>
           <a:lstStyle/>
@@ -8283,7 +8812,7 @@
           <a:noFill/>
         </p:spPr>
         <p:txBody>
-          <a:bodyPr wrap="square" lIns="0" rIns="0" tIns="0" bIns="0" anchor="t">
+          <a:bodyPr wrap="square" lIns="0" tIns="0" rIns="0" bIns="0" anchor="t">
             <a:spAutoFit/>
           </a:bodyPr>
           <a:lstStyle/>
@@ -8296,15 +8825,7 @@
                 <a:spcPts val="0"/>
               </a:spcAft>
             </a:pPr>
-            <a:r>
-              <a:rPr sz="1050" b="1" i="0">
-                <a:solidFill>
-                  <a:srgbClr val="8A8F98"/>
-                </a:solidFill>
-                <a:latin typeface="Segoe UI"/>
-              </a:rPr>
-              <a:t/>
-            </a:r>
+            <a:endParaRPr/>
           </a:p>
         </p:txBody>
       </p:sp>
@@ -8325,7 +8846,7 @@
           <a:noFill/>
         </p:spPr>
         <p:txBody>
-          <a:bodyPr wrap="square" lIns="0" rIns="0" tIns="0" bIns="0" anchor="t">
+          <a:bodyPr wrap="square" lIns="0" tIns="0" rIns="0" bIns="0" anchor="t">
             <a:spAutoFit/>
           </a:bodyPr>
           <a:lstStyle/>
@@ -8367,7 +8888,7 @@
           <a:noFill/>
         </p:spPr>
         <p:txBody>
-          <a:bodyPr wrap="square" lIns="0" rIns="0" tIns="0" bIns="0" anchor="t">
+          <a:bodyPr wrap="square" lIns="0" tIns="0" rIns="0" bIns="0" anchor="t">
             <a:spAutoFit/>
           </a:bodyPr>
           <a:lstStyle/>
@@ -8445,7 +8966,7 @@
           <a:noFill/>
         </p:spPr>
         <p:txBody>
-          <a:bodyPr wrap="square" lIns="0" rIns="0" tIns="0" bIns="0" anchor="t">
+          <a:bodyPr wrap="square" lIns="0" tIns="0" rIns="0" bIns="0" anchor="t">
             <a:spAutoFit/>
           </a:bodyPr>
           <a:lstStyle/>
@@ -8479,15 +9000,15 @@
         <p:spPr>
           <a:xfrm>
             <a:off x="2932115" y="2359152"/>
-            <a:ext cx="2329818" cy="457200"/>
-          </a:xfrm>
-          <a:prstGeom prst="rect">
-            <a:avLst/>
-          </a:prstGeom>
-          <a:noFill/>
-        </p:spPr>
-        <p:txBody>
-          <a:bodyPr wrap="square" lIns="0" rIns="0" tIns="0" bIns="0" anchor="t">
+            <a:ext cx="2329818" cy="201017"/>
+          </a:xfrm>
+          <a:prstGeom prst="rect">
+            <a:avLst/>
+          </a:prstGeom>
+          <a:noFill/>
+        </p:spPr>
+        <p:txBody>
+          <a:bodyPr wrap="square" lIns="0" tIns="0" rIns="0" bIns="0" anchor="t">
             <a:spAutoFit/>
           </a:bodyPr>
           <a:lstStyle/>
@@ -8501,14 +9022,20 @@
               </a:spcAft>
             </a:pPr>
             <a:r>
-              <a:rPr sz="1200" b="1" i="0">
+              <a:rPr lang="es-MX" sz="1200" b="1" i="0" dirty="0">
                 <a:solidFill>
                   <a:srgbClr val="14161A"/>
                 </a:solidFill>
                 <a:latin typeface="Segoe UI"/>
               </a:rPr>
-              <a:t>Sin coste</a:t>
-            </a:r>
+              <a:t>N/A</a:t>
+            </a:r>
+            <a:endParaRPr sz="1200" b="1" i="0" dirty="0">
+              <a:solidFill>
+                <a:srgbClr val="14161A"/>
+              </a:solidFill>
+              <a:latin typeface="Segoe UI"/>
+            </a:endParaRPr>
           </a:p>
         </p:txBody>
       </p:sp>
@@ -8529,7 +9056,7 @@
           <a:noFill/>
         </p:spPr>
         <p:txBody>
-          <a:bodyPr wrap="square" lIns="0" rIns="0" tIns="0" bIns="0" anchor="t">
+          <a:bodyPr wrap="square" lIns="0" tIns="0" rIns="0" bIns="0" anchor="t">
             <a:spAutoFit/>
           </a:bodyPr>
           <a:lstStyle/>
@@ -8607,7 +9134,7 @@
           <a:noFill/>
         </p:spPr>
         <p:txBody>
-          <a:bodyPr wrap="square" lIns="0" rIns="0" tIns="0" bIns="0" anchor="t">
+          <a:bodyPr wrap="square" lIns="0" tIns="0" rIns="0" bIns="0" anchor="t">
             <a:spAutoFit/>
           </a:bodyPr>
           <a:lstStyle/>
@@ -8649,7 +9176,7 @@
           <a:noFill/>
         </p:spPr>
         <p:txBody>
-          <a:bodyPr wrap="square" lIns="0" rIns="0" tIns="0" bIns="0" anchor="t">
+          <a:bodyPr wrap="square" lIns="0" tIns="0" rIns="0" bIns="0" anchor="t">
             <a:spAutoFit/>
           </a:bodyPr>
           <a:lstStyle/>
@@ -8691,7 +9218,7 @@
           <a:noFill/>
         </p:spPr>
         <p:txBody>
-          <a:bodyPr wrap="square" lIns="0" rIns="0" tIns="0" bIns="0" anchor="t">
+          <a:bodyPr wrap="square" lIns="0" tIns="0" rIns="0" bIns="0" anchor="t">
             <a:spAutoFit/>
           </a:bodyPr>
           <a:lstStyle/>
@@ -8769,7 +9296,7 @@
           <a:noFill/>
         </p:spPr>
         <p:txBody>
-          <a:bodyPr wrap="square" lIns="0" rIns="0" tIns="0" bIns="0" anchor="t">
+          <a:bodyPr wrap="square" lIns="0" tIns="0" rIns="0" bIns="0" anchor="t">
             <a:spAutoFit/>
           </a:bodyPr>
           <a:lstStyle/>
@@ -8811,7 +9338,7 @@
           <a:noFill/>
         </p:spPr>
         <p:txBody>
-          <a:bodyPr wrap="square" lIns="0" rIns="0" tIns="0" bIns="0" anchor="t">
+          <a:bodyPr wrap="square" lIns="0" tIns="0" rIns="0" bIns="0" anchor="t">
             <a:spAutoFit/>
           </a:bodyPr>
           <a:lstStyle/>
@@ -8853,7 +9380,7 @@
           <a:noFill/>
         </p:spPr>
         <p:txBody>
-          <a:bodyPr wrap="square" lIns="0" rIns="0" tIns="0" bIns="0" anchor="t">
+          <a:bodyPr wrap="square" lIns="0" tIns="0" rIns="0" bIns="0" anchor="t">
             <a:spAutoFit/>
           </a:bodyPr>
           <a:lstStyle/>
@@ -8931,7 +9458,7 @@
           <a:noFill/>
         </p:spPr>
         <p:txBody>
-          <a:bodyPr wrap="square" lIns="0" rIns="0" tIns="0" bIns="0" anchor="t">
+          <a:bodyPr wrap="square" lIns="0" tIns="0" rIns="0" bIns="0" anchor="t">
             <a:spAutoFit/>
           </a:bodyPr>
           <a:lstStyle/>
@@ -8973,7 +9500,7 @@
           <a:noFill/>
         </p:spPr>
         <p:txBody>
-          <a:bodyPr wrap="square" lIns="0" rIns="0" tIns="0" bIns="0" anchor="t">
+          <a:bodyPr wrap="square" lIns="0" tIns="0" rIns="0" bIns="0" anchor="t">
             <a:spAutoFit/>
           </a:bodyPr>
           <a:lstStyle/>
@@ -9015,7 +9542,7 @@
           <a:noFill/>
         </p:spPr>
         <p:txBody>
-          <a:bodyPr wrap="square" lIns="0" rIns="0" tIns="0" bIns="0" anchor="t">
+          <a:bodyPr wrap="square" lIns="0" tIns="0" rIns="0" bIns="0" anchor="t">
             <a:spAutoFit/>
           </a:bodyPr>
           <a:lstStyle/>
@@ -9093,7 +9620,7 @@
           <a:noFill/>
         </p:spPr>
         <p:txBody>
-          <a:bodyPr wrap="square" lIns="0" rIns="0" tIns="0" bIns="0" anchor="t">
+          <a:bodyPr wrap="square" lIns="0" tIns="0" rIns="0" bIns="0" anchor="t">
             <a:spAutoFit/>
           </a:bodyPr>
           <a:lstStyle/>
@@ -9135,7 +9662,7 @@
           <a:noFill/>
         </p:spPr>
         <p:txBody>
-          <a:bodyPr wrap="square" lIns="0" rIns="0" tIns="0" bIns="0" anchor="t">
+          <a:bodyPr wrap="square" lIns="0" tIns="0" rIns="0" bIns="0" anchor="t">
             <a:spAutoFit/>
           </a:bodyPr>
           <a:lstStyle/>
@@ -9177,7 +9704,7 @@
           <a:noFill/>
         </p:spPr>
         <p:txBody>
-          <a:bodyPr wrap="square" lIns="0" rIns="0" tIns="0" bIns="0" anchor="t">
+          <a:bodyPr wrap="square" lIns="0" tIns="0" rIns="0" bIns="0" anchor="t">
             <a:spAutoFit/>
           </a:bodyPr>
           <a:lstStyle/>
@@ -9255,7 +9782,7 @@
           <a:noFill/>
         </p:spPr>
         <p:txBody>
-          <a:bodyPr wrap="square" lIns="0" rIns="0" tIns="0" bIns="0" anchor="t">
+          <a:bodyPr wrap="square" lIns="0" tIns="0" rIns="0" bIns="0" anchor="t">
             <a:spAutoFit/>
           </a:bodyPr>
           <a:lstStyle/>
@@ -9297,7 +9824,7 @@
           <a:noFill/>
         </p:spPr>
         <p:txBody>
-          <a:bodyPr wrap="square" lIns="0" rIns="0" tIns="0" bIns="0" anchor="t">
+          <a:bodyPr wrap="square" lIns="0" tIns="0" rIns="0" bIns="0" anchor="t">
             <a:spAutoFit/>
           </a:bodyPr>
           <a:lstStyle/>
@@ -9339,7 +9866,7 @@
           <a:noFill/>
         </p:spPr>
         <p:txBody>
-          <a:bodyPr wrap="square" lIns="0" rIns="0" tIns="0" bIns="0" anchor="t">
+          <a:bodyPr wrap="square" lIns="0" tIns="0" rIns="0" bIns="0" anchor="t">
             <a:spAutoFit/>
           </a:bodyPr>
           <a:lstStyle/>
@@ -9381,7 +9908,7 @@
           <a:noFill/>
         </p:spPr>
         <p:txBody>
-          <a:bodyPr wrap="square" lIns="0" rIns="0" tIns="0" bIns="0" anchor="t">
+          <a:bodyPr wrap="square" lIns="0" tIns="0" rIns="0" bIns="0" anchor="t">
             <a:spAutoFit/>
           </a:bodyPr>
           <a:lstStyle/>
@@ -9423,7 +9950,7 @@
           <a:noFill/>
         </p:spPr>
         <p:txBody>
-          <a:bodyPr wrap="square" lIns="0" rIns="0" tIns="0" bIns="0" anchor="t">
+          <a:bodyPr wrap="square" lIns="0" tIns="0" rIns="0" bIns="0" anchor="t">
             <a:spAutoFit/>
           </a:bodyPr>
           <a:lstStyle/>
@@ -9465,7 +9992,7 @@
           <a:noFill/>
         </p:spPr>
         <p:txBody>
-          <a:bodyPr wrap="square" lIns="0" rIns="0" tIns="0" bIns="0" anchor="t">
+          <a:bodyPr wrap="square" lIns="0" tIns="0" rIns="0" bIns="0" anchor="t">
             <a:spAutoFit/>
           </a:bodyPr>
           <a:lstStyle/>
@@ -9507,7 +10034,7 @@
           <a:noFill/>
         </p:spPr>
         <p:txBody>
-          <a:bodyPr wrap="square" lIns="0" rIns="0" tIns="0" bIns="0" anchor="t">
+          <a:bodyPr wrap="square" lIns="0" tIns="0" rIns="0" bIns="0" anchor="t">
             <a:spAutoFit/>
           </a:bodyPr>
           <a:lstStyle/>
@@ -9549,7 +10076,7 @@
           <a:noFill/>
         </p:spPr>
         <p:txBody>
-          <a:bodyPr wrap="square" lIns="0" rIns="0" tIns="0" bIns="0" anchor="t">
+          <a:bodyPr wrap="square" lIns="0" tIns="0" rIns="0" bIns="0" anchor="t">
             <a:spAutoFit/>
           </a:bodyPr>
           <a:lstStyle/>
@@ -9591,7 +10118,7 @@
           <a:noFill/>
         </p:spPr>
         <p:txBody>
-          <a:bodyPr wrap="square" lIns="0" rIns="0" tIns="0" bIns="0" anchor="t">
+          <a:bodyPr wrap="square" lIns="0" tIns="0" rIns="0" bIns="0" anchor="t">
             <a:spAutoFit/>
           </a:bodyPr>
           <a:lstStyle/>
@@ -9633,7 +10160,7 @@
           <a:noFill/>
         </p:spPr>
         <p:txBody>
-          <a:bodyPr wrap="square" lIns="0" rIns="0" tIns="0" bIns="0" anchor="t">
+          <a:bodyPr wrap="square" lIns="0" tIns="0" rIns="0" bIns="0" anchor="t">
             <a:spAutoFit/>
           </a:bodyPr>
           <a:lstStyle/>
@@ -9675,7 +10202,7 @@
           <a:noFill/>
         </p:spPr>
         <p:txBody>
-          <a:bodyPr wrap="square" lIns="0" rIns="0" tIns="0" bIns="0" anchor="t">
+          <a:bodyPr wrap="square" lIns="0" tIns="0" rIns="0" bIns="0" anchor="t">
             <a:spAutoFit/>
           </a:bodyPr>
           <a:lstStyle/>
@@ -9709,7 +10236,7 @@
 </file>
 
 <file path=ppt/slides/slide14.xml><?xml version="1.0" encoding="utf-8"?>
-<p:sld xmlns:a="http://schemas.openxmlformats.org/drawingml/2006/main" xmlns:p="http://schemas.openxmlformats.org/presentationml/2006/main" xmlns:r="http://schemas.openxmlformats.org/officeDocument/2006/relationships">
+<p:sld xmlns:a="http://schemas.openxmlformats.org/drawingml/2006/main" xmlns:r="http://schemas.openxmlformats.org/officeDocument/2006/relationships" xmlns:p="http://schemas.openxmlformats.org/presentationml/2006/main">
   <p:cSld>
     <p:bg>
       <p:bgPr>
@@ -9725,7 +10252,14 @@
         <p:cNvGrpSpPr/>
         <p:nvPr/>
       </p:nvGrpSpPr>
-      <p:grpSpPr/>
+      <p:grpSpPr>
+        <a:xfrm>
+          <a:off x="0" y="0"/>
+          <a:ext cx="0" cy="0"/>
+          <a:chOff x="0" y="0"/>
+          <a:chExt cx="0" cy="0"/>
+        </a:xfrm>
+      </p:grpSpPr>
       <p:sp>
         <p:nvSpPr>
           <p:cNvPr id="2" name="Rectangle 1"/>
@@ -9765,7 +10299,9 @@
         <p:txBody>
           <a:bodyPr rtlCol="0" anchor="ctr"/>
           <a:lstStyle/>
-          <a:p/>
+          <a:p>
+            <a:endParaRPr/>
+          </a:p>
         </p:txBody>
       </p:sp>
       <p:sp>
@@ -9785,7 +10321,7 @@
           <a:noFill/>
         </p:spPr>
         <p:txBody>
-          <a:bodyPr wrap="square" lIns="0" rIns="0" tIns="0" bIns="0" anchor="t">
+          <a:bodyPr wrap="square" lIns="0" tIns="0" rIns="0" bIns="0" anchor="t">
             <a:spAutoFit/>
           </a:bodyPr>
           <a:lstStyle/>
@@ -9827,7 +10363,7 @@
           <a:noFill/>
         </p:spPr>
         <p:txBody>
-          <a:bodyPr wrap="square" lIns="0" rIns="0" tIns="0" bIns="0" anchor="t">
+          <a:bodyPr wrap="square" lIns="0" tIns="0" rIns="0" bIns="0" anchor="t">
             <a:spAutoFit/>
           </a:bodyPr>
           <a:lstStyle/>
@@ -9905,7 +10441,7 @@
           <a:noFill/>
         </p:spPr>
         <p:txBody>
-          <a:bodyPr wrap="square" lIns="0" rIns="0" tIns="0" bIns="0" anchor="t">
+          <a:bodyPr wrap="square" lIns="0" tIns="0" rIns="0" bIns="0" anchor="t">
             <a:spAutoFit/>
           </a:bodyPr>
           <a:lstStyle/>
@@ -9983,7 +10519,7 @@
           <a:noFill/>
         </p:spPr>
         <p:txBody>
-          <a:bodyPr wrap="square" lIns="0" rIns="0" tIns="0" bIns="0" anchor="t">
+          <a:bodyPr wrap="square" lIns="0" tIns="0" rIns="0" bIns="0" anchor="t">
             <a:spAutoFit/>
           </a:bodyPr>
           <a:lstStyle/>
@@ -10025,7 +10561,7 @@
           <a:noFill/>
         </p:spPr>
         <p:txBody>
-          <a:bodyPr wrap="square" lIns="0" rIns="0" tIns="0" bIns="0" anchor="t">
+          <a:bodyPr wrap="square" lIns="0" tIns="0" rIns="0" bIns="0" anchor="t">
             <a:spAutoFit/>
           </a:bodyPr>
           <a:lstStyle/>
@@ -10067,7 +10603,7 @@
           <a:noFill/>
         </p:spPr>
         <p:txBody>
-          <a:bodyPr wrap="square" lIns="0" rIns="0" tIns="0" bIns="0" anchor="t">
+          <a:bodyPr wrap="square" lIns="0" tIns="0" rIns="0" bIns="0" anchor="t">
             <a:spAutoFit/>
           </a:bodyPr>
           <a:lstStyle/>
@@ -10101,15 +10637,15 @@
         <p:spPr>
           <a:xfrm>
             <a:off x="822960" y="3657600"/>
-            <a:ext cx="3058058" cy="457200"/>
-          </a:xfrm>
-          <a:prstGeom prst="rect">
-            <a:avLst/>
-          </a:prstGeom>
-          <a:noFill/>
-        </p:spPr>
-        <p:txBody>
-          <a:bodyPr wrap="square" lIns="0" rIns="0" tIns="0" bIns="0" anchor="t">
+            <a:ext cx="3058058" cy="207942"/>
+          </a:xfrm>
+          <a:prstGeom prst="rect">
+            <a:avLst/>
+          </a:prstGeom>
+          <a:noFill/>
+        </p:spPr>
+        <p:txBody>
+          <a:bodyPr wrap="square" lIns="0" tIns="0" rIns="0" bIns="0" anchor="t">
             <a:spAutoFit/>
           </a:bodyPr>
           <a:lstStyle/>
@@ -10123,13 +10659,22 @@
               </a:spcAft>
             </a:pPr>
             <a:r>
-              <a:rPr sz="1200" b="0" i="0">
+              <a:rPr sz="1200" b="0" i="0" dirty="0" err="1">
                 <a:solidFill>
                   <a:srgbClr val="B9BEC6"/>
                 </a:solidFill>
                 <a:latin typeface="Segoe UI"/>
               </a:rPr>
-              <a:t>Integración continua y firma digital</a:t>
+              <a:t>Integración</a:t>
+            </a:r>
+            <a:r>
+              <a:rPr sz="1200" b="0" i="0" dirty="0">
+                <a:solidFill>
+                  <a:srgbClr val="B9BEC6"/>
+                </a:solidFill>
+                <a:latin typeface="Segoe UI"/>
+              </a:rPr>
+              <a:t> continua</a:t>
             </a:r>
           </a:p>
         </p:txBody>
@@ -10151,7 +10696,7 @@
           <a:noFill/>
         </p:spPr>
         <p:txBody>
-          <a:bodyPr wrap="square" lIns="0" rIns="0" tIns="0" bIns="0" anchor="t">
+          <a:bodyPr wrap="square" lIns="0" tIns="0" rIns="0" bIns="0" anchor="t">
             <a:spAutoFit/>
           </a:bodyPr>
           <a:lstStyle/>
@@ -10229,7 +10774,7 @@
           <a:noFill/>
         </p:spPr>
         <p:txBody>
-          <a:bodyPr wrap="square" lIns="0" rIns="0" tIns="0" bIns="0" anchor="t">
+          <a:bodyPr wrap="square" lIns="0" tIns="0" rIns="0" bIns="0" anchor="t">
             <a:spAutoFit/>
           </a:bodyPr>
           <a:lstStyle/>
@@ -10271,7 +10816,7 @@
           <a:noFill/>
         </p:spPr>
         <p:txBody>
-          <a:bodyPr wrap="square" lIns="0" rIns="0" tIns="0" bIns="0" anchor="t">
+          <a:bodyPr wrap="square" lIns="0" tIns="0" rIns="0" bIns="0" anchor="t">
             <a:spAutoFit/>
           </a:bodyPr>
           <a:lstStyle/>
@@ -10313,7 +10858,7 @@
           <a:noFill/>
         </p:spPr>
         <p:txBody>
-          <a:bodyPr wrap="square" lIns="0" rIns="0" tIns="0" bIns="0" anchor="t">
+          <a:bodyPr wrap="square" lIns="0" tIns="0" rIns="0" bIns="0" anchor="t">
             <a:spAutoFit/>
           </a:bodyPr>
           <a:lstStyle/>
@@ -10347,15 +10892,15 @@
         <p:spPr>
           <a:xfrm>
             <a:off x="4475378" y="3657600"/>
-            <a:ext cx="3058058" cy="457200"/>
-          </a:xfrm>
-          <a:prstGeom prst="rect">
-            <a:avLst/>
-          </a:prstGeom>
-          <a:noFill/>
-        </p:spPr>
-        <p:txBody>
-          <a:bodyPr wrap="square" lIns="0" rIns="0" tIns="0" bIns="0" anchor="t">
+            <a:ext cx="3058058" cy="207942"/>
+          </a:xfrm>
+          <a:prstGeom prst="rect">
+            <a:avLst/>
+          </a:prstGeom>
+          <a:noFill/>
+        </p:spPr>
+        <p:txBody>
+          <a:bodyPr wrap="square" lIns="0" tIns="0" rIns="0" bIns="0" anchor="t">
             <a:spAutoFit/>
           </a:bodyPr>
           <a:lstStyle/>
@@ -10369,13 +10914,40 @@
               </a:spcAft>
             </a:pPr>
             <a:r>
-              <a:rPr sz="1200" b="0" i="0">
+              <a:rPr sz="1200" b="0" i="0" dirty="0" err="1">
                 <a:solidFill>
                   <a:srgbClr val="B9BEC6"/>
                 </a:solidFill>
                 <a:latin typeface="Segoe UI"/>
               </a:rPr>
-              <a:t>Disparo por sensor y salida a PLC</a:t>
+              <a:t>Disparo</a:t>
+            </a:r>
+            <a:r>
+              <a:rPr sz="1200" b="0" i="0" dirty="0">
+                <a:solidFill>
+                  <a:srgbClr val="B9BEC6"/>
+                </a:solidFill>
+                <a:latin typeface="Segoe UI"/>
+              </a:rPr>
+              <a:t> </a:t>
+            </a:r>
+            <a:r>
+              <a:rPr sz="1200" b="0" i="0" dirty="0" err="1">
+                <a:solidFill>
+                  <a:srgbClr val="B9BEC6"/>
+                </a:solidFill>
+                <a:latin typeface="Segoe UI"/>
+              </a:rPr>
+              <a:t>por</a:t>
+            </a:r>
+            <a:r>
+              <a:rPr sz="1200" b="0" i="0" dirty="0">
+                <a:solidFill>
+                  <a:srgbClr val="B9BEC6"/>
+                </a:solidFill>
+                <a:latin typeface="Segoe UI"/>
+              </a:rPr>
+              <a:t> sensor</a:t>
             </a:r>
           </a:p>
         </p:txBody>
@@ -10397,7 +10969,7 @@
           <a:noFill/>
         </p:spPr>
         <p:txBody>
-          <a:bodyPr wrap="square" lIns="0" rIns="0" tIns="0" bIns="0" anchor="t">
+          <a:bodyPr wrap="square" lIns="0" tIns="0" rIns="0" bIns="0" anchor="t">
             <a:spAutoFit/>
           </a:bodyPr>
           <a:lstStyle/>
@@ -10475,7 +11047,7 @@
           <a:noFill/>
         </p:spPr>
         <p:txBody>
-          <a:bodyPr wrap="square" lIns="0" rIns="0" tIns="0" bIns="0" anchor="t">
+          <a:bodyPr wrap="square" lIns="0" tIns="0" rIns="0" bIns="0" anchor="t">
             <a:spAutoFit/>
           </a:bodyPr>
           <a:lstStyle/>
@@ -10517,7 +11089,7 @@
           <a:noFill/>
         </p:spPr>
         <p:txBody>
-          <a:bodyPr wrap="square" lIns="0" rIns="0" tIns="0" bIns="0" anchor="t">
+          <a:bodyPr wrap="square" lIns="0" tIns="0" rIns="0" bIns="0" anchor="t">
             <a:spAutoFit/>
           </a:bodyPr>
           <a:lstStyle/>
@@ -10559,7 +11131,7 @@
           <a:noFill/>
         </p:spPr>
         <p:txBody>
-          <a:bodyPr wrap="square" lIns="0" rIns="0" tIns="0" bIns="0" anchor="t">
+          <a:bodyPr wrap="square" lIns="0" tIns="0" rIns="0" bIns="0" anchor="t">
             <a:spAutoFit/>
           </a:bodyPr>
           <a:lstStyle/>
@@ -10601,7 +11173,7 @@
           <a:noFill/>
         </p:spPr>
         <p:txBody>
-          <a:bodyPr wrap="square" lIns="0" rIns="0" tIns="0" bIns="0" anchor="t">
+          <a:bodyPr wrap="square" lIns="0" tIns="0" rIns="0" bIns="0" anchor="t">
             <a:spAutoFit/>
           </a:bodyPr>
           <a:lstStyle/>
@@ -10679,7 +11251,7 @@
           <a:noFill/>
         </p:spPr>
         <p:txBody>
-          <a:bodyPr wrap="square" lIns="0" rIns="0" tIns="0" bIns="0" anchor="t">
+          <a:bodyPr wrap="square" lIns="0" tIns="0" rIns="0" bIns="0" anchor="t">
             <a:spAutoFit/>
           </a:bodyPr>
           <a:lstStyle/>
@@ -10721,7 +11293,7 @@
           <a:noFill/>
         </p:spPr>
         <p:txBody>
-          <a:bodyPr wrap="square" lIns="0" rIns="0" tIns="0" bIns="0" anchor="t">
+          <a:bodyPr wrap="square" lIns="0" tIns="0" rIns="0" bIns="0" anchor="t">
             <a:spAutoFit/>
           </a:bodyPr>
           <a:lstStyle/>
@@ -10763,7 +11335,7 @@
           <a:noFill/>
         </p:spPr>
         <p:txBody>
-          <a:bodyPr wrap="square" lIns="0" rIns="0" tIns="0" bIns="0" anchor="t">
+          <a:bodyPr wrap="square" lIns="0" tIns="0" rIns="0" bIns="0" anchor="t">
             <a:spAutoFit/>
           </a:bodyPr>
           <a:lstStyle/>
@@ -10841,7 +11413,7 @@
           <a:noFill/>
         </p:spPr>
         <p:txBody>
-          <a:bodyPr wrap="square" lIns="0" rIns="0" tIns="0" bIns="0" anchor="t">
+          <a:bodyPr wrap="square" lIns="0" tIns="0" rIns="0" bIns="0" anchor="t">
             <a:spAutoFit/>
           </a:bodyPr>
           <a:lstStyle/>
@@ -10883,7 +11455,7 @@
           <a:noFill/>
         </p:spPr>
         <p:txBody>
-          <a:bodyPr wrap="square" lIns="0" rIns="0" tIns="0" bIns="0" anchor="t">
+          <a:bodyPr wrap="square" lIns="0" tIns="0" rIns="0" bIns="0" anchor="t">
             <a:spAutoFit/>
           </a:bodyPr>
           <a:lstStyle/>
@@ -10961,7 +11533,7 @@
           <a:noFill/>
         </p:spPr>
         <p:txBody>
-          <a:bodyPr wrap="square" lIns="0" rIns="0" tIns="0" bIns="0" anchor="t">
+          <a:bodyPr wrap="square" lIns="0" tIns="0" rIns="0" bIns="0" anchor="t">
             <a:spAutoFit/>
           </a:bodyPr>
           <a:lstStyle/>
@@ -11003,7 +11575,7 @@
           <a:noFill/>
         </p:spPr>
         <p:txBody>
-          <a:bodyPr wrap="square" lIns="0" rIns="0" tIns="0" bIns="0" anchor="t">
+          <a:bodyPr wrap="square" lIns="0" tIns="0" rIns="0" bIns="0" anchor="t">
             <a:spAutoFit/>
           </a:bodyPr>
           <a:lstStyle/>
@@ -11073,7 +11645,7 @@
 </file>
 
 <file path=ppt/slides/slide2.xml><?xml version="1.0" encoding="utf-8"?>
-<p:sld xmlns:a="http://schemas.openxmlformats.org/drawingml/2006/main" xmlns:p="http://schemas.openxmlformats.org/presentationml/2006/main" xmlns:r="http://schemas.openxmlformats.org/officeDocument/2006/relationships">
+<p:sld xmlns:a="http://schemas.openxmlformats.org/drawingml/2006/main" xmlns:r="http://schemas.openxmlformats.org/officeDocument/2006/relationships" xmlns:p="http://schemas.openxmlformats.org/presentationml/2006/main">
   <p:cSld>
     <p:bg>
       <p:bgPr>
@@ -11089,7 +11661,14 @@
         <p:cNvGrpSpPr/>
         <p:nvPr/>
       </p:nvGrpSpPr>
-      <p:grpSpPr/>
+      <p:grpSpPr>
+        <a:xfrm>
+          <a:off x="0" y="0"/>
+          <a:ext cx="0" cy="0"/>
+          <a:chOff x="0" y="0"/>
+          <a:chExt cx="0" cy="0"/>
+        </a:xfrm>
+      </p:grpSpPr>
       <p:sp>
         <p:nvSpPr>
           <p:cNvPr id="2" name="TextBox 1"/>
@@ -11107,7 +11686,7 @@
           <a:noFill/>
         </p:spPr>
         <p:txBody>
-          <a:bodyPr wrap="square" lIns="0" rIns="0" tIns="0" bIns="0" anchor="t">
+          <a:bodyPr wrap="square" lIns="0" tIns="0" rIns="0" bIns="0" anchor="t">
             <a:spAutoFit/>
           </a:bodyPr>
           <a:lstStyle/>
@@ -11149,7 +11728,7 @@
           <a:noFill/>
         </p:spPr>
         <p:txBody>
-          <a:bodyPr wrap="square" lIns="0" rIns="0" tIns="0" bIns="0" anchor="t">
+          <a:bodyPr wrap="square" lIns="0" tIns="0" rIns="0" bIns="0" anchor="t">
             <a:spAutoFit/>
           </a:bodyPr>
           <a:lstStyle/>
@@ -11219,15 +11798,15 @@
         <p:spPr>
           <a:xfrm>
             <a:off x="822960" y="1755648"/>
-            <a:ext cx="4846320" cy="1340165"/>
-          </a:xfrm>
-          <a:prstGeom prst="rect">
-            <a:avLst/>
-          </a:prstGeom>
-          <a:noFill/>
-        </p:spPr>
-        <p:txBody>
-          <a:bodyPr wrap="square" lIns="0" rIns="0" tIns="0" bIns="0" anchor="t">
+            <a:ext cx="4846320" cy="1371466"/>
+          </a:xfrm>
+          <a:prstGeom prst="rect">
+            <a:avLst/>
+          </a:prstGeom>
+          <a:noFill/>
+        </p:spPr>
+        <p:txBody>
+          <a:bodyPr wrap="square" lIns="0" tIns="0" rIns="0" bIns="0" anchor="t">
             <a:spAutoFit/>
           </a:bodyPr>
           <a:lstStyle/>
@@ -11241,13 +11820,499 @@
               </a:spcAft>
             </a:pPr>
             <a:r>
-              <a:rPr sz="1350" b="0" i="0">
+              <a:rPr sz="1350" b="0" i="0" dirty="0">
                 <a:solidFill>
                   <a:srgbClr val="4A4F57"/>
                 </a:solidFill>
                 <a:latin typeface="Segoe UI"/>
               </a:rPr>
-              <a:t>PC Inspector convierte una PC con una cámara USB en un puesto de verificación dimensional. Se registra una pieza correcta, se dibujan sobre ella las cotas a controlar y cada pieza que pase por la cámara recibe un veredicto con el valor medido de cada cota.</a:t>
+              <a:t>PC Inspector </a:t>
+            </a:r>
+            <a:r>
+              <a:rPr sz="1350" b="0" i="0" dirty="0" err="1">
+                <a:solidFill>
+                  <a:srgbClr val="4A4F57"/>
+                </a:solidFill>
+                <a:latin typeface="Segoe UI"/>
+              </a:rPr>
+              <a:t>convierte</a:t>
+            </a:r>
+            <a:r>
+              <a:rPr sz="1350" b="0" i="0" dirty="0">
+                <a:solidFill>
+                  <a:srgbClr val="4A4F57"/>
+                </a:solidFill>
+                <a:latin typeface="Segoe UI"/>
+              </a:rPr>
+              <a:t> </a:t>
+            </a:r>
+            <a:r>
+              <a:rPr sz="1350" b="0" i="0" dirty="0" err="1">
+                <a:solidFill>
+                  <a:srgbClr val="4A4F57"/>
+                </a:solidFill>
+                <a:latin typeface="Segoe UI"/>
+              </a:rPr>
+              <a:t>una</a:t>
+            </a:r>
+            <a:r>
+              <a:rPr sz="1350" b="0" i="0" dirty="0">
+                <a:solidFill>
+                  <a:srgbClr val="4A4F57"/>
+                </a:solidFill>
+                <a:latin typeface="Segoe UI"/>
+              </a:rPr>
+              <a:t> PC con </a:t>
+            </a:r>
+            <a:r>
+              <a:rPr sz="1350" b="0" i="0" dirty="0" err="1">
+                <a:solidFill>
+                  <a:srgbClr val="4A4F57"/>
+                </a:solidFill>
+                <a:latin typeface="Segoe UI"/>
+              </a:rPr>
+              <a:t>una</a:t>
+            </a:r>
+            <a:r>
+              <a:rPr sz="1350" b="0" i="0" dirty="0">
+                <a:solidFill>
+                  <a:srgbClr val="4A4F57"/>
+                </a:solidFill>
+                <a:latin typeface="Segoe UI"/>
+              </a:rPr>
+              <a:t> </a:t>
+            </a:r>
+            <a:r>
+              <a:rPr sz="1350" b="0" i="0" dirty="0" err="1">
+                <a:solidFill>
+                  <a:srgbClr val="4A4F57"/>
+                </a:solidFill>
+                <a:latin typeface="Segoe UI"/>
+              </a:rPr>
+              <a:t>cámara</a:t>
+            </a:r>
+            <a:r>
+              <a:rPr sz="1350" b="0" i="0" dirty="0">
+                <a:solidFill>
+                  <a:srgbClr val="4A4F57"/>
+                </a:solidFill>
+                <a:latin typeface="Segoe UI"/>
+              </a:rPr>
+              <a:t> </a:t>
+            </a:r>
+            <a:r>
+              <a:rPr sz="1350" b="0" i="0" dirty="0" err="1">
+                <a:solidFill>
+                  <a:srgbClr val="4A4F57"/>
+                </a:solidFill>
+                <a:latin typeface="Segoe UI"/>
+              </a:rPr>
+              <a:t>en</a:t>
+            </a:r>
+            <a:r>
+              <a:rPr sz="1350" b="0" i="0" dirty="0">
+                <a:solidFill>
+                  <a:srgbClr val="4A4F57"/>
+                </a:solidFill>
+                <a:latin typeface="Segoe UI"/>
+              </a:rPr>
+              <a:t> un </a:t>
+            </a:r>
+            <a:r>
+              <a:rPr sz="1350" b="0" i="0" dirty="0" err="1">
+                <a:solidFill>
+                  <a:srgbClr val="4A4F57"/>
+                </a:solidFill>
+                <a:latin typeface="Segoe UI"/>
+              </a:rPr>
+              <a:t>puesto</a:t>
+            </a:r>
+            <a:r>
+              <a:rPr sz="1350" b="0" i="0" dirty="0">
+                <a:solidFill>
+                  <a:srgbClr val="4A4F57"/>
+                </a:solidFill>
+                <a:latin typeface="Segoe UI"/>
+              </a:rPr>
+              <a:t> de </a:t>
+            </a:r>
+            <a:r>
+              <a:rPr sz="1350" b="0" i="0" dirty="0" err="1">
+                <a:solidFill>
+                  <a:srgbClr val="4A4F57"/>
+                </a:solidFill>
+                <a:latin typeface="Segoe UI"/>
+              </a:rPr>
+              <a:t>verificación</a:t>
+            </a:r>
+            <a:r>
+              <a:rPr sz="1350" b="0" i="0" dirty="0">
+                <a:solidFill>
+                  <a:srgbClr val="4A4F57"/>
+                </a:solidFill>
+                <a:latin typeface="Segoe UI"/>
+              </a:rPr>
+              <a:t> dimensional. Se </a:t>
+            </a:r>
+            <a:r>
+              <a:rPr sz="1350" b="0" i="0" dirty="0" err="1">
+                <a:solidFill>
+                  <a:srgbClr val="4A4F57"/>
+                </a:solidFill>
+                <a:latin typeface="Segoe UI"/>
+              </a:rPr>
+              <a:t>registra</a:t>
+            </a:r>
+            <a:r>
+              <a:rPr sz="1350" b="0" i="0" dirty="0">
+                <a:solidFill>
+                  <a:srgbClr val="4A4F57"/>
+                </a:solidFill>
+                <a:latin typeface="Segoe UI"/>
+              </a:rPr>
+              <a:t> </a:t>
+            </a:r>
+            <a:r>
+              <a:rPr sz="1350" b="0" i="0" dirty="0" err="1">
+                <a:solidFill>
+                  <a:srgbClr val="4A4F57"/>
+                </a:solidFill>
+                <a:latin typeface="Segoe UI"/>
+              </a:rPr>
+              <a:t>una</a:t>
+            </a:r>
+            <a:r>
+              <a:rPr sz="1350" b="0" i="0" dirty="0">
+                <a:solidFill>
+                  <a:srgbClr val="4A4F57"/>
+                </a:solidFill>
+                <a:latin typeface="Segoe UI"/>
+              </a:rPr>
+              <a:t> </a:t>
+            </a:r>
+            <a:r>
+              <a:rPr sz="1350" b="0" i="0" dirty="0" err="1">
+                <a:solidFill>
+                  <a:srgbClr val="4A4F57"/>
+                </a:solidFill>
+                <a:latin typeface="Segoe UI"/>
+              </a:rPr>
+              <a:t>pieza</a:t>
+            </a:r>
+            <a:r>
+              <a:rPr sz="1350" b="0" i="0" dirty="0">
+                <a:solidFill>
+                  <a:srgbClr val="4A4F57"/>
+                </a:solidFill>
+                <a:latin typeface="Segoe UI"/>
+              </a:rPr>
+              <a:t> </a:t>
+            </a:r>
+            <a:r>
+              <a:rPr sz="1350" b="0" i="0" dirty="0" err="1">
+                <a:solidFill>
+                  <a:srgbClr val="4A4F57"/>
+                </a:solidFill>
+                <a:latin typeface="Segoe UI"/>
+              </a:rPr>
+              <a:t>correcta</a:t>
+            </a:r>
+            <a:r>
+              <a:rPr sz="1350" b="0" i="0" dirty="0">
+                <a:solidFill>
+                  <a:srgbClr val="4A4F57"/>
+                </a:solidFill>
+                <a:latin typeface="Segoe UI"/>
+              </a:rPr>
+              <a:t>, se </a:t>
+            </a:r>
+            <a:r>
+              <a:rPr sz="1350" b="0" i="0" dirty="0" err="1">
+                <a:solidFill>
+                  <a:srgbClr val="4A4F57"/>
+                </a:solidFill>
+                <a:latin typeface="Segoe UI"/>
+              </a:rPr>
+              <a:t>dibujan</a:t>
+            </a:r>
+            <a:r>
+              <a:rPr sz="1350" b="0" i="0" dirty="0">
+                <a:solidFill>
+                  <a:srgbClr val="4A4F57"/>
+                </a:solidFill>
+                <a:latin typeface="Segoe UI"/>
+              </a:rPr>
+              <a:t> </a:t>
+            </a:r>
+            <a:r>
+              <a:rPr sz="1350" b="0" i="0" dirty="0" err="1">
+                <a:solidFill>
+                  <a:srgbClr val="4A4F57"/>
+                </a:solidFill>
+                <a:latin typeface="Segoe UI"/>
+              </a:rPr>
+              <a:t>sobre</a:t>
+            </a:r>
+            <a:r>
+              <a:rPr sz="1350" b="0" i="0" dirty="0">
+                <a:solidFill>
+                  <a:srgbClr val="4A4F57"/>
+                </a:solidFill>
+                <a:latin typeface="Segoe UI"/>
+              </a:rPr>
+              <a:t> </a:t>
+            </a:r>
+            <a:r>
+              <a:rPr sz="1350" b="0" i="0" dirty="0" err="1">
+                <a:solidFill>
+                  <a:srgbClr val="4A4F57"/>
+                </a:solidFill>
+                <a:latin typeface="Segoe UI"/>
+              </a:rPr>
+              <a:t>ella</a:t>
+            </a:r>
+            <a:r>
+              <a:rPr sz="1350" b="0" i="0" dirty="0">
+                <a:solidFill>
+                  <a:srgbClr val="4A4F57"/>
+                </a:solidFill>
+                <a:latin typeface="Segoe UI"/>
+              </a:rPr>
+              <a:t> las </a:t>
+            </a:r>
+            <a:r>
+              <a:rPr sz="1350" b="0" i="0" dirty="0" err="1">
+                <a:solidFill>
+                  <a:srgbClr val="4A4F57"/>
+                </a:solidFill>
+                <a:latin typeface="Segoe UI"/>
+              </a:rPr>
+              <a:t>cotas</a:t>
+            </a:r>
+            <a:r>
+              <a:rPr sz="1350" b="0" i="0" dirty="0">
+                <a:solidFill>
+                  <a:srgbClr val="4A4F57"/>
+                </a:solidFill>
+                <a:latin typeface="Segoe UI"/>
+              </a:rPr>
+              <a:t> a </a:t>
+            </a:r>
+            <a:r>
+              <a:rPr sz="1350" b="0" i="0" dirty="0" err="1">
+                <a:solidFill>
+                  <a:srgbClr val="4A4F57"/>
+                </a:solidFill>
+                <a:latin typeface="Segoe UI"/>
+              </a:rPr>
+              <a:t>controlar</a:t>
+            </a:r>
+            <a:r>
+              <a:rPr sz="1350" b="0" i="0" dirty="0">
+                <a:solidFill>
+                  <a:srgbClr val="4A4F57"/>
+                </a:solidFill>
+                <a:latin typeface="Segoe UI"/>
+              </a:rPr>
+              <a:t> y </a:t>
+            </a:r>
+            <a:r>
+              <a:rPr sz="1350" b="0" i="0" dirty="0" err="1">
+                <a:solidFill>
+                  <a:srgbClr val="4A4F57"/>
+                </a:solidFill>
+                <a:latin typeface="Segoe UI"/>
+              </a:rPr>
+              <a:t>cada</a:t>
+            </a:r>
+            <a:r>
+              <a:rPr sz="1350" b="0" i="0" dirty="0">
+                <a:solidFill>
+                  <a:srgbClr val="4A4F57"/>
+                </a:solidFill>
+                <a:latin typeface="Segoe UI"/>
+              </a:rPr>
+              <a:t> </a:t>
+            </a:r>
+            <a:r>
+              <a:rPr sz="1350" b="0" i="0" dirty="0" err="1">
+                <a:solidFill>
+                  <a:srgbClr val="4A4F57"/>
+                </a:solidFill>
+                <a:latin typeface="Segoe UI"/>
+              </a:rPr>
+              <a:t>pieza</a:t>
+            </a:r>
+            <a:r>
+              <a:rPr sz="1350" b="0" i="0" dirty="0">
+                <a:solidFill>
+                  <a:srgbClr val="4A4F57"/>
+                </a:solidFill>
+                <a:latin typeface="Segoe UI"/>
+              </a:rPr>
+              <a:t> </a:t>
+            </a:r>
+            <a:r>
+              <a:rPr sz="1350" b="0" i="0" dirty="0" err="1">
+                <a:solidFill>
+                  <a:srgbClr val="4A4F57"/>
+                </a:solidFill>
+                <a:latin typeface="Segoe UI"/>
+              </a:rPr>
+              <a:t>que</a:t>
+            </a:r>
+            <a:r>
+              <a:rPr sz="1350" b="0" i="0" dirty="0">
+                <a:solidFill>
+                  <a:srgbClr val="4A4F57"/>
+                </a:solidFill>
+                <a:latin typeface="Segoe UI"/>
+              </a:rPr>
+              <a:t> </a:t>
+            </a:r>
+            <a:r>
+              <a:rPr sz="1350" b="0" i="0" dirty="0" err="1">
+                <a:solidFill>
+                  <a:srgbClr val="4A4F57"/>
+                </a:solidFill>
+                <a:latin typeface="Segoe UI"/>
+              </a:rPr>
+              <a:t>pase</a:t>
+            </a:r>
+            <a:r>
+              <a:rPr sz="1350" b="0" i="0" dirty="0">
+                <a:solidFill>
+                  <a:srgbClr val="4A4F57"/>
+                </a:solidFill>
+                <a:latin typeface="Segoe UI"/>
+              </a:rPr>
+              <a:t> </a:t>
+            </a:r>
+            <a:r>
+              <a:rPr sz="1350" b="0" i="0" dirty="0" err="1">
+                <a:solidFill>
+                  <a:srgbClr val="4A4F57"/>
+                </a:solidFill>
+                <a:latin typeface="Segoe UI"/>
+              </a:rPr>
+              <a:t>por</a:t>
+            </a:r>
+            <a:r>
+              <a:rPr sz="1350" b="0" i="0" dirty="0">
+                <a:solidFill>
+                  <a:srgbClr val="4A4F57"/>
+                </a:solidFill>
+                <a:latin typeface="Segoe UI"/>
+              </a:rPr>
+              <a:t> la </a:t>
+            </a:r>
+            <a:r>
+              <a:rPr sz="1350" b="0" i="0" dirty="0" err="1">
+                <a:solidFill>
+                  <a:srgbClr val="4A4F57"/>
+                </a:solidFill>
+                <a:latin typeface="Segoe UI"/>
+              </a:rPr>
+              <a:t>cámara</a:t>
+            </a:r>
+            <a:r>
+              <a:rPr sz="1350" b="0" i="0" dirty="0">
+                <a:solidFill>
+                  <a:srgbClr val="4A4F57"/>
+                </a:solidFill>
+                <a:latin typeface="Segoe UI"/>
+              </a:rPr>
+              <a:t> </a:t>
+            </a:r>
+            <a:r>
+              <a:rPr sz="1350" b="0" i="0" dirty="0" err="1">
+                <a:solidFill>
+                  <a:srgbClr val="4A4F57"/>
+                </a:solidFill>
+                <a:latin typeface="Segoe UI"/>
+              </a:rPr>
+              <a:t>recibe</a:t>
+            </a:r>
+            <a:r>
+              <a:rPr sz="1350" b="0" i="0" dirty="0">
+                <a:solidFill>
+                  <a:srgbClr val="4A4F57"/>
+                </a:solidFill>
+                <a:latin typeface="Segoe UI"/>
+              </a:rPr>
+              <a:t> un </a:t>
+            </a:r>
+            <a:r>
+              <a:rPr sz="1350" b="0" i="0" dirty="0" err="1">
+                <a:solidFill>
+                  <a:srgbClr val="4A4F57"/>
+                </a:solidFill>
+                <a:latin typeface="Segoe UI"/>
+              </a:rPr>
+              <a:t>veredicto</a:t>
+            </a:r>
+            <a:r>
+              <a:rPr sz="1350" b="0" i="0" dirty="0">
+                <a:solidFill>
+                  <a:srgbClr val="4A4F57"/>
+                </a:solidFill>
+                <a:latin typeface="Segoe UI"/>
+              </a:rPr>
+              <a:t> con el valor </a:t>
+            </a:r>
+            <a:r>
+              <a:rPr sz="1350" b="0" i="0" dirty="0" err="1">
+                <a:solidFill>
+                  <a:srgbClr val="4A4F57"/>
+                </a:solidFill>
+                <a:latin typeface="Segoe UI"/>
+              </a:rPr>
+              <a:t>medido</a:t>
+            </a:r>
+            <a:r>
+              <a:rPr sz="1350" b="0" i="0" dirty="0">
+                <a:solidFill>
+                  <a:srgbClr val="4A4F57"/>
+                </a:solidFill>
+                <a:latin typeface="Segoe UI"/>
+              </a:rPr>
+              <a:t> de </a:t>
+            </a:r>
+            <a:r>
+              <a:rPr sz="1350" b="0" i="0" dirty="0" err="1">
+                <a:solidFill>
+                  <a:srgbClr val="4A4F57"/>
+                </a:solidFill>
+                <a:latin typeface="Segoe UI"/>
+              </a:rPr>
+              <a:t>cada</a:t>
+            </a:r>
+            <a:r>
+              <a:rPr sz="1350" b="0" i="0" dirty="0">
+                <a:solidFill>
+                  <a:srgbClr val="4A4F57"/>
+                </a:solidFill>
+                <a:latin typeface="Segoe UI"/>
+              </a:rPr>
+              <a:t> </a:t>
+            </a:r>
+            <a:r>
+              <a:rPr sz="1350" b="0" i="0" dirty="0" err="1">
+                <a:solidFill>
+                  <a:srgbClr val="4A4F57"/>
+                </a:solidFill>
+                <a:latin typeface="Segoe UI"/>
+              </a:rPr>
+              <a:t>cota</a:t>
+            </a:r>
+            <a:r>
+              <a:rPr sz="1350" b="0" i="0" dirty="0">
+                <a:solidFill>
+                  <a:srgbClr val="4A4F57"/>
+                </a:solidFill>
+                <a:latin typeface="Segoe UI"/>
+              </a:rPr>
+              <a:t>.</a:t>
             </a:r>
           </a:p>
         </p:txBody>
@@ -11269,7 +12334,7 @@
           <a:noFill/>
         </p:spPr>
         <p:txBody>
-          <a:bodyPr wrap="square" lIns="0" rIns="0" tIns="0" bIns="0" anchor="t">
+          <a:bodyPr wrap="square" lIns="0" tIns="0" rIns="0" bIns="0" anchor="t">
             <a:spAutoFit/>
           </a:bodyPr>
           <a:lstStyle/>
@@ -11303,15 +12368,15 @@
         <p:spPr>
           <a:xfrm>
             <a:off x="2179929" y="3296981"/>
-            <a:ext cx="3489351" cy="281940"/>
-          </a:xfrm>
-          <a:prstGeom prst="rect">
-            <a:avLst/>
-          </a:prstGeom>
-          <a:noFill/>
-        </p:spPr>
-        <p:txBody>
-          <a:bodyPr wrap="square" lIns="0" rIns="0" tIns="0" bIns="0" anchor="t">
+            <a:ext cx="3489351" cy="207942"/>
+          </a:xfrm>
+          <a:prstGeom prst="rect">
+            <a:avLst/>
+          </a:prstGeom>
+          <a:noFill/>
+        </p:spPr>
+        <p:txBody>
+          <a:bodyPr wrap="square" lIns="0" tIns="0" rIns="0" bIns="0" anchor="t">
             <a:spAutoFit/>
           </a:bodyPr>
           <a:lstStyle/>
@@ -11325,14 +12390,47 @@
               </a:spcAft>
             </a:pPr>
             <a:r>
-              <a:rPr sz="1200" b="0" i="0">
+              <a:rPr sz="1200" b="0" i="0" dirty="0">
                 <a:solidFill>
                   <a:srgbClr val="14161A"/>
                 </a:solidFill>
                 <a:latin typeface="Segoe UI"/>
               </a:rPr>
-              <a:t>Cámara USB o integrada, imagen o vídeo</a:t>
-            </a:r>
+              <a:t>Cámara o </a:t>
+            </a:r>
+            <a:r>
+              <a:rPr sz="1200" b="0" i="0" dirty="0" err="1">
+                <a:solidFill>
+                  <a:srgbClr val="14161A"/>
+                </a:solidFill>
+                <a:latin typeface="Segoe UI"/>
+              </a:rPr>
+              <a:t>integrada</a:t>
+            </a:r>
+            <a:r>
+              <a:rPr sz="1200" b="0" i="0" dirty="0">
+                <a:solidFill>
+                  <a:srgbClr val="14161A"/>
+                </a:solidFill>
+                <a:latin typeface="Segoe UI"/>
+              </a:rPr>
+              <a:t>, imagen o </a:t>
+            </a:r>
+            <a:r>
+              <a:rPr sz="1200" b="0" i="0" dirty="0" err="1">
+                <a:solidFill>
+                  <a:srgbClr val="14161A"/>
+                </a:solidFill>
+                <a:latin typeface="Segoe UI"/>
+              </a:rPr>
+              <a:t>vídeo</a:t>
+            </a:r>
+            <a:endParaRPr sz="1200" b="0" i="0" dirty="0">
+              <a:solidFill>
+                <a:srgbClr val="14161A"/>
+              </a:solidFill>
+              <a:latin typeface="Segoe UI"/>
+            </a:endParaRPr>
           </a:p>
         </p:txBody>
       </p:sp>
@@ -11389,7 +12487,7 @@
           <a:noFill/>
         </p:spPr>
         <p:txBody>
-          <a:bodyPr wrap="square" lIns="0" rIns="0" tIns="0" bIns="0" anchor="t">
+          <a:bodyPr wrap="square" lIns="0" tIns="0" rIns="0" bIns="0" anchor="t">
             <a:spAutoFit/>
           </a:bodyPr>
           <a:lstStyle/>
@@ -11423,15 +12521,15 @@
         <p:spPr>
           <a:xfrm>
             <a:off x="2179929" y="3735893"/>
-            <a:ext cx="3489351" cy="281940"/>
-          </a:xfrm>
-          <a:prstGeom prst="rect">
-            <a:avLst/>
-          </a:prstGeom>
-          <a:noFill/>
-        </p:spPr>
-        <p:txBody>
-          <a:bodyPr wrap="square" lIns="0" rIns="0" tIns="0" bIns="0" anchor="t">
+            <a:ext cx="3489351" cy="207942"/>
+          </a:xfrm>
+          <a:prstGeom prst="rect">
+            <a:avLst/>
+          </a:prstGeom>
+          <a:noFill/>
+        </p:spPr>
+        <p:txBody>
+          <a:bodyPr wrap="square" lIns="0" tIns="0" rIns="0" bIns="0" anchor="t">
             <a:spAutoFit/>
           </a:bodyPr>
           <a:lstStyle/>
@@ -11445,14 +12543,56 @@
               </a:spcAft>
             </a:pPr>
             <a:r>
-              <a:rPr sz="1200" b="0" i="0">
+              <a:rPr sz="1200" b="0" i="0" dirty="0" err="1">
                 <a:solidFill>
                   <a:srgbClr val="14161A"/>
                 </a:solidFill>
                 <a:latin typeface="Segoe UI"/>
               </a:rPr>
-              <a:t>Veredicto OK/NG y valor de cada cota</a:t>
-            </a:r>
+              <a:t>Veredicto</a:t>
+            </a:r>
+            <a:r>
+              <a:rPr sz="1200" b="0" i="0" dirty="0">
+                <a:solidFill>
+                  <a:srgbClr val="14161A"/>
+                </a:solidFill>
+                <a:latin typeface="Segoe UI"/>
+              </a:rPr>
+              <a:t> y valor de </a:t>
+            </a:r>
+            <a:r>
+              <a:rPr sz="1200" b="0" i="0" dirty="0" err="1">
+                <a:solidFill>
+                  <a:srgbClr val="14161A"/>
+                </a:solidFill>
+                <a:latin typeface="Segoe UI"/>
+              </a:rPr>
+              <a:t>cada</a:t>
+            </a:r>
+            <a:r>
+              <a:rPr sz="1200" b="0" i="0" dirty="0">
+                <a:solidFill>
+                  <a:srgbClr val="14161A"/>
+                </a:solidFill>
+                <a:latin typeface="Segoe UI"/>
+              </a:rPr>
+              <a:t> </a:t>
+            </a:r>
+            <a:r>
+              <a:rPr sz="1200" b="0" i="0" dirty="0" err="1">
+                <a:solidFill>
+                  <a:srgbClr val="14161A"/>
+                </a:solidFill>
+                <a:latin typeface="Segoe UI"/>
+              </a:rPr>
+              <a:t>cota</a:t>
+            </a:r>
+            <a:endParaRPr sz="1200" b="0" i="0" dirty="0">
+              <a:solidFill>
+                <a:srgbClr val="14161A"/>
+              </a:solidFill>
+              <a:latin typeface="Segoe UI"/>
+            </a:endParaRPr>
           </a:p>
         </p:txBody>
       </p:sp>
@@ -11509,7 +12649,7 @@
           <a:noFill/>
         </p:spPr>
         <p:txBody>
-          <a:bodyPr wrap="square" lIns="0" rIns="0" tIns="0" bIns="0" anchor="t">
+          <a:bodyPr wrap="square" lIns="0" tIns="0" rIns="0" bIns="0" anchor="t">
             <a:spAutoFit/>
           </a:bodyPr>
           <a:lstStyle/>
@@ -11551,7 +12691,7 @@
           <a:noFill/>
         </p:spPr>
         <p:txBody>
-          <a:bodyPr wrap="square" lIns="0" rIns="0" tIns="0" bIns="0" anchor="t">
+          <a:bodyPr wrap="square" lIns="0" tIns="0" rIns="0" bIns="0" anchor="t">
             <a:spAutoFit/>
           </a:bodyPr>
           <a:lstStyle/>
@@ -11629,7 +12769,7 @@
           <a:noFill/>
         </p:spPr>
         <p:txBody>
-          <a:bodyPr wrap="square" lIns="0" rIns="0" tIns="0" bIns="0" anchor="t">
+          <a:bodyPr wrap="square" lIns="0" tIns="0" rIns="0" bIns="0" anchor="t">
             <a:spAutoFit/>
           </a:bodyPr>
           <a:lstStyle/>
@@ -11671,7 +12811,7 @@
           <a:noFill/>
         </p:spPr>
         <p:txBody>
-          <a:bodyPr wrap="square" lIns="0" rIns="0" tIns="0" bIns="0" anchor="t">
+          <a:bodyPr wrap="square" lIns="0" tIns="0" rIns="0" bIns="0" anchor="t">
             <a:spAutoFit/>
           </a:bodyPr>
           <a:lstStyle/>
@@ -11749,7 +12889,7 @@
           <a:noFill/>
         </p:spPr>
         <p:txBody>
-          <a:bodyPr wrap="square" lIns="0" rIns="0" tIns="0" bIns="0" anchor="t">
+          <a:bodyPr wrap="square" lIns="0" tIns="0" rIns="0" bIns="0" anchor="t">
             <a:spAutoFit/>
           </a:bodyPr>
           <a:lstStyle/>
@@ -11783,15 +12923,15 @@
         <p:spPr>
           <a:xfrm>
             <a:off x="2179929" y="5052629"/>
-            <a:ext cx="3489351" cy="281940"/>
-          </a:xfrm>
-          <a:prstGeom prst="rect">
-            <a:avLst/>
-          </a:prstGeom>
-          <a:noFill/>
-        </p:spPr>
-        <p:txBody>
-          <a:bodyPr wrap="square" lIns="0" rIns="0" tIns="0" bIns="0" anchor="t">
+            <a:ext cx="3489351" cy="207942"/>
+          </a:xfrm>
+          <a:prstGeom prst="rect">
+            <a:avLst/>
+          </a:prstGeom>
+          <a:noFill/>
+        </p:spPr>
+        <p:txBody>
+          <a:bodyPr wrap="square" lIns="0" tIns="0" rIns="0" bIns="0" anchor="t">
             <a:spAutoFit/>
           </a:bodyPr>
           <a:lstStyle/>
@@ -11805,13 +12945,13 @@
               </a:spcAft>
             </a:pPr>
             <a:r>
-              <a:rPr sz="1200" b="0" i="0">
+              <a:rPr sz="1200" b="0" i="0" dirty="0">
                 <a:solidFill>
                   <a:srgbClr val="14161A"/>
                 </a:solidFill>
                 <a:latin typeface="Segoe UI"/>
               </a:rPr>
-              <a:t>SQLite local, un solo fichero</a:t>
+              <a:t>SQLite local</a:t>
             </a:r>
           </a:p>
         </p:txBody>
@@ -11869,7 +13009,7 @@
           <a:noFill/>
         </p:spPr>
         <p:txBody>
-          <a:bodyPr wrap="square" lIns="0" rIns="0" tIns="0" bIns="0" anchor="t">
+          <a:bodyPr wrap="square" lIns="0" tIns="0" rIns="0" bIns="0" anchor="t">
             <a:spAutoFit/>
           </a:bodyPr>
           <a:lstStyle/>
@@ -11911,7 +13051,7 @@
           <a:noFill/>
         </p:spPr>
         <p:txBody>
-          <a:bodyPr wrap="square" lIns="0" rIns="0" tIns="0" bIns="0" anchor="t">
+          <a:bodyPr wrap="square" lIns="0" tIns="0" rIns="0" bIns="0" anchor="t">
             <a:spAutoFit/>
           </a:bodyPr>
           <a:lstStyle/>
@@ -11925,14 +13065,74 @@
               </a:spcAft>
             </a:pPr>
             <a:r>
-              <a:rPr sz="1200" b="0" i="0">
+              <a:rPr sz="1200" b="0" i="0" dirty="0" err="1">
                 <a:solidFill>
                   <a:srgbClr val="14161A"/>
                 </a:solidFill>
                 <a:latin typeface="Segoe UI"/>
               </a:rPr>
-              <a:t>Ninguna: sin nube ni servidor</a:t>
-            </a:r>
+              <a:t>Ninguna</a:t>
+            </a:r>
+            <a:r>
+              <a:rPr sz="1200" b="0" i="0" dirty="0">
+                <a:solidFill>
+                  <a:srgbClr val="14161A"/>
+                </a:solidFill>
+                <a:latin typeface="Segoe UI"/>
+              </a:rPr>
+              <a:t>: sin </a:t>
+            </a:r>
+            <a:r>
+              <a:rPr sz="1200" b="0" i="0" dirty="0" err="1">
+                <a:solidFill>
+                  <a:srgbClr val="14161A"/>
+                </a:solidFill>
+                <a:latin typeface="Segoe UI"/>
+              </a:rPr>
+              <a:t>nube</a:t>
+            </a:r>
+            <a:r>
+              <a:rPr sz="1200" b="0" i="0" dirty="0">
+                <a:solidFill>
+                  <a:srgbClr val="14161A"/>
+                </a:solidFill>
+                <a:latin typeface="Segoe UI"/>
+              </a:rPr>
+              <a:t> </a:t>
+            </a:r>
+            <a:r>
+              <a:rPr sz="1200" b="0" i="0" dirty="0" err="1">
+                <a:solidFill>
+                  <a:srgbClr val="14161A"/>
+                </a:solidFill>
+                <a:latin typeface="Segoe UI"/>
+              </a:rPr>
+              <a:t>ni</a:t>
+            </a:r>
+            <a:r>
+              <a:rPr sz="1200" b="0" i="0" dirty="0">
+                <a:solidFill>
+                  <a:srgbClr val="14161A"/>
+                </a:solidFill>
+                <a:latin typeface="Segoe UI"/>
+              </a:rPr>
+              <a:t> </a:t>
+            </a:r>
+            <a:r>
+              <a:rPr sz="1200" b="0" i="0" dirty="0" err="1">
+                <a:solidFill>
+                  <a:srgbClr val="14161A"/>
+                </a:solidFill>
+                <a:latin typeface="Segoe UI"/>
+              </a:rPr>
+              <a:t>servidor</a:t>
+            </a:r>
+            <a:endParaRPr sz="1200" b="0" i="0" dirty="0">
+              <a:solidFill>
+                <a:srgbClr val="14161A"/>
+              </a:solidFill>
+              <a:latin typeface="Segoe UI"/>
+            </a:endParaRPr>
           </a:p>
         </p:txBody>
       </p:sp>
@@ -12018,7 +13218,7 @@
           <a:noFill/>
         </p:spPr>
         <p:txBody>
-          <a:bodyPr wrap="square" lIns="0" rIns="0" tIns="0" bIns="0" anchor="t">
+          <a:bodyPr wrap="square" lIns="0" tIns="0" rIns="0" bIns="0" anchor="t">
             <a:spAutoFit/>
           </a:bodyPr>
           <a:lstStyle/>
@@ -12060,7 +13260,7 @@
           <a:noFill/>
         </p:spPr>
         <p:txBody>
-          <a:bodyPr wrap="square" lIns="0" rIns="0" tIns="0" bIns="0" anchor="t">
+          <a:bodyPr wrap="square" lIns="0" tIns="0" rIns="0" bIns="0" anchor="t">
             <a:spAutoFit/>
           </a:bodyPr>
           <a:lstStyle/>
@@ -12102,7 +13302,7 @@
           <a:noFill/>
         </p:spPr>
         <p:txBody>
-          <a:bodyPr wrap="square" lIns="0" rIns="0" tIns="0" bIns="0" anchor="t">
+          <a:bodyPr wrap="square" lIns="0" tIns="0" rIns="0" bIns="0" anchor="t">
             <a:spAutoFit/>
           </a:bodyPr>
           <a:lstStyle/>
@@ -12136,7 +13336,7 @@
 </file>
 
 <file path=ppt/slides/slide3.xml><?xml version="1.0" encoding="utf-8"?>
-<p:sld xmlns:a="http://schemas.openxmlformats.org/drawingml/2006/main" xmlns:p="http://schemas.openxmlformats.org/presentationml/2006/main" xmlns:r="http://schemas.openxmlformats.org/officeDocument/2006/relationships">
+<p:sld xmlns:a="http://schemas.openxmlformats.org/drawingml/2006/main" xmlns:r="http://schemas.openxmlformats.org/officeDocument/2006/relationships" xmlns:p="http://schemas.openxmlformats.org/presentationml/2006/main">
   <p:cSld>
     <p:bg>
       <p:bgPr>
@@ -12152,7 +13352,14 @@
         <p:cNvGrpSpPr/>
         <p:nvPr/>
       </p:nvGrpSpPr>
-      <p:grpSpPr/>
+      <p:grpSpPr>
+        <a:xfrm>
+          <a:off x="0" y="0"/>
+          <a:ext cx="0" cy="0"/>
+          <a:chOff x="0" y="0"/>
+          <a:chExt cx="0" cy="0"/>
+        </a:xfrm>
+      </p:grpSpPr>
       <p:sp>
         <p:nvSpPr>
           <p:cNvPr id="2" name="TextBox 1"/>
@@ -12170,7 +13377,7 @@
           <a:noFill/>
         </p:spPr>
         <p:txBody>
-          <a:bodyPr wrap="square" lIns="0" rIns="0" tIns="0" bIns="0" anchor="t">
+          <a:bodyPr wrap="square" lIns="0" tIns="0" rIns="0" bIns="0" anchor="t">
             <a:spAutoFit/>
           </a:bodyPr>
           <a:lstStyle/>
@@ -12212,7 +13419,7 @@
           <a:noFill/>
         </p:spPr>
         <p:txBody>
-          <a:bodyPr wrap="square" lIns="0" rIns="0" tIns="0" bIns="0" anchor="t">
+          <a:bodyPr wrap="square" lIns="0" tIns="0" rIns="0" bIns="0" anchor="t">
             <a:spAutoFit/>
           </a:bodyPr>
           <a:lstStyle/>
@@ -12290,7 +13497,7 @@
           <a:noFill/>
         </p:spPr>
         <p:txBody>
-          <a:bodyPr wrap="square" lIns="0" rIns="0" tIns="0" bIns="0" anchor="t">
+          <a:bodyPr wrap="square" lIns="0" tIns="0" rIns="0" bIns="0" anchor="t">
             <a:spAutoFit/>
           </a:bodyPr>
           <a:lstStyle/>
@@ -12354,7 +13561,9 @@
         <p:txBody>
           <a:bodyPr rtlCol="0" anchor="ctr"/>
           <a:lstStyle/>
-          <a:p/>
+          <a:p>
+            <a:endParaRPr/>
+          </a:p>
         </p:txBody>
       </p:sp>
       <p:sp>
@@ -12374,7 +13583,7 @@
           <a:noFill/>
         </p:spPr>
         <p:txBody>
-          <a:bodyPr wrap="square" lIns="0" rIns="0" tIns="0" bIns="0" anchor="t">
+          <a:bodyPr wrap="square" lIns="0" tIns="0" rIns="0" bIns="0" anchor="t">
             <a:spAutoFit/>
           </a:bodyPr>
           <a:lstStyle/>
@@ -12416,7 +13625,7 @@
           <a:noFill/>
         </p:spPr>
         <p:txBody>
-          <a:bodyPr wrap="square" lIns="0" rIns="0" tIns="0" bIns="0" anchor="t">
+          <a:bodyPr wrap="square" lIns="0" tIns="0" rIns="0" bIns="0" anchor="t">
             <a:spAutoFit/>
           </a:bodyPr>
           <a:lstStyle/>
@@ -12458,7 +13667,7 @@
           <a:noFill/>
         </p:spPr>
         <p:txBody>
-          <a:bodyPr wrap="square" lIns="0" rIns="0" tIns="0" bIns="0" anchor="t">
+          <a:bodyPr wrap="square" lIns="0" tIns="0" rIns="0" bIns="0" anchor="t">
             <a:spAutoFit/>
           </a:bodyPr>
           <a:lstStyle/>
@@ -12522,7 +13731,9 @@
         <p:txBody>
           <a:bodyPr rtlCol="0" anchor="ctr"/>
           <a:lstStyle/>
-          <a:p/>
+          <a:p>
+            <a:endParaRPr/>
+          </a:p>
         </p:txBody>
       </p:sp>
       <p:sp>
@@ -12542,7 +13753,7 @@
           <a:noFill/>
         </p:spPr>
         <p:txBody>
-          <a:bodyPr wrap="square" lIns="0" rIns="0" tIns="0" bIns="0" anchor="t">
+          <a:bodyPr wrap="square" lIns="0" tIns="0" rIns="0" bIns="0" anchor="t">
             <a:spAutoFit/>
           </a:bodyPr>
           <a:lstStyle/>
@@ -12584,7 +13795,7 @@
           <a:noFill/>
         </p:spPr>
         <p:txBody>
-          <a:bodyPr wrap="square" lIns="0" rIns="0" tIns="0" bIns="0" anchor="t">
+          <a:bodyPr wrap="square" lIns="0" tIns="0" rIns="0" bIns="0" anchor="t">
             <a:spAutoFit/>
           </a:bodyPr>
           <a:lstStyle/>
@@ -12626,7 +13837,7 @@
           <a:noFill/>
         </p:spPr>
         <p:txBody>
-          <a:bodyPr wrap="square" lIns="0" rIns="0" tIns="0" bIns="0" anchor="t">
+          <a:bodyPr wrap="square" lIns="0" tIns="0" rIns="0" bIns="0" anchor="t">
             <a:spAutoFit/>
           </a:bodyPr>
           <a:lstStyle/>
@@ -12690,7 +13901,9 @@
         <p:txBody>
           <a:bodyPr rtlCol="0" anchor="ctr"/>
           <a:lstStyle/>
-          <a:p/>
+          <a:p>
+            <a:endParaRPr/>
+          </a:p>
         </p:txBody>
       </p:sp>
       <p:sp>
@@ -12710,7 +13923,7 @@
           <a:noFill/>
         </p:spPr>
         <p:txBody>
-          <a:bodyPr wrap="square" lIns="0" rIns="0" tIns="0" bIns="0" anchor="t">
+          <a:bodyPr wrap="square" lIns="0" tIns="0" rIns="0" bIns="0" anchor="t">
             <a:spAutoFit/>
           </a:bodyPr>
           <a:lstStyle/>
@@ -12752,7 +13965,7 @@
           <a:noFill/>
         </p:spPr>
         <p:txBody>
-          <a:bodyPr wrap="square" lIns="0" rIns="0" tIns="0" bIns="0" anchor="t">
+          <a:bodyPr wrap="square" lIns="0" tIns="0" rIns="0" bIns="0" anchor="t">
             <a:spAutoFit/>
           </a:bodyPr>
           <a:lstStyle/>
@@ -12794,7 +14007,7 @@
           <a:noFill/>
         </p:spPr>
         <p:txBody>
-          <a:bodyPr wrap="square" lIns="0" rIns="0" tIns="0" bIns="0" anchor="t">
+          <a:bodyPr wrap="square" lIns="0" tIns="0" rIns="0" bIns="0" anchor="t">
             <a:spAutoFit/>
           </a:bodyPr>
           <a:lstStyle/>
@@ -12836,7 +14049,7 @@
           <a:noFill/>
         </p:spPr>
         <p:txBody>
-          <a:bodyPr wrap="square" lIns="0" rIns="0" tIns="0" bIns="0" anchor="t">
+          <a:bodyPr wrap="square" lIns="0" tIns="0" rIns="0" bIns="0" anchor="t">
             <a:spAutoFit/>
           </a:bodyPr>
           <a:lstStyle/>
@@ -12878,7 +14091,7 @@
           <a:noFill/>
         </p:spPr>
         <p:txBody>
-          <a:bodyPr wrap="square" lIns="0" rIns="0" tIns="0" bIns="0" anchor="t">
+          <a:bodyPr wrap="square" lIns="0" tIns="0" rIns="0" bIns="0" anchor="t">
             <a:spAutoFit/>
           </a:bodyPr>
           <a:lstStyle/>
@@ -12920,7 +14133,7 @@
           <a:noFill/>
         </p:spPr>
         <p:txBody>
-          <a:bodyPr wrap="square" lIns="0" rIns="0" tIns="0" bIns="0" anchor="t">
+          <a:bodyPr wrap="square" lIns="0" tIns="0" rIns="0" bIns="0" anchor="t">
             <a:spAutoFit/>
           </a:bodyPr>
           <a:lstStyle/>
@@ -12954,7 +14167,7 @@
 </file>
 
 <file path=ppt/slides/slide4.xml><?xml version="1.0" encoding="utf-8"?>
-<p:sld xmlns:a="http://schemas.openxmlformats.org/drawingml/2006/main" xmlns:p="http://schemas.openxmlformats.org/presentationml/2006/main" xmlns:r="http://schemas.openxmlformats.org/officeDocument/2006/relationships">
+<p:sld xmlns:a="http://schemas.openxmlformats.org/drawingml/2006/main" xmlns:r="http://schemas.openxmlformats.org/officeDocument/2006/relationships" xmlns:p="http://schemas.openxmlformats.org/presentationml/2006/main">
   <p:cSld>
     <p:bg>
       <p:bgPr>
@@ -12970,7 +14183,14 @@
         <p:cNvGrpSpPr/>
         <p:nvPr/>
       </p:nvGrpSpPr>
-      <p:grpSpPr/>
+      <p:grpSpPr>
+        <a:xfrm>
+          <a:off x="0" y="0"/>
+          <a:ext cx="0" cy="0"/>
+          <a:chOff x="0" y="0"/>
+          <a:chExt cx="0" cy="0"/>
+        </a:xfrm>
+      </p:grpSpPr>
       <p:sp>
         <p:nvSpPr>
           <p:cNvPr id="2" name="TextBox 1"/>
@@ -12988,7 +14208,7 @@
           <a:noFill/>
         </p:spPr>
         <p:txBody>
-          <a:bodyPr wrap="square" lIns="0" rIns="0" tIns="0" bIns="0" anchor="t">
+          <a:bodyPr wrap="square" lIns="0" tIns="0" rIns="0" bIns="0" anchor="t">
             <a:spAutoFit/>
           </a:bodyPr>
           <a:lstStyle/>
@@ -13030,7 +14250,7 @@
           <a:noFill/>
         </p:spPr>
         <p:txBody>
-          <a:bodyPr wrap="square" lIns="0" rIns="0" tIns="0" bIns="0" anchor="t">
+          <a:bodyPr wrap="square" lIns="0" tIns="0" rIns="0" bIns="0" anchor="t">
             <a:spAutoFit/>
           </a:bodyPr>
           <a:lstStyle/>
@@ -13100,15 +14320,15 @@
         <p:spPr>
           <a:xfrm>
             <a:off x="822960" y="1645920"/>
-            <a:ext cx="10180015" cy="457200"/>
-          </a:xfrm>
-          <a:prstGeom prst="rect">
-            <a:avLst/>
-          </a:prstGeom>
-          <a:noFill/>
-        </p:spPr>
-        <p:txBody>
-          <a:bodyPr wrap="square" lIns="0" rIns="0" tIns="0" bIns="0" anchor="t">
+            <a:ext cx="10180015" cy="225318"/>
+          </a:xfrm>
+          <a:prstGeom prst="rect">
+            <a:avLst/>
+          </a:prstGeom>
+          <a:noFill/>
+        </p:spPr>
+        <p:txBody>
+          <a:bodyPr wrap="square" lIns="0" tIns="0" rIns="0" bIns="0" anchor="t">
             <a:spAutoFit/>
           </a:bodyPr>
           <a:lstStyle/>
@@ -13122,13 +14342,238 @@
               </a:spcAft>
             </a:pPr>
             <a:r>
-              <a:rPr sz="1300" b="0" i="0">
+              <a:rPr lang="es-MX" sz="1300" dirty="0">
                 <a:solidFill>
                   <a:srgbClr val="4A4F57"/>
                 </a:solidFill>
                 <a:latin typeface="Segoe UI"/>
               </a:rPr>
-              <a:t>32 herramientas en cinco familias. Todas se trazan sobre la imagen y se guardan ancladas a la pieza, con su tolerancia.</a:t>
+              <a:t>Mas de 7</a:t>
+            </a:r>
+            <a:r>
+              <a:rPr sz="1300" b="0" i="0" dirty="0">
+                <a:solidFill>
+                  <a:srgbClr val="4A4F57"/>
+                </a:solidFill>
+                <a:latin typeface="Segoe UI"/>
+              </a:rPr>
+              <a:t> </a:t>
+            </a:r>
+            <a:r>
+              <a:rPr sz="1300" b="0" i="0" dirty="0" err="1">
+                <a:solidFill>
+                  <a:srgbClr val="4A4F57"/>
+                </a:solidFill>
+                <a:latin typeface="Segoe UI"/>
+              </a:rPr>
+              <a:t>herramientas</a:t>
+            </a:r>
+            <a:r>
+              <a:rPr sz="1300" b="0" i="0" dirty="0">
+                <a:solidFill>
+                  <a:srgbClr val="4A4F57"/>
+                </a:solidFill>
+                <a:latin typeface="Segoe UI"/>
+              </a:rPr>
+              <a:t> </a:t>
+            </a:r>
+            <a:r>
+              <a:rPr sz="1300" b="0" i="0" dirty="0" err="1">
+                <a:solidFill>
+                  <a:srgbClr val="4A4F57"/>
+                </a:solidFill>
+                <a:latin typeface="Segoe UI"/>
+              </a:rPr>
+              <a:t>en</a:t>
+            </a:r>
+            <a:r>
+              <a:rPr sz="1300" b="0" i="0" dirty="0">
+                <a:solidFill>
+                  <a:srgbClr val="4A4F57"/>
+                </a:solidFill>
+                <a:latin typeface="Segoe UI"/>
+              </a:rPr>
+              <a:t> </a:t>
+            </a:r>
+            <a:r>
+              <a:rPr sz="1300" b="0" i="0" dirty="0" err="1">
+                <a:solidFill>
+                  <a:srgbClr val="4A4F57"/>
+                </a:solidFill>
+                <a:latin typeface="Segoe UI"/>
+              </a:rPr>
+              <a:t>cinco</a:t>
+            </a:r>
+            <a:r>
+              <a:rPr sz="1300" b="0" i="0" dirty="0">
+                <a:solidFill>
+                  <a:srgbClr val="4A4F57"/>
+                </a:solidFill>
+                <a:latin typeface="Segoe UI"/>
+              </a:rPr>
+              <a:t> </a:t>
+            </a:r>
+            <a:r>
+              <a:rPr sz="1300" b="0" i="0" dirty="0" err="1">
+                <a:solidFill>
+                  <a:srgbClr val="4A4F57"/>
+                </a:solidFill>
+                <a:latin typeface="Segoe UI"/>
+              </a:rPr>
+              <a:t>familias</a:t>
+            </a:r>
+            <a:r>
+              <a:rPr sz="1300" b="0" i="0" dirty="0">
+                <a:solidFill>
+                  <a:srgbClr val="4A4F57"/>
+                </a:solidFill>
+                <a:latin typeface="Segoe UI"/>
+              </a:rPr>
+              <a:t>. </a:t>
+            </a:r>
+            <a:r>
+              <a:rPr sz="1300" b="0" i="0" dirty="0" err="1">
+                <a:solidFill>
+                  <a:srgbClr val="4A4F57"/>
+                </a:solidFill>
+                <a:latin typeface="Segoe UI"/>
+              </a:rPr>
+              <a:t>Todas</a:t>
+            </a:r>
+            <a:r>
+              <a:rPr sz="1300" b="0" i="0" dirty="0">
+                <a:solidFill>
+                  <a:srgbClr val="4A4F57"/>
+                </a:solidFill>
+                <a:latin typeface="Segoe UI"/>
+              </a:rPr>
+              <a:t> se </a:t>
+            </a:r>
+            <a:r>
+              <a:rPr sz="1300" b="0" i="0" dirty="0" err="1">
+                <a:solidFill>
+                  <a:srgbClr val="4A4F57"/>
+                </a:solidFill>
+                <a:latin typeface="Segoe UI"/>
+              </a:rPr>
+              <a:t>trazan</a:t>
+            </a:r>
+            <a:r>
+              <a:rPr sz="1300" b="0" i="0" dirty="0">
+                <a:solidFill>
+                  <a:srgbClr val="4A4F57"/>
+                </a:solidFill>
+                <a:latin typeface="Segoe UI"/>
+              </a:rPr>
+              <a:t> </a:t>
+            </a:r>
+            <a:r>
+              <a:rPr sz="1300" b="0" i="0" dirty="0" err="1">
+                <a:solidFill>
+                  <a:srgbClr val="4A4F57"/>
+                </a:solidFill>
+                <a:latin typeface="Segoe UI"/>
+              </a:rPr>
+              <a:t>sobre</a:t>
+            </a:r>
+            <a:r>
+              <a:rPr sz="1300" b="0" i="0" dirty="0">
+                <a:solidFill>
+                  <a:srgbClr val="4A4F57"/>
+                </a:solidFill>
+                <a:latin typeface="Segoe UI"/>
+              </a:rPr>
+              <a:t> la imagen y se </a:t>
+            </a:r>
+            <a:r>
+              <a:rPr sz="1300" b="0" i="0" dirty="0" err="1">
+                <a:solidFill>
+                  <a:srgbClr val="4A4F57"/>
+                </a:solidFill>
+                <a:latin typeface="Segoe UI"/>
+              </a:rPr>
+              <a:t>guardan</a:t>
+            </a:r>
+            <a:r>
+              <a:rPr sz="1300" b="0" i="0" dirty="0">
+                <a:solidFill>
+                  <a:srgbClr val="4A4F57"/>
+                </a:solidFill>
+                <a:latin typeface="Segoe UI"/>
+              </a:rPr>
+              <a:t> </a:t>
+            </a:r>
+            <a:r>
+              <a:rPr sz="1300" b="0" i="0" dirty="0" err="1">
+                <a:solidFill>
+                  <a:srgbClr val="4A4F57"/>
+                </a:solidFill>
+                <a:latin typeface="Segoe UI"/>
+              </a:rPr>
+              <a:t>ancladas</a:t>
+            </a:r>
+            <a:r>
+              <a:rPr sz="1300" b="0" i="0" dirty="0">
+                <a:solidFill>
+                  <a:srgbClr val="4A4F57"/>
+                </a:solidFill>
+                <a:latin typeface="Segoe UI"/>
+              </a:rPr>
+              <a:t> a la </a:t>
+            </a:r>
+            <a:r>
+              <a:rPr sz="1300" b="0" i="0" dirty="0" err="1">
+                <a:solidFill>
+                  <a:srgbClr val="4A4F57"/>
+                </a:solidFill>
+                <a:latin typeface="Segoe UI"/>
+              </a:rPr>
+              <a:t>pieza</a:t>
+            </a:r>
+            <a:r>
+              <a:rPr sz="1300" b="0" i="0" dirty="0">
+                <a:solidFill>
+                  <a:srgbClr val="4A4F57"/>
+                </a:solidFill>
+                <a:latin typeface="Segoe UI"/>
+              </a:rPr>
+              <a:t>, con </a:t>
+            </a:r>
+            <a:r>
+              <a:rPr sz="1300" b="0" i="0" dirty="0" err="1">
+                <a:solidFill>
+                  <a:srgbClr val="4A4F57"/>
+                </a:solidFill>
+                <a:latin typeface="Segoe UI"/>
+              </a:rPr>
+              <a:t>su</a:t>
+            </a:r>
+            <a:r>
+              <a:rPr sz="1300" b="0" i="0" dirty="0">
+                <a:solidFill>
+                  <a:srgbClr val="4A4F57"/>
+                </a:solidFill>
+                <a:latin typeface="Segoe UI"/>
+              </a:rPr>
+              <a:t> </a:t>
+            </a:r>
+            <a:r>
+              <a:rPr sz="1300" b="0" i="0" dirty="0" err="1">
+                <a:solidFill>
+                  <a:srgbClr val="4A4F57"/>
+                </a:solidFill>
+                <a:latin typeface="Segoe UI"/>
+              </a:rPr>
+              <a:t>tolerancia</a:t>
+            </a:r>
+            <a:r>
+              <a:rPr sz="1300" b="0" i="0" dirty="0">
+                <a:solidFill>
+                  <a:srgbClr val="4A4F57"/>
+                </a:solidFill>
+                <a:latin typeface="Segoe UI"/>
+              </a:rPr>
+              <a:t>.</a:t>
             </a:r>
           </a:p>
         </p:txBody>
@@ -13172,7 +14617,9 @@
         <p:txBody>
           <a:bodyPr rtlCol="0" anchor="ctr"/>
           <a:lstStyle/>
-          <a:p/>
+          <a:p>
+            <a:endParaRPr/>
+          </a:p>
         </p:txBody>
       </p:sp>
       <p:sp>
@@ -13192,7 +14639,7 @@
           <a:noFill/>
         </p:spPr>
         <p:txBody>
-          <a:bodyPr wrap="square" lIns="0" rIns="0" tIns="0" bIns="0" anchor="t">
+          <a:bodyPr wrap="square" lIns="0" tIns="0" rIns="0" bIns="0" anchor="t">
             <a:spAutoFit/>
           </a:bodyPr>
           <a:lstStyle/>
@@ -13234,7 +14681,7 @@
           <a:noFill/>
         </p:spPr>
         <p:txBody>
-          <a:bodyPr wrap="square" lIns="0" rIns="0" tIns="0" bIns="0" anchor="t">
+          <a:bodyPr wrap="square" lIns="0" tIns="0" rIns="0" bIns="0" anchor="t">
             <a:spAutoFit/>
           </a:bodyPr>
           <a:lstStyle/>
@@ -13276,7 +14723,7 @@
           <a:noFill/>
         </p:spPr>
         <p:txBody>
-          <a:bodyPr wrap="square" lIns="0" rIns="0" tIns="0" bIns="0" anchor="t">
+          <a:bodyPr wrap="square" lIns="0" tIns="0" rIns="0" bIns="0" anchor="t">
             <a:spAutoFit/>
           </a:bodyPr>
           <a:lstStyle/>
@@ -13318,7 +14765,7 @@
           <a:noFill/>
         </p:spPr>
         <p:txBody>
-          <a:bodyPr wrap="square" lIns="0" rIns="0" tIns="0" bIns="0" anchor="t">
+          <a:bodyPr wrap="square" lIns="0" tIns="0" rIns="0" bIns="0" anchor="t">
             <a:spAutoFit/>
           </a:bodyPr>
           <a:lstStyle/>
@@ -13360,7 +14807,7 @@
           <a:noFill/>
         </p:spPr>
         <p:txBody>
-          <a:bodyPr wrap="square" lIns="0" rIns="0" tIns="0" bIns="0" anchor="t">
+          <a:bodyPr wrap="square" lIns="0" tIns="0" rIns="0" bIns="0" anchor="t">
             <a:spAutoFit/>
           </a:bodyPr>
           <a:lstStyle/>
@@ -13402,7 +14849,7 @@
           <a:noFill/>
         </p:spPr>
         <p:txBody>
-          <a:bodyPr wrap="square" lIns="0" rIns="0" tIns="0" bIns="0" anchor="t">
+          <a:bodyPr wrap="square" lIns="0" tIns="0" rIns="0" bIns="0" anchor="t">
             <a:spAutoFit/>
           </a:bodyPr>
           <a:lstStyle/>
@@ -13444,7 +14891,7 @@
           <a:noFill/>
         </p:spPr>
         <p:txBody>
-          <a:bodyPr wrap="square" lIns="0" rIns="0" tIns="0" bIns="0" anchor="t">
+          <a:bodyPr wrap="square" lIns="0" tIns="0" rIns="0" bIns="0" anchor="t">
             <a:spAutoFit/>
           </a:bodyPr>
           <a:lstStyle/>
@@ -13486,7 +14933,7 @@
           <a:noFill/>
         </p:spPr>
         <p:txBody>
-          <a:bodyPr wrap="square" lIns="0" rIns="0" tIns="0" bIns="0" anchor="t">
+          <a:bodyPr wrap="square" lIns="0" tIns="0" rIns="0" bIns="0" anchor="t">
             <a:spAutoFit/>
           </a:bodyPr>
           <a:lstStyle/>
@@ -13528,7 +14975,7 @@
           <a:noFill/>
         </p:spPr>
         <p:txBody>
-          <a:bodyPr wrap="square" lIns="0" rIns="0" tIns="0" bIns="0" anchor="t">
+          <a:bodyPr wrap="square" lIns="0" tIns="0" rIns="0" bIns="0" anchor="t">
             <a:spAutoFit/>
           </a:bodyPr>
           <a:lstStyle/>
@@ -13570,7 +15017,7 @@
           <a:noFill/>
         </p:spPr>
         <p:txBody>
-          <a:bodyPr wrap="square" lIns="0" rIns="0" tIns="0" bIns="0" anchor="t">
+          <a:bodyPr wrap="square" lIns="0" tIns="0" rIns="0" bIns="0" anchor="t">
             <a:spAutoFit/>
           </a:bodyPr>
           <a:lstStyle/>
@@ -13634,7 +15081,9 @@
         <p:txBody>
           <a:bodyPr rtlCol="0" anchor="ctr"/>
           <a:lstStyle/>
-          <a:p/>
+          <a:p>
+            <a:endParaRPr/>
+          </a:p>
         </p:txBody>
       </p:sp>
       <p:sp>
@@ -13654,7 +15103,7 @@
           <a:noFill/>
         </p:spPr>
         <p:txBody>
-          <a:bodyPr wrap="square" lIns="0" rIns="0" tIns="0" bIns="0" anchor="t">
+          <a:bodyPr wrap="square" lIns="0" tIns="0" rIns="0" bIns="0" anchor="t">
             <a:spAutoFit/>
           </a:bodyPr>
           <a:lstStyle/>
@@ -13696,7 +15145,7 @@
           <a:noFill/>
         </p:spPr>
         <p:txBody>
-          <a:bodyPr wrap="square" lIns="0" rIns="0" tIns="0" bIns="0" anchor="t">
+          <a:bodyPr wrap="square" lIns="0" tIns="0" rIns="0" bIns="0" anchor="t">
             <a:spAutoFit/>
           </a:bodyPr>
           <a:lstStyle/>
@@ -13738,7 +15187,7 @@
           <a:noFill/>
         </p:spPr>
         <p:txBody>
-          <a:bodyPr wrap="square" lIns="0" rIns="0" tIns="0" bIns="0" anchor="t">
+          <a:bodyPr wrap="square" lIns="0" tIns="0" rIns="0" bIns="0" anchor="t">
             <a:spAutoFit/>
           </a:bodyPr>
           <a:lstStyle/>
@@ -13780,7 +15229,7 @@
           <a:noFill/>
         </p:spPr>
         <p:txBody>
-          <a:bodyPr wrap="square" lIns="0" rIns="0" tIns="0" bIns="0" anchor="t">
+          <a:bodyPr wrap="square" lIns="0" tIns="0" rIns="0" bIns="0" anchor="t">
             <a:spAutoFit/>
           </a:bodyPr>
           <a:lstStyle/>
@@ -13822,7 +15271,7 @@
           <a:noFill/>
         </p:spPr>
         <p:txBody>
-          <a:bodyPr wrap="square" lIns="0" rIns="0" tIns="0" bIns="0" anchor="t">
+          <a:bodyPr wrap="square" lIns="0" tIns="0" rIns="0" bIns="0" anchor="t">
             <a:spAutoFit/>
           </a:bodyPr>
           <a:lstStyle/>
@@ -13864,7 +15313,7 @@
           <a:noFill/>
         </p:spPr>
         <p:txBody>
-          <a:bodyPr wrap="square" lIns="0" rIns="0" tIns="0" bIns="0" anchor="t">
+          <a:bodyPr wrap="square" lIns="0" tIns="0" rIns="0" bIns="0" anchor="t">
             <a:spAutoFit/>
           </a:bodyPr>
           <a:lstStyle/>
@@ -13906,7 +15355,7 @@
           <a:noFill/>
         </p:spPr>
         <p:txBody>
-          <a:bodyPr wrap="square" lIns="0" rIns="0" tIns="0" bIns="0" anchor="t">
+          <a:bodyPr wrap="square" lIns="0" tIns="0" rIns="0" bIns="0" anchor="t">
             <a:spAutoFit/>
           </a:bodyPr>
           <a:lstStyle/>
@@ -13948,7 +15397,7 @@
           <a:noFill/>
         </p:spPr>
         <p:txBody>
-          <a:bodyPr wrap="square" lIns="0" rIns="0" tIns="0" bIns="0" anchor="t">
+          <a:bodyPr wrap="square" lIns="0" tIns="0" rIns="0" bIns="0" anchor="t">
             <a:spAutoFit/>
           </a:bodyPr>
           <a:lstStyle/>
@@ -13990,7 +15439,7 @@
           <a:noFill/>
         </p:spPr>
         <p:txBody>
-          <a:bodyPr wrap="square" lIns="0" rIns="0" tIns="0" bIns="0" anchor="t">
+          <a:bodyPr wrap="square" lIns="0" tIns="0" rIns="0" bIns="0" anchor="t">
             <a:spAutoFit/>
           </a:bodyPr>
           <a:lstStyle/>
@@ -14054,7 +15503,9 @@
         <p:txBody>
           <a:bodyPr rtlCol="0" anchor="ctr"/>
           <a:lstStyle/>
-          <a:p/>
+          <a:p>
+            <a:endParaRPr/>
+          </a:p>
         </p:txBody>
       </p:sp>
       <p:sp>
@@ -14074,7 +15525,7 @@
           <a:noFill/>
         </p:spPr>
         <p:txBody>
-          <a:bodyPr wrap="square" lIns="0" rIns="0" tIns="0" bIns="0" anchor="t">
+          <a:bodyPr wrap="square" lIns="0" tIns="0" rIns="0" bIns="0" anchor="t">
             <a:spAutoFit/>
           </a:bodyPr>
           <a:lstStyle/>
@@ -14116,7 +15567,7 @@
           <a:noFill/>
         </p:spPr>
         <p:txBody>
-          <a:bodyPr wrap="square" lIns="0" rIns="0" tIns="0" bIns="0" anchor="t">
+          <a:bodyPr wrap="square" lIns="0" tIns="0" rIns="0" bIns="0" anchor="t">
             <a:spAutoFit/>
           </a:bodyPr>
           <a:lstStyle/>
@@ -14158,7 +15609,7 @@
           <a:noFill/>
         </p:spPr>
         <p:txBody>
-          <a:bodyPr wrap="square" lIns="0" rIns="0" tIns="0" bIns="0" anchor="t">
+          <a:bodyPr wrap="square" lIns="0" tIns="0" rIns="0" bIns="0" anchor="t">
             <a:spAutoFit/>
           </a:bodyPr>
           <a:lstStyle/>
@@ -14200,7 +15651,7 @@
           <a:noFill/>
         </p:spPr>
         <p:txBody>
-          <a:bodyPr wrap="square" lIns="0" rIns="0" tIns="0" bIns="0" anchor="t">
+          <a:bodyPr wrap="square" lIns="0" tIns="0" rIns="0" bIns="0" anchor="t">
             <a:spAutoFit/>
           </a:bodyPr>
           <a:lstStyle/>
@@ -14242,7 +15693,7 @@
           <a:noFill/>
         </p:spPr>
         <p:txBody>
-          <a:bodyPr wrap="square" lIns="0" rIns="0" tIns="0" bIns="0" anchor="t">
+          <a:bodyPr wrap="square" lIns="0" tIns="0" rIns="0" bIns="0" anchor="t">
             <a:spAutoFit/>
           </a:bodyPr>
           <a:lstStyle/>
@@ -14284,7 +15735,7 @@
           <a:noFill/>
         </p:spPr>
         <p:txBody>
-          <a:bodyPr wrap="square" lIns="0" rIns="0" tIns="0" bIns="0" anchor="t">
+          <a:bodyPr wrap="square" lIns="0" tIns="0" rIns="0" bIns="0" anchor="t">
             <a:spAutoFit/>
           </a:bodyPr>
           <a:lstStyle/>
@@ -14326,7 +15777,7 @@
           <a:noFill/>
         </p:spPr>
         <p:txBody>
-          <a:bodyPr wrap="square" lIns="0" rIns="0" tIns="0" bIns="0" anchor="t">
+          <a:bodyPr wrap="square" lIns="0" tIns="0" rIns="0" bIns="0" anchor="t">
             <a:spAutoFit/>
           </a:bodyPr>
           <a:lstStyle/>
@@ -14368,7 +15819,7 @@
           <a:noFill/>
         </p:spPr>
         <p:txBody>
-          <a:bodyPr wrap="square" lIns="0" rIns="0" tIns="0" bIns="0" anchor="t">
+          <a:bodyPr wrap="square" lIns="0" tIns="0" rIns="0" bIns="0" anchor="t">
             <a:spAutoFit/>
           </a:bodyPr>
           <a:lstStyle/>
@@ -14410,7 +15861,7 @@
           <a:noFill/>
         </p:spPr>
         <p:txBody>
-          <a:bodyPr wrap="square" lIns="0" rIns="0" tIns="0" bIns="0" anchor="t">
+          <a:bodyPr wrap="square" lIns="0" tIns="0" rIns="0" bIns="0" anchor="t">
             <a:spAutoFit/>
           </a:bodyPr>
           <a:lstStyle/>
@@ -14474,7 +15925,9 @@
         <p:txBody>
           <a:bodyPr rtlCol="0" anchor="ctr"/>
           <a:lstStyle/>
-          <a:p/>
+          <a:p>
+            <a:endParaRPr/>
+          </a:p>
         </p:txBody>
       </p:sp>
       <p:sp>
@@ -14494,7 +15947,7 @@
           <a:noFill/>
         </p:spPr>
         <p:txBody>
-          <a:bodyPr wrap="square" lIns="0" rIns="0" tIns="0" bIns="0" anchor="t">
+          <a:bodyPr wrap="square" lIns="0" tIns="0" rIns="0" bIns="0" anchor="t">
             <a:spAutoFit/>
           </a:bodyPr>
           <a:lstStyle/>
@@ -14536,7 +15989,7 @@
           <a:noFill/>
         </p:spPr>
         <p:txBody>
-          <a:bodyPr wrap="square" lIns="0" rIns="0" tIns="0" bIns="0" anchor="t">
+          <a:bodyPr wrap="square" lIns="0" tIns="0" rIns="0" bIns="0" anchor="t">
             <a:spAutoFit/>
           </a:bodyPr>
           <a:lstStyle/>
@@ -14578,7 +16031,7 @@
           <a:noFill/>
         </p:spPr>
         <p:txBody>
-          <a:bodyPr wrap="square" lIns="0" rIns="0" tIns="0" bIns="0" anchor="t">
+          <a:bodyPr wrap="square" lIns="0" tIns="0" rIns="0" bIns="0" anchor="t">
             <a:spAutoFit/>
           </a:bodyPr>
           <a:lstStyle/>
@@ -14620,7 +16073,7 @@
           <a:noFill/>
         </p:spPr>
         <p:txBody>
-          <a:bodyPr wrap="square" lIns="0" rIns="0" tIns="0" bIns="0" anchor="t">
+          <a:bodyPr wrap="square" lIns="0" tIns="0" rIns="0" bIns="0" anchor="t">
             <a:spAutoFit/>
           </a:bodyPr>
           <a:lstStyle/>
@@ -14662,7 +16115,7 @@
           <a:noFill/>
         </p:spPr>
         <p:txBody>
-          <a:bodyPr wrap="square" lIns="0" rIns="0" tIns="0" bIns="0" anchor="t">
+          <a:bodyPr wrap="square" lIns="0" tIns="0" rIns="0" bIns="0" anchor="t">
             <a:spAutoFit/>
           </a:bodyPr>
           <a:lstStyle/>
@@ -14704,7 +16157,7 @@
           <a:noFill/>
         </p:spPr>
         <p:txBody>
-          <a:bodyPr wrap="square" lIns="0" rIns="0" tIns="0" bIns="0" anchor="t">
+          <a:bodyPr wrap="square" lIns="0" tIns="0" rIns="0" bIns="0" anchor="t">
             <a:spAutoFit/>
           </a:bodyPr>
           <a:lstStyle/>
@@ -14746,7 +16199,7 @@
           <a:noFill/>
         </p:spPr>
         <p:txBody>
-          <a:bodyPr wrap="square" lIns="0" rIns="0" tIns="0" bIns="0" anchor="t">
+          <a:bodyPr wrap="square" lIns="0" tIns="0" rIns="0" bIns="0" anchor="t">
             <a:spAutoFit/>
           </a:bodyPr>
           <a:lstStyle/>
@@ -14788,7 +16241,7 @@
           <a:noFill/>
         </p:spPr>
         <p:txBody>
-          <a:bodyPr wrap="square" lIns="0" rIns="0" tIns="0" bIns="0" anchor="t">
+          <a:bodyPr wrap="square" lIns="0" tIns="0" rIns="0" bIns="0" anchor="t">
             <a:spAutoFit/>
           </a:bodyPr>
           <a:lstStyle/>
@@ -14830,7 +16283,7 @@
           <a:noFill/>
         </p:spPr>
         <p:txBody>
-          <a:bodyPr wrap="square" lIns="0" rIns="0" tIns="0" bIns="0" anchor="t">
+          <a:bodyPr wrap="square" lIns="0" tIns="0" rIns="0" bIns="0" anchor="t">
             <a:spAutoFit/>
           </a:bodyPr>
           <a:lstStyle/>
@@ -14894,7 +16347,9 @@
         <p:txBody>
           <a:bodyPr rtlCol="0" anchor="ctr"/>
           <a:lstStyle/>
-          <a:p/>
+          <a:p>
+            <a:endParaRPr/>
+          </a:p>
         </p:txBody>
       </p:sp>
       <p:sp>
@@ -14914,7 +16369,7 @@
           <a:noFill/>
         </p:spPr>
         <p:txBody>
-          <a:bodyPr wrap="square" lIns="0" rIns="0" tIns="0" bIns="0" anchor="t">
+          <a:bodyPr wrap="square" lIns="0" tIns="0" rIns="0" bIns="0" anchor="t">
             <a:spAutoFit/>
           </a:bodyPr>
           <a:lstStyle/>
@@ -14956,7 +16411,7 @@
           <a:noFill/>
         </p:spPr>
         <p:txBody>
-          <a:bodyPr wrap="square" lIns="0" rIns="0" tIns="0" bIns="0" anchor="t">
+          <a:bodyPr wrap="square" lIns="0" tIns="0" rIns="0" bIns="0" anchor="t">
             <a:spAutoFit/>
           </a:bodyPr>
           <a:lstStyle/>
@@ -14998,7 +16453,7 @@
           <a:noFill/>
         </p:spPr>
         <p:txBody>
-          <a:bodyPr wrap="square" lIns="0" rIns="0" tIns="0" bIns="0" anchor="t">
+          <a:bodyPr wrap="square" lIns="0" tIns="0" rIns="0" bIns="0" anchor="t">
             <a:spAutoFit/>
           </a:bodyPr>
           <a:lstStyle/>
@@ -15040,7 +16495,7 @@
           <a:noFill/>
         </p:spPr>
         <p:txBody>
-          <a:bodyPr wrap="square" lIns="0" rIns="0" tIns="0" bIns="0" anchor="t">
+          <a:bodyPr wrap="square" lIns="0" tIns="0" rIns="0" bIns="0" anchor="t">
             <a:spAutoFit/>
           </a:bodyPr>
           <a:lstStyle/>
@@ -15082,7 +16537,7 @@
           <a:noFill/>
         </p:spPr>
         <p:txBody>
-          <a:bodyPr wrap="square" lIns="0" rIns="0" tIns="0" bIns="0" anchor="t">
+          <a:bodyPr wrap="square" lIns="0" tIns="0" rIns="0" bIns="0" anchor="t">
             <a:spAutoFit/>
           </a:bodyPr>
           <a:lstStyle/>
@@ -15124,7 +16579,7 @@
           <a:noFill/>
         </p:spPr>
         <p:txBody>
-          <a:bodyPr wrap="square" lIns="0" rIns="0" tIns="0" bIns="0" anchor="t">
+          <a:bodyPr wrap="square" lIns="0" tIns="0" rIns="0" bIns="0" anchor="t">
             <a:spAutoFit/>
           </a:bodyPr>
           <a:lstStyle/>
@@ -15166,7 +16621,7 @@
           <a:noFill/>
         </p:spPr>
         <p:txBody>
-          <a:bodyPr wrap="square" lIns="0" rIns="0" tIns="0" bIns="0" anchor="t">
+          <a:bodyPr wrap="square" lIns="0" tIns="0" rIns="0" bIns="0" anchor="t">
             <a:spAutoFit/>
           </a:bodyPr>
           <a:lstStyle/>
@@ -15208,7 +16663,7 @@
           <a:noFill/>
         </p:spPr>
         <p:txBody>
-          <a:bodyPr wrap="square" lIns="0" rIns="0" tIns="0" bIns="0" anchor="t">
+          <a:bodyPr wrap="square" lIns="0" tIns="0" rIns="0" bIns="0" anchor="t">
             <a:spAutoFit/>
           </a:bodyPr>
           <a:lstStyle/>
@@ -15242,7 +16697,7 @@
 </file>
 
 <file path=ppt/slides/slide5.xml><?xml version="1.0" encoding="utf-8"?>
-<p:sld xmlns:a="http://schemas.openxmlformats.org/drawingml/2006/main" xmlns:p="http://schemas.openxmlformats.org/presentationml/2006/main" xmlns:r="http://schemas.openxmlformats.org/officeDocument/2006/relationships">
+<p:sld xmlns:a="http://schemas.openxmlformats.org/drawingml/2006/main" xmlns:r="http://schemas.openxmlformats.org/officeDocument/2006/relationships" xmlns:p="http://schemas.openxmlformats.org/presentationml/2006/main">
   <p:cSld>
     <p:bg>
       <p:bgPr>
@@ -15258,7 +16713,14 @@
         <p:cNvGrpSpPr/>
         <p:nvPr/>
       </p:nvGrpSpPr>
-      <p:grpSpPr/>
+      <p:grpSpPr>
+        <a:xfrm>
+          <a:off x="0" y="0"/>
+          <a:ext cx="0" cy="0"/>
+          <a:chOff x="0" y="0"/>
+          <a:chExt cx="0" cy="0"/>
+        </a:xfrm>
+      </p:grpSpPr>
       <p:sp>
         <p:nvSpPr>
           <p:cNvPr id="2" name="TextBox 1"/>
@@ -15276,7 +16738,7 @@
           <a:noFill/>
         </p:spPr>
         <p:txBody>
-          <a:bodyPr wrap="square" lIns="0" rIns="0" tIns="0" bIns="0" anchor="t">
+          <a:bodyPr wrap="square" lIns="0" tIns="0" rIns="0" bIns="0" anchor="t">
             <a:spAutoFit/>
           </a:bodyPr>
           <a:lstStyle/>
@@ -15318,7 +16780,7 @@
           <a:noFill/>
         </p:spPr>
         <p:txBody>
-          <a:bodyPr wrap="square" lIns="0" rIns="0" tIns="0" bIns="0" anchor="t">
+          <a:bodyPr wrap="square" lIns="0" tIns="0" rIns="0" bIns="0" anchor="t">
             <a:spAutoFit/>
           </a:bodyPr>
           <a:lstStyle/>
@@ -15396,7 +16858,7 @@
           <a:noFill/>
         </p:spPr>
         <p:txBody>
-          <a:bodyPr wrap="square" lIns="0" rIns="0" tIns="0" bIns="0" anchor="t">
+          <a:bodyPr wrap="square" lIns="0" tIns="0" rIns="0" bIns="0" anchor="t">
             <a:spAutoFit/>
           </a:bodyPr>
           <a:lstStyle/>
@@ -15438,7 +16900,7 @@
           <a:noFill/>
         </p:spPr>
         <p:txBody>
-          <a:bodyPr wrap="square" lIns="0" rIns="0" tIns="0" bIns="0" anchor="t">
+          <a:bodyPr wrap="square" lIns="0" tIns="0" rIns="0" bIns="0" anchor="t">
             <a:spAutoFit/>
           </a:bodyPr>
           <a:lstStyle/>
@@ -15480,7 +16942,7 @@
           <a:noFill/>
         </p:spPr>
         <p:txBody>
-          <a:bodyPr wrap="square" lIns="0" rIns="0" tIns="0" bIns="0" anchor="t">
+          <a:bodyPr wrap="square" lIns="0" tIns="0" rIns="0" bIns="0" anchor="t">
             <a:spAutoFit/>
           </a:bodyPr>
           <a:lstStyle/>
@@ -15558,7 +17020,7 @@
           <a:noFill/>
         </p:spPr>
         <p:txBody>
-          <a:bodyPr wrap="square" lIns="0" rIns="0" tIns="0" bIns="0" anchor="t">
+          <a:bodyPr wrap="square" lIns="0" tIns="0" rIns="0" bIns="0" anchor="t">
             <a:spAutoFit/>
           </a:bodyPr>
           <a:lstStyle/>
@@ -15600,7 +17062,7 @@
           <a:noFill/>
         </p:spPr>
         <p:txBody>
-          <a:bodyPr wrap="square" lIns="0" rIns="0" tIns="0" bIns="0" anchor="t">
+          <a:bodyPr wrap="square" lIns="0" tIns="0" rIns="0" bIns="0" anchor="t">
             <a:spAutoFit/>
           </a:bodyPr>
           <a:lstStyle/>
@@ -15678,7 +17140,7 @@
           <a:noFill/>
         </p:spPr>
         <p:txBody>
-          <a:bodyPr wrap="square" lIns="0" rIns="0" tIns="0" bIns="0" anchor="t">
+          <a:bodyPr wrap="square" lIns="0" tIns="0" rIns="0" bIns="0" anchor="t">
             <a:spAutoFit/>
           </a:bodyPr>
           <a:lstStyle/>
@@ -15720,7 +17182,7 @@
           <a:noFill/>
         </p:spPr>
         <p:txBody>
-          <a:bodyPr wrap="square" lIns="0" rIns="0" tIns="0" bIns="0" anchor="t">
+          <a:bodyPr wrap="square" lIns="0" tIns="0" rIns="0" bIns="0" anchor="t">
             <a:spAutoFit/>
           </a:bodyPr>
           <a:lstStyle/>
@@ -15798,7 +17260,7 @@
           <a:noFill/>
         </p:spPr>
         <p:txBody>
-          <a:bodyPr wrap="square" lIns="0" rIns="0" tIns="0" bIns="0" anchor="t">
+          <a:bodyPr wrap="square" lIns="0" tIns="0" rIns="0" bIns="0" anchor="t">
             <a:spAutoFit/>
           </a:bodyPr>
           <a:lstStyle/>
@@ -15840,7 +17302,7 @@
           <a:noFill/>
         </p:spPr>
         <p:txBody>
-          <a:bodyPr wrap="square" lIns="0" rIns="0" tIns="0" bIns="0" anchor="t">
+          <a:bodyPr wrap="square" lIns="0" tIns="0" rIns="0" bIns="0" anchor="t">
             <a:spAutoFit/>
           </a:bodyPr>
           <a:lstStyle/>
@@ -15947,7 +17409,7 @@
           <a:noFill/>
         </p:spPr>
         <p:txBody>
-          <a:bodyPr wrap="square" lIns="0" rIns="0" tIns="0" bIns="0" anchor="t">
+          <a:bodyPr wrap="square" lIns="0" tIns="0" rIns="0" bIns="0" anchor="t">
             <a:spAutoFit/>
           </a:bodyPr>
           <a:lstStyle/>
@@ -15989,7 +17451,7 @@
           <a:noFill/>
         </p:spPr>
         <p:txBody>
-          <a:bodyPr wrap="square" lIns="0" rIns="0" tIns="0" bIns="0" anchor="t">
+          <a:bodyPr wrap="square" lIns="0" tIns="0" rIns="0" bIns="0" anchor="t">
             <a:spAutoFit/>
           </a:bodyPr>
           <a:lstStyle/>
@@ -16031,7 +17493,7 @@
           <a:noFill/>
         </p:spPr>
         <p:txBody>
-          <a:bodyPr wrap="square" lIns="0" rIns="0" tIns="0" bIns="0" anchor="t">
+          <a:bodyPr wrap="square" lIns="0" tIns="0" rIns="0" bIns="0" anchor="t">
             <a:spAutoFit/>
           </a:bodyPr>
           <a:lstStyle/>
@@ -16065,7 +17527,7 @@
 </file>
 
 <file path=ppt/slides/slide6.xml><?xml version="1.0" encoding="utf-8"?>
-<p:sld xmlns:a="http://schemas.openxmlformats.org/drawingml/2006/main" xmlns:p="http://schemas.openxmlformats.org/presentationml/2006/main" xmlns:r="http://schemas.openxmlformats.org/officeDocument/2006/relationships">
+<p:sld xmlns:a="http://schemas.openxmlformats.org/drawingml/2006/main" xmlns:r="http://schemas.openxmlformats.org/officeDocument/2006/relationships" xmlns:p="http://schemas.openxmlformats.org/presentationml/2006/main">
   <p:cSld>
     <p:bg>
       <p:bgPr>
@@ -16081,7 +17543,14 @@
         <p:cNvGrpSpPr/>
         <p:nvPr/>
       </p:nvGrpSpPr>
-      <p:grpSpPr/>
+      <p:grpSpPr>
+        <a:xfrm>
+          <a:off x="0" y="0"/>
+          <a:ext cx="0" cy="0"/>
+          <a:chOff x="0" y="0"/>
+          <a:chExt cx="0" cy="0"/>
+        </a:xfrm>
+      </p:grpSpPr>
       <p:sp>
         <p:nvSpPr>
           <p:cNvPr id="2" name="TextBox 1"/>
@@ -16099,7 +17568,7 @@
           <a:noFill/>
         </p:spPr>
         <p:txBody>
-          <a:bodyPr wrap="square" lIns="0" rIns="0" tIns="0" bIns="0" anchor="t">
+          <a:bodyPr wrap="square" lIns="0" tIns="0" rIns="0" bIns="0" anchor="t">
             <a:spAutoFit/>
           </a:bodyPr>
           <a:lstStyle/>
@@ -16141,7 +17610,7 @@
           <a:noFill/>
         </p:spPr>
         <p:txBody>
-          <a:bodyPr wrap="square" lIns="0" rIns="0" tIns="0" bIns="0" anchor="t">
+          <a:bodyPr wrap="square" lIns="0" tIns="0" rIns="0" bIns="0" anchor="t">
             <a:spAutoFit/>
           </a:bodyPr>
           <a:lstStyle/>
@@ -16219,7 +17688,7 @@
           <a:noFill/>
         </p:spPr>
         <p:txBody>
-          <a:bodyPr wrap="square" lIns="0" rIns="0" tIns="0" bIns="0" anchor="t">
+          <a:bodyPr wrap="square" lIns="0" tIns="0" rIns="0" bIns="0" anchor="t">
             <a:spAutoFit/>
           </a:bodyPr>
           <a:lstStyle/>
@@ -16261,7 +17730,7 @@
           <a:noFill/>
         </p:spPr>
         <p:txBody>
-          <a:bodyPr wrap="square" lIns="0" rIns="0" tIns="0" bIns="0" anchor="t">
+          <a:bodyPr wrap="square" lIns="0" tIns="0" rIns="0" bIns="0" anchor="t">
             <a:spAutoFit/>
           </a:bodyPr>
           <a:lstStyle/>
@@ -16303,7 +17772,7 @@
           <a:noFill/>
         </p:spPr>
         <p:txBody>
-          <a:bodyPr wrap="square" lIns="0" rIns="0" tIns="0" bIns="0" anchor="t">
+          <a:bodyPr wrap="square" lIns="0" tIns="0" rIns="0" bIns="0" anchor="t">
             <a:spAutoFit/>
           </a:bodyPr>
           <a:lstStyle/>
@@ -16381,7 +17850,7 @@
           <a:noFill/>
         </p:spPr>
         <p:txBody>
-          <a:bodyPr wrap="square" lIns="0" rIns="0" tIns="0" bIns="0" anchor="t">
+          <a:bodyPr wrap="square" lIns="0" tIns="0" rIns="0" bIns="0" anchor="t">
             <a:spAutoFit/>
           </a:bodyPr>
           <a:lstStyle/>
@@ -16423,7 +17892,7 @@
           <a:noFill/>
         </p:spPr>
         <p:txBody>
-          <a:bodyPr wrap="square" lIns="0" rIns="0" tIns="0" bIns="0" anchor="t">
+          <a:bodyPr wrap="square" lIns="0" tIns="0" rIns="0" bIns="0" anchor="t">
             <a:spAutoFit/>
           </a:bodyPr>
           <a:lstStyle/>
@@ -16501,7 +17970,7 @@
           <a:noFill/>
         </p:spPr>
         <p:txBody>
-          <a:bodyPr wrap="square" lIns="0" rIns="0" tIns="0" bIns="0" anchor="t">
+          <a:bodyPr wrap="square" lIns="0" tIns="0" rIns="0" bIns="0" anchor="t">
             <a:spAutoFit/>
           </a:bodyPr>
           <a:lstStyle/>
@@ -16543,7 +18012,7 @@
           <a:noFill/>
         </p:spPr>
         <p:txBody>
-          <a:bodyPr wrap="square" lIns="0" rIns="0" tIns="0" bIns="0" anchor="t">
+          <a:bodyPr wrap="square" lIns="0" tIns="0" rIns="0" bIns="0" anchor="t">
             <a:spAutoFit/>
           </a:bodyPr>
           <a:lstStyle/>
@@ -16621,7 +18090,7 @@
           <a:noFill/>
         </p:spPr>
         <p:txBody>
-          <a:bodyPr wrap="square" lIns="0" rIns="0" tIns="0" bIns="0" anchor="t">
+          <a:bodyPr wrap="square" lIns="0" tIns="0" rIns="0" bIns="0" anchor="t">
             <a:spAutoFit/>
           </a:bodyPr>
           <a:lstStyle/>
@@ -16655,15 +18124,15 @@
         <p:spPr>
           <a:xfrm>
             <a:off x="2563977" y="4903468"/>
-            <a:ext cx="3379623" cy="472440"/>
-          </a:xfrm>
-          <a:prstGeom prst="rect">
-            <a:avLst/>
-          </a:prstGeom>
-          <a:noFill/>
-        </p:spPr>
-        <p:txBody>
-          <a:bodyPr wrap="square" lIns="0" rIns="0" tIns="0" bIns="0" anchor="t">
+            <a:ext cx="3379623" cy="438774"/>
+          </a:xfrm>
+          <a:prstGeom prst="rect">
+            <a:avLst/>
+          </a:prstGeom>
+          <a:noFill/>
+        </p:spPr>
+        <p:txBody>
+          <a:bodyPr wrap="square" lIns="0" tIns="0" rIns="0" bIns="0" anchor="t">
             <a:spAutoFit/>
           </a:bodyPr>
           <a:lstStyle/>
@@ -16677,14 +18146,110 @@
               </a:spcAft>
             </a:pPr>
             <a:r>
-              <a:rPr sz="1200" b="0" i="0">
+              <a:rPr sz="1200" b="0" i="0" dirty="0" err="1">
                 <a:solidFill>
                   <a:srgbClr val="14161A"/>
                 </a:solidFill>
                 <a:latin typeface="Segoe UI"/>
               </a:rPr>
-              <a:t>Copiar al portapapeles, exportar a CSV o convertir en criterio OK/NG</a:t>
-            </a:r>
+              <a:t>Copiar</a:t>
+            </a:r>
+            <a:r>
+              <a:rPr sz="1200" b="0" i="0" dirty="0">
+                <a:solidFill>
+                  <a:srgbClr val="14161A"/>
+                </a:solidFill>
+                <a:latin typeface="Segoe UI"/>
+              </a:rPr>
+              <a:t> al </a:t>
+            </a:r>
+            <a:r>
+              <a:rPr sz="1200" b="0" i="0" dirty="0" err="1">
+                <a:solidFill>
+                  <a:srgbClr val="14161A"/>
+                </a:solidFill>
+                <a:latin typeface="Segoe UI"/>
+              </a:rPr>
+              <a:t>portapapeles</a:t>
+            </a:r>
+            <a:r>
+              <a:rPr sz="1200" b="0" i="0" dirty="0">
+                <a:solidFill>
+                  <a:srgbClr val="14161A"/>
+                </a:solidFill>
+                <a:latin typeface="Segoe UI"/>
+              </a:rPr>
+              <a:t>, </a:t>
+            </a:r>
+            <a:r>
+              <a:rPr sz="1200" b="0" i="0" dirty="0" err="1">
+                <a:solidFill>
+                  <a:srgbClr val="14161A"/>
+                </a:solidFill>
+                <a:latin typeface="Segoe UI"/>
+              </a:rPr>
+              <a:t>exportar</a:t>
+            </a:r>
+            <a:r>
+              <a:rPr sz="1200" b="0" i="0" dirty="0">
+                <a:solidFill>
+                  <a:srgbClr val="14161A"/>
+                </a:solidFill>
+                <a:latin typeface="Segoe UI"/>
+              </a:rPr>
+              <a:t> a CSV o </a:t>
+            </a:r>
+            <a:r>
+              <a:rPr sz="1200" b="0" i="0" dirty="0" err="1">
+                <a:solidFill>
+                  <a:srgbClr val="14161A"/>
+                </a:solidFill>
+                <a:latin typeface="Segoe UI"/>
+              </a:rPr>
+              <a:t>convertir</a:t>
+            </a:r>
+            <a:r>
+              <a:rPr sz="1200" b="0" i="0" dirty="0">
+                <a:solidFill>
+                  <a:srgbClr val="14161A"/>
+                </a:solidFill>
+                <a:latin typeface="Segoe UI"/>
+              </a:rPr>
+              <a:t> </a:t>
+            </a:r>
+            <a:r>
+              <a:rPr sz="1200" b="0" i="0" dirty="0" err="1">
+                <a:solidFill>
+                  <a:srgbClr val="14161A"/>
+                </a:solidFill>
+                <a:latin typeface="Segoe UI"/>
+              </a:rPr>
+              <a:t>en</a:t>
+            </a:r>
+            <a:r>
+              <a:rPr sz="1200" b="0" i="0" dirty="0">
+                <a:solidFill>
+                  <a:srgbClr val="14161A"/>
+                </a:solidFill>
+                <a:latin typeface="Segoe UI"/>
+              </a:rPr>
+              <a:t> </a:t>
+            </a:r>
+            <a:r>
+              <a:rPr sz="1200" b="0" i="0" dirty="0" err="1">
+                <a:solidFill>
+                  <a:srgbClr val="14161A"/>
+                </a:solidFill>
+                <a:latin typeface="Segoe UI"/>
+              </a:rPr>
+              <a:t>criterio</a:t>
+            </a:r>
+            <a:endParaRPr sz="1200" b="0" i="0" dirty="0">
+              <a:solidFill>
+                <a:srgbClr val="14161A"/>
+              </a:solidFill>
+              <a:latin typeface="Segoe UI"/>
+            </a:endParaRPr>
           </a:p>
         </p:txBody>
       </p:sp>
@@ -16762,15 +18327,15 @@
         <p:spPr>
           <a:xfrm>
             <a:off x="6446520" y="5823484"/>
-            <a:ext cx="5532120" cy="457200"/>
-          </a:xfrm>
-          <a:prstGeom prst="rect">
-            <a:avLst/>
-          </a:prstGeom>
-          <a:noFill/>
-        </p:spPr>
-        <p:txBody>
-          <a:bodyPr wrap="square" lIns="0" rIns="0" tIns="0" bIns="0" anchor="t">
+            <a:ext cx="5532120" cy="334579"/>
+          </a:xfrm>
+          <a:prstGeom prst="rect">
+            <a:avLst/>
+          </a:prstGeom>
+          <a:noFill/>
+        </p:spPr>
+        <p:txBody>
+          <a:bodyPr wrap="square" lIns="0" tIns="0" rIns="0" bIns="0" anchor="t">
             <a:spAutoFit/>
           </a:bodyPr>
           <a:lstStyle/>
@@ -16784,13 +18349,220 @@
               </a:spcAft>
             </a:pPr>
             <a:r>
-              <a:rPr sz="950" b="0" i="0">
+              <a:rPr sz="950" b="0" i="0" dirty="0" err="1">
                 <a:solidFill>
                   <a:srgbClr val="8A8F98"/>
                 </a:solidFill>
                 <a:latin typeface="Segoe UI"/>
               </a:rPr>
-              <a:t>Resultado sobre la pieza de muestra: polígono de 6 lados, perímetro 676,47 px, área 13.906,50 px², un agujero y 15 cotas deducidas.</a:t>
+              <a:t>Resultado</a:t>
+            </a:r>
+            <a:r>
+              <a:rPr sz="950" b="0" i="0" dirty="0">
+                <a:solidFill>
+                  <a:srgbClr val="8A8F98"/>
+                </a:solidFill>
+                <a:latin typeface="Segoe UI"/>
+              </a:rPr>
+              <a:t> </a:t>
+            </a:r>
+            <a:r>
+              <a:rPr sz="950" b="0" i="0" dirty="0" err="1">
+                <a:solidFill>
+                  <a:srgbClr val="8A8F98"/>
+                </a:solidFill>
+                <a:latin typeface="Segoe UI"/>
+              </a:rPr>
+              <a:t>sobre</a:t>
+            </a:r>
+            <a:r>
+              <a:rPr sz="950" b="0" i="0" dirty="0">
+                <a:solidFill>
+                  <a:srgbClr val="8A8F98"/>
+                </a:solidFill>
+                <a:latin typeface="Segoe UI"/>
+              </a:rPr>
+              <a:t> la </a:t>
+            </a:r>
+            <a:r>
+              <a:rPr sz="950" b="0" i="0" dirty="0" err="1">
+                <a:solidFill>
+                  <a:srgbClr val="8A8F98"/>
+                </a:solidFill>
+                <a:latin typeface="Segoe UI"/>
+              </a:rPr>
+              <a:t>pieza</a:t>
+            </a:r>
+            <a:r>
+              <a:rPr sz="950" b="0" i="0" dirty="0">
+                <a:solidFill>
+                  <a:srgbClr val="8A8F98"/>
+                </a:solidFill>
+                <a:latin typeface="Segoe UI"/>
+              </a:rPr>
+              <a:t> de </a:t>
+            </a:r>
+            <a:r>
+              <a:rPr sz="950" b="0" i="0" dirty="0" err="1">
+                <a:solidFill>
+                  <a:srgbClr val="8A8F98"/>
+                </a:solidFill>
+                <a:latin typeface="Segoe UI"/>
+              </a:rPr>
+              <a:t>muestra</a:t>
+            </a:r>
+            <a:r>
+              <a:rPr sz="950" b="0" i="0" dirty="0">
+                <a:solidFill>
+                  <a:srgbClr val="8A8F98"/>
+                </a:solidFill>
+                <a:latin typeface="Segoe UI"/>
+              </a:rPr>
+              <a:t>: </a:t>
+            </a:r>
+            <a:r>
+              <a:rPr sz="950" b="0" i="0" dirty="0" err="1">
+                <a:solidFill>
+                  <a:srgbClr val="8A8F98"/>
+                </a:solidFill>
+                <a:latin typeface="Segoe UI"/>
+              </a:rPr>
+              <a:t>polígono</a:t>
+            </a:r>
+            <a:r>
+              <a:rPr sz="950" b="0" i="0" dirty="0">
+                <a:solidFill>
+                  <a:srgbClr val="8A8F98"/>
+                </a:solidFill>
+                <a:latin typeface="Segoe UI"/>
+              </a:rPr>
+              <a:t> de 6 </a:t>
+            </a:r>
+            <a:r>
+              <a:rPr sz="950" b="0" i="0" dirty="0" err="1">
+                <a:solidFill>
+                  <a:srgbClr val="8A8F98"/>
+                </a:solidFill>
+                <a:latin typeface="Segoe UI"/>
+              </a:rPr>
+              <a:t>lados</a:t>
+            </a:r>
+            <a:r>
+              <a:rPr sz="950" b="0" i="0" dirty="0">
+                <a:solidFill>
+                  <a:srgbClr val="8A8F98"/>
+                </a:solidFill>
+                <a:latin typeface="Segoe UI"/>
+              </a:rPr>
+              <a:t>, </a:t>
+            </a:r>
+            <a:r>
+              <a:rPr sz="950" b="0" i="0" dirty="0" err="1">
+                <a:solidFill>
+                  <a:srgbClr val="8A8F98"/>
+                </a:solidFill>
+                <a:latin typeface="Segoe UI"/>
+              </a:rPr>
+              <a:t>perímetro</a:t>
+            </a:r>
+            <a:r>
+              <a:rPr sz="950" b="0" i="0" dirty="0">
+                <a:solidFill>
+                  <a:srgbClr val="8A8F98"/>
+                </a:solidFill>
+                <a:latin typeface="Segoe UI"/>
+              </a:rPr>
+              <a:t> </a:t>
+            </a:r>
+            <a:r>
+              <a:rPr sz="950" b="0" i="0" dirty="0" err="1">
+                <a:solidFill>
+                  <a:srgbClr val="8A8F98"/>
+                </a:solidFill>
+                <a:latin typeface="Segoe UI"/>
+              </a:rPr>
+              <a:t>px</a:t>
+            </a:r>
+            <a:r>
+              <a:rPr sz="950" b="0" i="0" dirty="0">
+                <a:solidFill>
+                  <a:srgbClr val="8A8F98"/>
+                </a:solidFill>
+                <a:latin typeface="Segoe UI"/>
+              </a:rPr>
+              <a:t>, </a:t>
+            </a:r>
+            <a:r>
+              <a:rPr sz="950" b="0" i="0" dirty="0" err="1">
+                <a:solidFill>
+                  <a:srgbClr val="8A8F98"/>
+                </a:solidFill>
+                <a:latin typeface="Segoe UI"/>
+              </a:rPr>
+              <a:t>área</a:t>
+            </a:r>
+            <a:r>
+              <a:rPr sz="950" b="0" i="0" dirty="0">
+                <a:solidFill>
+                  <a:srgbClr val="8A8F98"/>
+                </a:solidFill>
+                <a:latin typeface="Segoe UI"/>
+              </a:rPr>
+              <a:t> px², un </a:t>
+            </a:r>
+            <a:r>
+              <a:rPr sz="950" b="0" i="0" dirty="0" err="1">
+                <a:solidFill>
+                  <a:srgbClr val="8A8F98"/>
+                </a:solidFill>
+                <a:latin typeface="Segoe UI"/>
+              </a:rPr>
+              <a:t>agujero</a:t>
+            </a:r>
+            <a:r>
+              <a:rPr sz="950" b="0" i="0" dirty="0">
+                <a:solidFill>
+                  <a:srgbClr val="8A8F98"/>
+                </a:solidFill>
+                <a:latin typeface="Segoe UI"/>
+              </a:rPr>
+              <a:t> y 15 </a:t>
+            </a:r>
+            <a:r>
+              <a:rPr sz="950" b="0" i="0" dirty="0" err="1">
+                <a:solidFill>
+                  <a:srgbClr val="8A8F98"/>
+                </a:solidFill>
+                <a:latin typeface="Segoe UI"/>
+              </a:rPr>
+              <a:t>cotas</a:t>
+            </a:r>
+            <a:r>
+              <a:rPr sz="950" b="0" i="0" dirty="0">
+                <a:solidFill>
+                  <a:srgbClr val="8A8F98"/>
+                </a:solidFill>
+                <a:latin typeface="Segoe UI"/>
+              </a:rPr>
+              <a:t> </a:t>
+            </a:r>
+            <a:r>
+              <a:rPr sz="950" b="0" i="0" dirty="0" err="1">
+                <a:solidFill>
+                  <a:srgbClr val="8A8F98"/>
+                </a:solidFill>
+                <a:latin typeface="Segoe UI"/>
+              </a:rPr>
+              <a:t>deducidas</a:t>
+            </a:r>
+            <a:r>
+              <a:rPr sz="950" b="0" i="0" dirty="0">
+                <a:solidFill>
+                  <a:srgbClr val="8A8F98"/>
+                </a:solidFill>
+                <a:latin typeface="Segoe UI"/>
+              </a:rPr>
+              <a:t>.</a:t>
             </a:r>
           </a:p>
         </p:txBody>
@@ -16812,7 +18584,7 @@
           <a:noFill/>
         </p:spPr>
         <p:txBody>
-          <a:bodyPr wrap="square" lIns="0" rIns="0" tIns="0" bIns="0" anchor="t">
+          <a:bodyPr wrap="square" lIns="0" tIns="0" rIns="0" bIns="0" anchor="t">
             <a:spAutoFit/>
           </a:bodyPr>
           <a:lstStyle/>
@@ -16854,7 +18626,7 @@
           <a:noFill/>
         </p:spPr>
         <p:txBody>
-          <a:bodyPr wrap="square" lIns="0" rIns="0" tIns="0" bIns="0" anchor="t">
+          <a:bodyPr wrap="square" lIns="0" tIns="0" rIns="0" bIns="0" anchor="t">
             <a:spAutoFit/>
           </a:bodyPr>
           <a:lstStyle/>
@@ -16888,7 +18660,7 @@
 </file>
 
 <file path=ppt/slides/slide7.xml><?xml version="1.0" encoding="utf-8"?>
-<p:sld xmlns:a="http://schemas.openxmlformats.org/drawingml/2006/main" xmlns:p="http://schemas.openxmlformats.org/presentationml/2006/main" xmlns:r="http://schemas.openxmlformats.org/officeDocument/2006/relationships">
+<p:sld xmlns:a="http://schemas.openxmlformats.org/drawingml/2006/main" xmlns:r="http://schemas.openxmlformats.org/officeDocument/2006/relationships" xmlns:p="http://schemas.openxmlformats.org/presentationml/2006/main">
   <p:cSld>
     <p:bg>
       <p:bgPr>
@@ -16904,7 +18676,14 @@
         <p:cNvGrpSpPr/>
         <p:nvPr/>
       </p:nvGrpSpPr>
-      <p:grpSpPr/>
+      <p:grpSpPr>
+        <a:xfrm>
+          <a:off x="0" y="0"/>
+          <a:ext cx="0" cy="0"/>
+          <a:chOff x="0" y="0"/>
+          <a:chExt cx="0" cy="0"/>
+        </a:xfrm>
+      </p:grpSpPr>
       <p:sp>
         <p:nvSpPr>
           <p:cNvPr id="2" name="TextBox 1"/>
@@ -16922,7 +18701,7 @@
           <a:noFill/>
         </p:spPr>
         <p:txBody>
-          <a:bodyPr wrap="square" lIns="0" rIns="0" tIns="0" bIns="0" anchor="t">
+          <a:bodyPr wrap="square" lIns="0" tIns="0" rIns="0" bIns="0" anchor="t">
             <a:spAutoFit/>
           </a:bodyPr>
           <a:lstStyle/>
@@ -16964,7 +18743,7 @@
           <a:noFill/>
         </p:spPr>
         <p:txBody>
-          <a:bodyPr wrap="square" lIns="0" rIns="0" tIns="0" bIns="0" anchor="t">
+          <a:bodyPr wrap="square" lIns="0" tIns="0" rIns="0" bIns="0" anchor="t">
             <a:spAutoFit/>
           </a:bodyPr>
           <a:lstStyle/>
@@ -17042,7 +18821,7 @@
           <a:noFill/>
         </p:spPr>
         <p:txBody>
-          <a:bodyPr wrap="square" lIns="0" rIns="0" tIns="0" bIns="0" anchor="t">
+          <a:bodyPr wrap="square" lIns="0" tIns="0" rIns="0" bIns="0" anchor="t">
             <a:spAutoFit/>
           </a:bodyPr>
           <a:lstStyle/>
@@ -17084,7 +18863,7 @@
           <a:noFill/>
         </p:spPr>
         <p:txBody>
-          <a:bodyPr wrap="square" lIns="0" rIns="0" tIns="0" bIns="0" anchor="t">
+          <a:bodyPr wrap="square" lIns="0" tIns="0" rIns="0" bIns="0" anchor="t">
             <a:spAutoFit/>
           </a:bodyPr>
           <a:lstStyle/>
@@ -17126,7 +18905,7 @@
           <a:noFill/>
         </p:spPr>
         <p:txBody>
-          <a:bodyPr wrap="square" lIns="0" rIns="0" tIns="0" bIns="0" anchor="t">
+          <a:bodyPr wrap="square" lIns="0" tIns="0" rIns="0" bIns="0" anchor="t">
             <a:spAutoFit/>
           </a:bodyPr>
           <a:lstStyle/>
@@ -17204,7 +18983,7 @@
           <a:noFill/>
         </p:spPr>
         <p:txBody>
-          <a:bodyPr wrap="square" lIns="0" rIns="0" tIns="0" bIns="0" anchor="t">
+          <a:bodyPr wrap="square" lIns="0" tIns="0" rIns="0" bIns="0" anchor="t">
             <a:spAutoFit/>
           </a:bodyPr>
           <a:lstStyle/>
@@ -17246,7 +19025,7 @@
           <a:noFill/>
         </p:spPr>
         <p:txBody>
-          <a:bodyPr wrap="square" lIns="0" rIns="0" tIns="0" bIns="0" anchor="t">
+          <a:bodyPr wrap="square" lIns="0" tIns="0" rIns="0" bIns="0" anchor="t">
             <a:spAutoFit/>
           </a:bodyPr>
           <a:lstStyle/>
@@ -17324,7 +19103,7 @@
           <a:noFill/>
         </p:spPr>
         <p:txBody>
-          <a:bodyPr wrap="square" lIns="0" rIns="0" tIns="0" bIns="0" anchor="t">
+          <a:bodyPr wrap="square" lIns="0" tIns="0" rIns="0" bIns="0" anchor="t">
             <a:spAutoFit/>
           </a:bodyPr>
           <a:lstStyle/>
@@ -17366,7 +19145,7 @@
           <a:noFill/>
         </p:spPr>
         <p:txBody>
-          <a:bodyPr wrap="square" lIns="0" rIns="0" tIns="0" bIns="0" anchor="t">
+          <a:bodyPr wrap="square" lIns="0" tIns="0" rIns="0" bIns="0" anchor="t">
             <a:spAutoFit/>
           </a:bodyPr>
           <a:lstStyle/>
@@ -17444,7 +19223,7 @@
           <a:noFill/>
         </p:spPr>
         <p:txBody>
-          <a:bodyPr wrap="square" lIns="0" rIns="0" tIns="0" bIns="0" anchor="t">
+          <a:bodyPr wrap="square" lIns="0" tIns="0" rIns="0" bIns="0" anchor="t">
             <a:spAutoFit/>
           </a:bodyPr>
           <a:lstStyle/>
@@ -17486,7 +19265,7 @@
           <a:noFill/>
         </p:spPr>
         <p:txBody>
-          <a:bodyPr wrap="square" lIns="0" rIns="0" tIns="0" bIns="0" anchor="t">
+          <a:bodyPr wrap="square" lIns="0" tIns="0" rIns="0" bIns="0" anchor="t">
             <a:spAutoFit/>
           </a:bodyPr>
           <a:lstStyle/>
@@ -17564,7 +19343,7 @@
           <a:noFill/>
         </p:spPr>
         <p:txBody>
-          <a:bodyPr wrap="square" lIns="0" rIns="0" tIns="0" bIns="0" anchor="t">
+          <a:bodyPr wrap="square" lIns="0" tIns="0" rIns="0" bIns="0" anchor="t">
             <a:spAutoFit/>
           </a:bodyPr>
           <a:lstStyle/>
@@ -17606,7 +19385,7 @@
           <a:noFill/>
         </p:spPr>
         <p:txBody>
-          <a:bodyPr wrap="square" lIns="0" rIns="0" tIns="0" bIns="0" anchor="t">
+          <a:bodyPr wrap="square" lIns="0" tIns="0" rIns="0" bIns="0" anchor="t">
             <a:spAutoFit/>
           </a:bodyPr>
           <a:lstStyle/>
@@ -17706,7 +19485,9 @@
         <p:txBody>
           <a:bodyPr rtlCol="0" anchor="ctr"/>
           <a:lstStyle/>
-          <a:p/>
+          <a:p>
+            <a:endParaRPr/>
+          </a:p>
         </p:txBody>
       </p:sp>
       <p:sp>
@@ -17726,7 +19507,7 @@
           <a:noFill/>
         </p:spPr>
         <p:txBody>
-          <a:bodyPr wrap="square" lIns="0" rIns="0" tIns="0" bIns="0" anchor="t">
+          <a:bodyPr wrap="square" lIns="0" tIns="0" rIns="0" bIns="0" anchor="t">
             <a:spAutoFit/>
           </a:bodyPr>
           <a:lstStyle/>
@@ -17768,7 +19549,7 @@
           <a:noFill/>
         </p:spPr>
         <p:txBody>
-          <a:bodyPr wrap="square" lIns="0" rIns="0" tIns="0" bIns="0" anchor="t">
+          <a:bodyPr wrap="square" lIns="0" tIns="0" rIns="0" bIns="0" anchor="t">
             <a:spAutoFit/>
           </a:bodyPr>
           <a:lstStyle/>
@@ -17804,15 +19585,15 @@
         <p:spPr>
           <a:xfrm>
             <a:off x="822960" y="5669280"/>
-            <a:ext cx="10545775" cy="457200"/>
-          </a:xfrm>
-          <a:prstGeom prst="rect">
-            <a:avLst/>
-          </a:prstGeom>
-          <a:noFill/>
-        </p:spPr>
-        <p:txBody>
-          <a:bodyPr wrap="square" lIns="0" rIns="0" tIns="0" bIns="0" anchor="t">
+            <a:ext cx="10545775" cy="383951"/>
+          </a:xfrm>
+          <a:prstGeom prst="rect">
+            <a:avLst/>
+          </a:prstGeom>
+          <a:noFill/>
+        </p:spPr>
+        <p:txBody>
+          <a:bodyPr wrap="square" lIns="0" tIns="0" rIns="0" bIns="0" anchor="t">
             <a:spAutoFit/>
           </a:bodyPr>
           <a:lstStyle/>
@@ -17826,13 +19607,310 @@
               </a:spcAft>
             </a:pPr>
             <a:r>
-              <a:rPr sz="1050" b="0" i="0">
+              <a:rPr sz="1050" b="0" i="0" dirty="0" err="1">
                 <a:solidFill>
                   <a:srgbClr val="8A8F98"/>
                 </a:solidFill>
                 <a:latin typeface="Segoe UI"/>
               </a:rPr>
-              <a:t>Enfoque equivalente al de PaDiM, PatchCore o SPADE del banco de pruebas MVTec AD, en una versión ligera: un vector por pieza en lugar de un banco de parches, para poder ejecutarse sin tarjeta gráfica.</a:t>
+              <a:t>Enfoque</a:t>
+            </a:r>
+            <a:r>
+              <a:rPr sz="1050" b="0" i="0" dirty="0">
+                <a:solidFill>
+                  <a:srgbClr val="8A8F98"/>
+                </a:solidFill>
+                <a:latin typeface="Segoe UI"/>
+              </a:rPr>
+              <a:t> </a:t>
+            </a:r>
+            <a:r>
+              <a:rPr sz="1050" b="0" i="0" dirty="0" err="1">
+                <a:solidFill>
+                  <a:srgbClr val="8A8F98"/>
+                </a:solidFill>
+                <a:latin typeface="Segoe UI"/>
+              </a:rPr>
+              <a:t>equivalente</a:t>
+            </a:r>
+            <a:r>
+              <a:rPr sz="1050" b="0" i="0" dirty="0">
+                <a:solidFill>
+                  <a:srgbClr val="8A8F98"/>
+                </a:solidFill>
+                <a:latin typeface="Segoe UI"/>
+              </a:rPr>
+              <a:t> al de </a:t>
+            </a:r>
+            <a:r>
+              <a:rPr sz="1050" b="0" i="0" dirty="0" err="1">
+                <a:solidFill>
+                  <a:srgbClr val="8A8F98"/>
+                </a:solidFill>
+                <a:latin typeface="Segoe UI"/>
+              </a:rPr>
+              <a:t>PaDiM</a:t>
+            </a:r>
+            <a:r>
+              <a:rPr sz="1050" b="0" i="0" dirty="0">
+                <a:solidFill>
+                  <a:srgbClr val="8A8F98"/>
+                </a:solidFill>
+                <a:latin typeface="Segoe UI"/>
+              </a:rPr>
+              <a:t>, </a:t>
+            </a:r>
+            <a:r>
+              <a:rPr sz="1050" b="0" i="0" dirty="0" err="1">
+                <a:solidFill>
+                  <a:srgbClr val="8A8F98"/>
+                </a:solidFill>
+                <a:latin typeface="Segoe UI"/>
+              </a:rPr>
+              <a:t>PatchCore</a:t>
+            </a:r>
+            <a:r>
+              <a:rPr sz="1050" b="0" i="0" dirty="0">
+                <a:solidFill>
+                  <a:srgbClr val="8A8F98"/>
+                </a:solidFill>
+                <a:latin typeface="Segoe UI"/>
+              </a:rPr>
+              <a:t> o SPADE del banco de </a:t>
+            </a:r>
+            <a:r>
+              <a:rPr sz="1050" b="0" i="0" dirty="0" err="1">
+                <a:solidFill>
+                  <a:srgbClr val="8A8F98"/>
+                </a:solidFill>
+                <a:latin typeface="Segoe UI"/>
+              </a:rPr>
+              <a:t>pruebas</a:t>
+            </a:r>
+            <a:r>
+              <a:rPr sz="1050" b="0" i="0" dirty="0">
+                <a:solidFill>
+                  <a:srgbClr val="8A8F98"/>
+                </a:solidFill>
+                <a:latin typeface="Segoe UI"/>
+              </a:rPr>
+              <a:t> </a:t>
+            </a:r>
+            <a:r>
+              <a:rPr sz="1050" b="0" i="0" dirty="0" err="1">
+                <a:solidFill>
+                  <a:srgbClr val="8A8F98"/>
+                </a:solidFill>
+                <a:latin typeface="Segoe UI"/>
+              </a:rPr>
+              <a:t>MVTec</a:t>
+            </a:r>
+            <a:r>
+              <a:rPr sz="1050" b="0" i="0" dirty="0">
+                <a:solidFill>
+                  <a:srgbClr val="8A8F98"/>
+                </a:solidFill>
+                <a:latin typeface="Segoe UI"/>
+              </a:rPr>
+              <a:t> AD, </a:t>
+            </a:r>
+            <a:r>
+              <a:rPr sz="1050" b="0" i="0" dirty="0" err="1">
+                <a:solidFill>
+                  <a:srgbClr val="8A8F98"/>
+                </a:solidFill>
+                <a:latin typeface="Segoe UI"/>
+              </a:rPr>
+              <a:t>en</a:t>
+            </a:r>
+            <a:r>
+              <a:rPr sz="1050" b="0" i="0" dirty="0">
+                <a:solidFill>
+                  <a:srgbClr val="8A8F98"/>
+                </a:solidFill>
+                <a:latin typeface="Segoe UI"/>
+              </a:rPr>
+              <a:t> </a:t>
+            </a:r>
+            <a:r>
+              <a:rPr sz="1050" b="0" i="0" dirty="0" err="1">
+                <a:solidFill>
+                  <a:srgbClr val="8A8F98"/>
+                </a:solidFill>
+                <a:latin typeface="Segoe UI"/>
+              </a:rPr>
+              <a:t>una</a:t>
+            </a:r>
+            <a:r>
+              <a:rPr sz="1050" b="0" i="0" dirty="0">
+                <a:solidFill>
+                  <a:srgbClr val="8A8F98"/>
+                </a:solidFill>
+                <a:latin typeface="Segoe UI"/>
+              </a:rPr>
+              <a:t> </a:t>
+            </a:r>
+            <a:r>
+              <a:rPr sz="1050" b="0" i="0" dirty="0" err="1">
+                <a:solidFill>
+                  <a:srgbClr val="8A8F98"/>
+                </a:solidFill>
+                <a:latin typeface="Segoe UI"/>
+              </a:rPr>
+              <a:t>versión</a:t>
+            </a:r>
+            <a:r>
+              <a:rPr sz="1050" b="0" i="0" dirty="0">
+                <a:solidFill>
+                  <a:srgbClr val="8A8F98"/>
+                </a:solidFill>
+                <a:latin typeface="Segoe UI"/>
+              </a:rPr>
+              <a:t> </a:t>
+            </a:r>
+            <a:r>
+              <a:rPr sz="1050" b="0" i="0" dirty="0" err="1">
+                <a:solidFill>
+                  <a:srgbClr val="8A8F98"/>
+                </a:solidFill>
+                <a:latin typeface="Segoe UI"/>
+              </a:rPr>
+              <a:t>ligera</a:t>
+            </a:r>
+            <a:r>
+              <a:rPr sz="1050" b="0" i="0" dirty="0">
+                <a:solidFill>
+                  <a:srgbClr val="8A8F98"/>
+                </a:solidFill>
+                <a:latin typeface="Segoe UI"/>
+              </a:rPr>
+              <a:t>: un vector </a:t>
+            </a:r>
+            <a:r>
+              <a:rPr sz="1050" b="0" i="0" dirty="0" err="1">
+                <a:solidFill>
+                  <a:srgbClr val="8A8F98"/>
+                </a:solidFill>
+                <a:latin typeface="Segoe UI"/>
+              </a:rPr>
+              <a:t>por</a:t>
+            </a:r>
+            <a:r>
+              <a:rPr sz="1050" b="0" i="0" dirty="0">
+                <a:solidFill>
+                  <a:srgbClr val="8A8F98"/>
+                </a:solidFill>
+                <a:latin typeface="Segoe UI"/>
+              </a:rPr>
+              <a:t> </a:t>
+            </a:r>
+            <a:r>
+              <a:rPr sz="1050" b="0" i="0" dirty="0" err="1">
+                <a:solidFill>
+                  <a:srgbClr val="8A8F98"/>
+                </a:solidFill>
+                <a:latin typeface="Segoe UI"/>
+              </a:rPr>
+              <a:t>pieza</a:t>
+            </a:r>
+            <a:r>
+              <a:rPr sz="1050" b="0" i="0" dirty="0">
+                <a:solidFill>
+                  <a:srgbClr val="8A8F98"/>
+                </a:solidFill>
+                <a:latin typeface="Segoe UI"/>
+              </a:rPr>
+              <a:t> </a:t>
+            </a:r>
+            <a:r>
+              <a:rPr sz="1050" b="0" i="0" dirty="0" err="1">
+                <a:solidFill>
+                  <a:srgbClr val="8A8F98"/>
+                </a:solidFill>
+                <a:latin typeface="Segoe UI"/>
+              </a:rPr>
+              <a:t>en</a:t>
+            </a:r>
+            <a:r>
+              <a:rPr sz="1050" b="0" i="0" dirty="0">
+                <a:solidFill>
+                  <a:srgbClr val="8A8F98"/>
+                </a:solidFill>
+                <a:latin typeface="Segoe UI"/>
+              </a:rPr>
+              <a:t> </a:t>
+            </a:r>
+            <a:r>
+              <a:rPr sz="1050" b="0" i="0" dirty="0" err="1">
+                <a:solidFill>
+                  <a:srgbClr val="8A8F98"/>
+                </a:solidFill>
+                <a:latin typeface="Segoe UI"/>
+              </a:rPr>
+              <a:t>lugar</a:t>
+            </a:r>
+            <a:r>
+              <a:rPr sz="1050" b="0" i="0" dirty="0">
+                <a:solidFill>
+                  <a:srgbClr val="8A8F98"/>
+                </a:solidFill>
+                <a:latin typeface="Segoe UI"/>
+              </a:rPr>
+              <a:t> de un banco de parches, para </a:t>
+            </a:r>
+            <a:r>
+              <a:rPr sz="1050" b="0" i="0" dirty="0" err="1">
+                <a:solidFill>
+                  <a:srgbClr val="8A8F98"/>
+                </a:solidFill>
+                <a:latin typeface="Segoe UI"/>
+              </a:rPr>
+              <a:t>poder</a:t>
+            </a:r>
+            <a:r>
+              <a:rPr sz="1050" b="0" i="0" dirty="0">
+                <a:solidFill>
+                  <a:srgbClr val="8A8F98"/>
+                </a:solidFill>
+                <a:latin typeface="Segoe UI"/>
+              </a:rPr>
+              <a:t> </a:t>
+            </a:r>
+            <a:r>
+              <a:rPr sz="1050" b="0" i="0" dirty="0" err="1">
+                <a:solidFill>
+                  <a:srgbClr val="8A8F98"/>
+                </a:solidFill>
+                <a:latin typeface="Segoe UI"/>
+              </a:rPr>
+              <a:t>ejecutarse</a:t>
+            </a:r>
+            <a:r>
+              <a:rPr sz="1050" b="0" i="0" dirty="0">
+                <a:solidFill>
+                  <a:srgbClr val="8A8F98"/>
+                </a:solidFill>
+                <a:latin typeface="Segoe UI"/>
+              </a:rPr>
+              <a:t> </a:t>
+            </a:r>
+            <a:r>
+              <a:rPr lang="es-MX" sz="1050" b="0" i="0" dirty="0">
+                <a:solidFill>
+                  <a:srgbClr val="8A8F98"/>
+                </a:solidFill>
+                <a:latin typeface="Segoe UI"/>
+              </a:rPr>
+              <a:t>ligeramente</a:t>
+            </a:r>
+            <a:r>
+              <a:rPr sz="1050" b="0" i="0" dirty="0">
+                <a:solidFill>
+                  <a:srgbClr val="8A8F98"/>
+                </a:solidFill>
+                <a:latin typeface="Segoe UI"/>
+              </a:rPr>
+              <a:t>.</a:t>
             </a:r>
           </a:p>
         </p:txBody>
@@ -17854,7 +19932,7 @@
           <a:noFill/>
         </p:spPr>
         <p:txBody>
-          <a:bodyPr wrap="square" lIns="0" rIns="0" tIns="0" bIns="0" anchor="t">
+          <a:bodyPr wrap="square" lIns="0" tIns="0" rIns="0" bIns="0" anchor="t">
             <a:spAutoFit/>
           </a:bodyPr>
           <a:lstStyle/>
@@ -17896,7 +19974,7 @@
           <a:noFill/>
         </p:spPr>
         <p:txBody>
-          <a:bodyPr wrap="square" lIns="0" rIns="0" tIns="0" bIns="0" anchor="t">
+          <a:bodyPr wrap="square" lIns="0" tIns="0" rIns="0" bIns="0" anchor="t">
             <a:spAutoFit/>
           </a:bodyPr>
           <a:lstStyle/>
@@ -17930,7 +20008,7 @@
 </file>
 
 <file path=ppt/slides/slide8.xml><?xml version="1.0" encoding="utf-8"?>
-<p:sld xmlns:a="http://schemas.openxmlformats.org/drawingml/2006/main" xmlns:p="http://schemas.openxmlformats.org/presentationml/2006/main" xmlns:r="http://schemas.openxmlformats.org/officeDocument/2006/relationships">
+<p:sld xmlns:a="http://schemas.openxmlformats.org/drawingml/2006/main" xmlns:r="http://schemas.openxmlformats.org/officeDocument/2006/relationships" xmlns:p="http://schemas.openxmlformats.org/presentationml/2006/main">
   <p:cSld>
     <p:bg>
       <p:bgPr>
@@ -17946,7 +20024,14 @@
         <p:cNvGrpSpPr/>
         <p:nvPr/>
       </p:nvGrpSpPr>
-      <p:grpSpPr/>
+      <p:grpSpPr>
+        <a:xfrm>
+          <a:off x="0" y="0"/>
+          <a:ext cx="0" cy="0"/>
+          <a:chOff x="0" y="0"/>
+          <a:chExt cx="0" cy="0"/>
+        </a:xfrm>
+      </p:grpSpPr>
       <p:sp>
         <p:nvSpPr>
           <p:cNvPr id="2" name="TextBox 1"/>
@@ -17964,7 +20049,7 @@
           <a:noFill/>
         </p:spPr>
         <p:txBody>
-          <a:bodyPr wrap="square" lIns="0" rIns="0" tIns="0" bIns="0" anchor="t">
+          <a:bodyPr wrap="square" lIns="0" tIns="0" rIns="0" bIns="0" anchor="t">
             <a:spAutoFit/>
           </a:bodyPr>
           <a:lstStyle/>
@@ -18006,7 +20091,7 @@
           <a:noFill/>
         </p:spPr>
         <p:txBody>
-          <a:bodyPr wrap="square" lIns="0" rIns="0" tIns="0" bIns="0" anchor="t">
+          <a:bodyPr wrap="square" lIns="0" tIns="0" rIns="0" bIns="0" anchor="t">
             <a:spAutoFit/>
           </a:bodyPr>
           <a:lstStyle/>
@@ -18084,7 +20169,7 @@
           <a:noFill/>
         </p:spPr>
         <p:txBody>
-          <a:bodyPr wrap="square" lIns="0" rIns="0" tIns="0" bIns="0" anchor="t">
+          <a:bodyPr wrap="square" lIns="0" tIns="0" rIns="0" bIns="0" anchor="t">
             <a:spAutoFit/>
           </a:bodyPr>
           <a:lstStyle/>
@@ -18148,7 +20233,9 @@
         <p:txBody>
           <a:bodyPr rtlCol="0" anchor="ctr"/>
           <a:lstStyle/>
-          <a:p/>
+          <a:p>
+            <a:endParaRPr/>
+          </a:p>
         </p:txBody>
       </p:sp>
       <p:sp>
@@ -18168,7 +20255,7 @@
           <a:noFill/>
         </p:spPr>
         <p:txBody>
-          <a:bodyPr wrap="square" lIns="0" rIns="0" tIns="0" bIns="0" anchor="t">
+          <a:bodyPr wrap="square" lIns="0" tIns="0" rIns="0" bIns="0" anchor="t">
             <a:spAutoFit/>
           </a:bodyPr>
           <a:lstStyle/>
@@ -18210,7 +20297,7 @@
           <a:noFill/>
         </p:spPr>
         <p:txBody>
-          <a:bodyPr wrap="square" lIns="0" rIns="0" tIns="0" bIns="0" anchor="t">
+          <a:bodyPr wrap="square" lIns="0" tIns="0" rIns="0" bIns="0" anchor="t">
             <a:spAutoFit/>
           </a:bodyPr>
           <a:lstStyle/>
@@ -18274,7 +20361,9 @@
         <p:txBody>
           <a:bodyPr rtlCol="0" anchor="ctr"/>
           <a:lstStyle/>
-          <a:p/>
+          <a:p>
+            <a:endParaRPr/>
+          </a:p>
         </p:txBody>
       </p:sp>
       <p:sp>
@@ -18294,7 +20383,7 @@
           <a:noFill/>
         </p:spPr>
         <p:txBody>
-          <a:bodyPr wrap="square" lIns="0" rIns="0" tIns="0" bIns="0" anchor="t">
+          <a:bodyPr wrap="square" lIns="0" tIns="0" rIns="0" bIns="0" anchor="t">
             <a:spAutoFit/>
           </a:bodyPr>
           <a:lstStyle/>
@@ -18336,7 +20425,7 @@
           <a:noFill/>
         </p:spPr>
         <p:txBody>
-          <a:bodyPr wrap="square" lIns="0" rIns="0" tIns="0" bIns="0" anchor="t">
+          <a:bodyPr wrap="square" lIns="0" tIns="0" rIns="0" bIns="0" anchor="t">
             <a:spAutoFit/>
           </a:bodyPr>
           <a:lstStyle/>
@@ -18400,7 +20489,9 @@
         <p:txBody>
           <a:bodyPr rtlCol="0" anchor="ctr"/>
           <a:lstStyle/>
-          <a:p/>
+          <a:p>
+            <a:endParaRPr/>
+          </a:p>
         </p:txBody>
       </p:sp>
       <p:sp>
@@ -18420,7 +20511,7 @@
           <a:noFill/>
         </p:spPr>
         <p:txBody>
-          <a:bodyPr wrap="square" lIns="0" rIns="0" tIns="0" bIns="0" anchor="t">
+          <a:bodyPr wrap="square" lIns="0" tIns="0" rIns="0" bIns="0" anchor="t">
             <a:spAutoFit/>
           </a:bodyPr>
           <a:lstStyle/>
@@ -18462,7 +20553,7 @@
           <a:noFill/>
         </p:spPr>
         <p:txBody>
-          <a:bodyPr wrap="square" lIns="0" rIns="0" tIns="0" bIns="0" anchor="t">
+          <a:bodyPr wrap="square" lIns="0" tIns="0" rIns="0" bIns="0" anchor="t">
             <a:spAutoFit/>
           </a:bodyPr>
           <a:lstStyle/>
@@ -18504,7 +20595,7 @@
           <a:noFill/>
         </p:spPr>
         <p:txBody>
-          <a:bodyPr wrap="square" lIns="0" rIns="0" tIns="0" bIns="0" anchor="t">
+          <a:bodyPr wrap="square" lIns="0" tIns="0" rIns="0" bIns="0" anchor="t">
             <a:spAutoFit/>
           </a:bodyPr>
           <a:lstStyle/>
@@ -18546,7 +20637,7 @@
           <a:noFill/>
         </p:spPr>
         <p:txBody>
-          <a:bodyPr wrap="square" lIns="0" rIns="0" tIns="0" bIns="0" anchor="t">
+          <a:bodyPr wrap="square" lIns="0" tIns="0" rIns="0" bIns="0" anchor="t">
             <a:spAutoFit/>
           </a:bodyPr>
           <a:lstStyle/>
@@ -18624,7 +20715,7 @@
           <a:noFill/>
         </p:spPr>
         <p:txBody>
-          <a:bodyPr wrap="square" lIns="0" rIns="0" tIns="0" bIns="0" anchor="t">
+          <a:bodyPr wrap="square" lIns="0" tIns="0" rIns="0" bIns="0" anchor="t">
             <a:spAutoFit/>
           </a:bodyPr>
           <a:lstStyle/>
@@ -18666,7 +20757,7 @@
           <a:noFill/>
         </p:spPr>
         <p:txBody>
-          <a:bodyPr wrap="square" lIns="0" rIns="0" tIns="0" bIns="0" anchor="t">
+          <a:bodyPr wrap="square" lIns="0" tIns="0" rIns="0" bIns="0" anchor="t">
             <a:spAutoFit/>
           </a:bodyPr>
           <a:lstStyle/>
@@ -18744,7 +20835,7 @@
           <a:noFill/>
         </p:spPr>
         <p:txBody>
-          <a:bodyPr wrap="square" lIns="0" rIns="0" tIns="0" bIns="0" anchor="t">
+          <a:bodyPr wrap="square" lIns="0" tIns="0" rIns="0" bIns="0" anchor="t">
             <a:spAutoFit/>
           </a:bodyPr>
           <a:lstStyle/>
@@ -18786,7 +20877,7 @@
           <a:noFill/>
         </p:spPr>
         <p:txBody>
-          <a:bodyPr wrap="square" lIns="0" rIns="0" tIns="0" bIns="0" anchor="t">
+          <a:bodyPr wrap="square" lIns="0" tIns="0" rIns="0" bIns="0" anchor="t">
             <a:spAutoFit/>
           </a:bodyPr>
           <a:lstStyle/>
@@ -18864,7 +20955,7 @@
           <a:noFill/>
         </p:spPr>
         <p:txBody>
-          <a:bodyPr wrap="square" lIns="0" rIns="0" tIns="0" bIns="0" anchor="t">
+          <a:bodyPr wrap="square" lIns="0" tIns="0" rIns="0" bIns="0" anchor="t">
             <a:spAutoFit/>
           </a:bodyPr>
           <a:lstStyle/>
@@ -18906,7 +20997,7 @@
           <a:noFill/>
         </p:spPr>
         <p:txBody>
-          <a:bodyPr wrap="square" lIns="0" rIns="0" tIns="0" bIns="0" anchor="t">
+          <a:bodyPr wrap="square" lIns="0" tIns="0" rIns="0" bIns="0" anchor="t">
             <a:spAutoFit/>
           </a:bodyPr>
           <a:lstStyle/>
@@ -18940,7 +21031,7 @@
 </file>
 
 <file path=ppt/slides/slide9.xml><?xml version="1.0" encoding="utf-8"?>
-<p:sld xmlns:a="http://schemas.openxmlformats.org/drawingml/2006/main" xmlns:p="http://schemas.openxmlformats.org/presentationml/2006/main" xmlns:r="http://schemas.openxmlformats.org/officeDocument/2006/relationships">
+<p:sld xmlns:a="http://schemas.openxmlformats.org/drawingml/2006/main" xmlns:r="http://schemas.openxmlformats.org/officeDocument/2006/relationships" xmlns:p="http://schemas.openxmlformats.org/presentationml/2006/main">
   <p:cSld>
     <p:bg>
       <p:bgPr>
@@ -18956,7 +21047,14 @@
         <p:cNvGrpSpPr/>
         <p:nvPr/>
       </p:nvGrpSpPr>
-      <p:grpSpPr/>
+      <p:grpSpPr>
+        <a:xfrm>
+          <a:off x="0" y="0"/>
+          <a:ext cx="0" cy="0"/>
+          <a:chOff x="0" y="0"/>
+          <a:chExt cx="0" cy="0"/>
+        </a:xfrm>
+      </p:grpSpPr>
       <p:sp>
         <p:nvSpPr>
           <p:cNvPr id="2" name="TextBox 1"/>
@@ -18974,7 +21072,7 @@
           <a:noFill/>
         </p:spPr>
         <p:txBody>
-          <a:bodyPr wrap="square" lIns="0" rIns="0" tIns="0" bIns="0" anchor="t">
+          <a:bodyPr wrap="square" lIns="0" tIns="0" rIns="0" bIns="0" anchor="t">
             <a:spAutoFit/>
           </a:bodyPr>
           <a:lstStyle/>
@@ -19016,7 +21114,7 @@
           <a:noFill/>
         </p:spPr>
         <p:txBody>
-          <a:bodyPr wrap="square" lIns="0" rIns="0" tIns="0" bIns="0" anchor="t">
+          <a:bodyPr wrap="square" lIns="0" tIns="0" rIns="0" bIns="0" anchor="t">
             <a:spAutoFit/>
           </a:bodyPr>
           <a:lstStyle/>
@@ -19094,7 +21192,7 @@
           <a:noFill/>
         </p:spPr>
         <p:txBody>
-          <a:bodyPr wrap="square" lIns="0" rIns="0" tIns="0" bIns="0" anchor="t">
+          <a:bodyPr wrap="square" lIns="0" tIns="0" rIns="0" bIns="0" anchor="t">
             <a:spAutoFit/>
           </a:bodyPr>
           <a:lstStyle/>
@@ -19136,7 +21234,7 @@
           <a:noFill/>
         </p:spPr>
         <p:txBody>
-          <a:bodyPr wrap="square" lIns="0" rIns="0" tIns="0" bIns="0" anchor="t">
+          <a:bodyPr wrap="square" lIns="0" tIns="0" rIns="0" bIns="0" anchor="t">
             <a:spAutoFit/>
           </a:bodyPr>
           <a:lstStyle/>
@@ -19178,7 +21276,7 @@
           <a:noFill/>
         </p:spPr>
         <p:txBody>
-          <a:bodyPr wrap="square" lIns="0" rIns="0" tIns="0" bIns="0" anchor="t">
+          <a:bodyPr wrap="square" lIns="0" tIns="0" rIns="0" bIns="0" anchor="t">
             <a:spAutoFit/>
           </a:bodyPr>
           <a:lstStyle/>
@@ -19220,7 +21318,7 @@
           <a:noFill/>
         </p:spPr>
         <p:txBody>
-          <a:bodyPr wrap="square" lIns="0" rIns="0" tIns="0" bIns="0" anchor="t">
+          <a:bodyPr wrap="square" lIns="0" tIns="0" rIns="0" bIns="0" anchor="t">
             <a:spAutoFit/>
           </a:bodyPr>
           <a:lstStyle/>
@@ -19262,7 +21360,7 @@
           <a:noFill/>
         </p:spPr>
         <p:txBody>
-          <a:bodyPr wrap="square" lIns="0" rIns="0" tIns="0" bIns="0" anchor="t">
+          <a:bodyPr wrap="square" lIns="0" tIns="0" rIns="0" bIns="0" anchor="t">
             <a:spAutoFit/>
           </a:bodyPr>
           <a:lstStyle/>
@@ -19304,7 +21402,7 @@
           <a:noFill/>
         </p:spPr>
         <p:txBody>
-          <a:bodyPr wrap="square" lIns="0" rIns="0" tIns="0" bIns="0" anchor="t">
+          <a:bodyPr wrap="square" lIns="0" tIns="0" rIns="0" bIns="0" anchor="t">
             <a:spAutoFit/>
           </a:bodyPr>
           <a:lstStyle/>
@@ -19346,7 +21444,7 @@
           <a:noFill/>
         </p:spPr>
         <p:txBody>
-          <a:bodyPr wrap="square" lIns="0" rIns="0" tIns="0" bIns="0" anchor="t">
+          <a:bodyPr wrap="square" lIns="0" tIns="0" rIns="0" bIns="0" anchor="t">
             <a:spAutoFit/>
           </a:bodyPr>
           <a:lstStyle/>
@@ -19388,7 +21486,7 @@
           <a:noFill/>
         </p:spPr>
         <p:txBody>
-          <a:bodyPr wrap="square" lIns="0" rIns="0" tIns="0" bIns="0" anchor="t">
+          <a:bodyPr wrap="square" lIns="0" tIns="0" rIns="0" bIns="0" anchor="t">
             <a:spAutoFit/>
           </a:bodyPr>
           <a:lstStyle/>
@@ -19430,7 +21528,7 @@
           <a:noFill/>
         </p:spPr>
         <p:txBody>
-          <a:bodyPr wrap="square" lIns="0" rIns="0" tIns="0" bIns="0" anchor="t">
+          <a:bodyPr wrap="square" lIns="0" tIns="0" rIns="0" bIns="0" anchor="t">
             <a:spAutoFit/>
           </a:bodyPr>
           <a:lstStyle/>
@@ -19472,7 +21570,7 @@
           <a:noFill/>
         </p:spPr>
         <p:txBody>
-          <a:bodyPr wrap="square" lIns="0" rIns="0" tIns="0" bIns="0" anchor="t">
+          <a:bodyPr wrap="square" lIns="0" tIns="0" rIns="0" bIns="0" anchor="t">
             <a:spAutoFit/>
           </a:bodyPr>
           <a:lstStyle/>
@@ -19514,7 +21612,7 @@
           <a:noFill/>
         </p:spPr>
         <p:txBody>
-          <a:bodyPr wrap="square" lIns="0" rIns="0" tIns="0" bIns="0" anchor="t">
+          <a:bodyPr wrap="square" lIns="0" tIns="0" rIns="0" bIns="0" anchor="t">
             <a:spAutoFit/>
           </a:bodyPr>
           <a:lstStyle/>
@@ -19556,7 +21654,7 @@
           <a:noFill/>
         </p:spPr>
         <p:txBody>
-          <a:bodyPr wrap="square" lIns="0" rIns="0" tIns="0" bIns="0" anchor="t">
+          <a:bodyPr wrap="square" lIns="0" tIns="0" rIns="0" bIns="0" anchor="t">
             <a:spAutoFit/>
           </a:bodyPr>
           <a:lstStyle/>
@@ -19598,7 +21696,7 @@
           <a:noFill/>
         </p:spPr>
         <p:txBody>
-          <a:bodyPr wrap="square" lIns="0" rIns="0" tIns="0" bIns="0" anchor="t">
+          <a:bodyPr wrap="square" lIns="0" tIns="0" rIns="0" bIns="0" anchor="t">
             <a:spAutoFit/>
           </a:bodyPr>
           <a:lstStyle/>
@@ -19640,7 +21738,7 @@
           <a:noFill/>
         </p:spPr>
         <p:txBody>
-          <a:bodyPr wrap="square" lIns="0" rIns="0" tIns="0" bIns="0" anchor="t">
+          <a:bodyPr wrap="square" lIns="0" tIns="0" rIns="0" bIns="0" anchor="t">
             <a:spAutoFit/>
           </a:bodyPr>
           <a:lstStyle/>
@@ -19682,7 +21780,7 @@
           <a:noFill/>
         </p:spPr>
         <p:txBody>
-          <a:bodyPr wrap="square" lIns="0" rIns="0" tIns="0" bIns="0" anchor="t">
+          <a:bodyPr wrap="square" lIns="0" tIns="0" rIns="0" bIns="0" anchor="t">
             <a:spAutoFit/>
           </a:bodyPr>
           <a:lstStyle/>
@@ -19753,7 +21851,7 @@
           <a:noFill/>
         </p:spPr>
         <p:txBody>
-          <a:bodyPr wrap="square" lIns="0" rIns="0" tIns="0" bIns="0" anchor="t">
+          <a:bodyPr wrap="square" lIns="0" tIns="0" rIns="0" bIns="0" anchor="t">
             <a:spAutoFit/>
           </a:bodyPr>
           <a:lstStyle/>
@@ -19795,7 +21893,7 @@
           <a:noFill/>
         </p:spPr>
         <p:txBody>
-          <a:bodyPr wrap="square" lIns="0" rIns="0" tIns="0" bIns="0" anchor="t">
+          <a:bodyPr wrap="square" lIns="0" tIns="0" rIns="0" bIns="0" anchor="t">
             <a:spAutoFit/>
           </a:bodyPr>
           <a:lstStyle/>
@@ -19837,7 +21935,7 @@
           <a:noFill/>
         </p:spPr>
         <p:txBody>
-          <a:bodyPr wrap="square" lIns="0" rIns="0" tIns="0" bIns="0" anchor="t">
+          <a:bodyPr wrap="square" lIns="0" tIns="0" rIns="0" bIns="0" anchor="t">
             <a:spAutoFit/>
           </a:bodyPr>
           <a:lstStyle/>
